--- a/media/exports/reports/2026-01/growth.pptx
+++ b/media/exports/reports/2026-01/growth.pptx
@@ -370,7 +370,9 @@
     <a:lstStyle/>
     <a:p>
       <a:pPr>
-        <a:defRPr sz="1800"/>
+        <a:defRPr sz="1800">
+          <a:latin typeface="Roboto"/>
+        </a:defRPr>
       </a:pPr>
       <a:endParaRPr/>
     </a:p>
@@ -618,7 +620,9 @@
     <a:lstStyle/>
     <a:p>
       <a:pPr>
-        <a:defRPr sz="1800"/>
+        <a:defRPr sz="1800">
+          <a:latin typeface="Roboto"/>
+        </a:defRPr>
       </a:pPr>
       <a:endParaRPr/>
     </a:p>
@@ -866,7 +870,9 @@
     <a:lstStyle/>
     <a:p>
       <a:pPr>
-        <a:defRPr sz="1800"/>
+        <a:defRPr sz="1800">
+          <a:latin typeface="Roboto"/>
+        </a:defRPr>
       </a:pPr>
       <a:endParaRPr/>
     </a:p>
@@ -1114,7 +1120,9 @@
     <a:lstStyle/>
     <a:p>
       <a:pPr>
-        <a:defRPr sz="1800"/>
+        <a:defRPr sz="1800">
+          <a:latin typeface="Roboto"/>
+        </a:defRPr>
       </a:pPr>
       <a:endParaRPr/>
     </a:p>
@@ -4145,11 +4153,17 @@
           <a:bodyPr rtlCol="0" anchor="ctr"/>
           <a:lstStyle/>
           <a:p>
+            <a:pPr>
+              <a:defRPr>
+                <a:latin typeface="Roboto"/>
+              </a:defRPr>
+            </a:pPr>
             <a:r>
               <a:rPr sz="1600" b="1">
                 <a:solidFill>
                   <a:srgbClr val="FFFFFF"/>
                 </a:solidFill>
+                <a:latin typeface="Roboto"/>
               </a:rPr>
               <a:t>4th</a:t>
             </a:r>
@@ -4178,14 +4192,19 @@
           </a:bodyPr>
           <a:lstStyle/>
           <a:p>
+            <a:pPr>
+              <a:defRPr>
+                <a:latin typeface="Roboto"/>
+              </a:defRPr>
+            </a:pPr>
             <a:r>
               <a:rPr sz="1800" b="1">
                 <a:solidFill>
                   <a:srgbClr val="25342A"/>
                 </a:solidFill>
-                <a:latin typeface="Arial"/>
-              </a:rPr>
-              <a:t>The 4th Sheet</a:t>
+                <a:latin typeface="Roboto"/>
+              </a:rPr>
+              <a:t>The Fourth Sheet</a:t>
             </a:r>
           </a:p>
         </p:txBody>
@@ -4212,12 +4231,17 @@
           </a:bodyPr>
           <a:lstStyle/>
           <a:p>
+            <a:pPr>
+              <a:defRPr>
+                <a:latin typeface="Roboto"/>
+              </a:defRPr>
+            </a:pPr>
             <a:r>
               <a:rPr sz="1100" b="1">
                 <a:solidFill>
                   <a:srgbClr val="8A7A52"/>
                 </a:solidFill>
-                <a:latin typeface="Arial"/>
+                <a:latin typeface="Roboto"/>
               </a:rPr>
               <a:t>SAMPLE DATA · invented figures for demonstration</a:t>
             </a:r>
@@ -4246,12 +4270,17 @@
           </a:bodyPr>
           <a:lstStyle/>
           <a:p>
+            <a:pPr>
+              <a:defRPr>
+                <a:latin typeface="Roboto"/>
+              </a:defRPr>
+            </a:pPr>
             <a:r>
               <a:rPr sz="3400" b="1">
                 <a:solidFill>
                   <a:srgbClr val="25342A"/>
                 </a:solidFill>
-                <a:latin typeface="Arial"/>
+                <a:latin typeface="Roboto"/>
               </a:rPr>
               <a:t>Which products and services are growing?</a:t>
             </a:r>
@@ -4280,12 +4309,17 @@
           </a:bodyPr>
           <a:lstStyle/>
           <a:p>
+            <a:pPr>
+              <a:defRPr>
+                <a:latin typeface="Roboto"/>
+              </a:defRPr>
+            </a:pPr>
             <a:r>
               <a:rPr sz="1600" b="0">
                 <a:solidFill>
                   <a:srgbClr val="5F6F63"/>
                 </a:solidFill>
-                <a:latin typeface="Arial"/>
+                <a:latin typeface="Roboto"/>
               </a:rPr>
               <a:t>SME sample businesses</a:t>
             </a:r>
@@ -4314,12 +4348,17 @@
           </a:bodyPr>
           <a:lstStyle/>
           <a:p>
+            <a:pPr>
+              <a:defRPr>
+                <a:latin typeface="Roboto"/>
+              </a:defRPr>
+            </a:pPr>
             <a:r>
               <a:rPr sz="1400" b="0">
                 <a:solidFill>
                   <a:srgbClr val="25342A"/>
                 </a:solidFill>
-                <a:latin typeface="Arial"/>
+                <a:latin typeface="Roboto"/>
               </a:rPr>
               <a:t>Period: January 2026. Revenue, gross margin and growth (year on year) by product or service line over 24 months. Pick a line and every number, chart and note follows it.</a:t>
             </a:r>
@@ -4348,45 +4387,65 @@
           </a:bodyPr>
           <a:lstStyle/>
           <a:p>
+            <a:pPr>
+              <a:defRPr>
+                <a:latin typeface="Roboto"/>
+              </a:defRPr>
+            </a:pPr>
             <a:r>
               <a:rPr sz="1100" b="0">
                 <a:solidFill>
                   <a:srgbClr val="5F6F63"/>
                 </a:solidFill>
-                <a:latin typeface="Arial"/>
+                <a:latin typeface="Roboto"/>
               </a:rPr>
               <a:t>How final is this data?</a:t>
             </a:r>
           </a:p>
           <a:p>
+            <a:pPr>
+              <a:defRPr>
+                <a:latin typeface="Roboto"/>
+              </a:defRPr>
+            </a:pPr>
             <a:r>
               <a:rPr sz="1100" b="0">
                 <a:solidFill>
                   <a:srgbClr val="5F6F63"/>
                 </a:solidFill>
-                <a:latin typeface="Arial"/>
+                <a:latin typeface="Roboto"/>
               </a:rPr>
               <a:t>December 2025: Locked. December 2025 is locked (closed 5 Jan 2026). These numbers won't change.</a:t>
             </a:r>
           </a:p>
           <a:p>
+            <a:pPr>
+              <a:defRPr>
+                <a:latin typeface="Roboto"/>
+              </a:defRPr>
+            </a:pPr>
             <a:r>
               <a:rPr sz="1100" b="0">
                 <a:solidFill>
                   <a:srgbClr val="5F6F63"/>
                 </a:solidFill>
-                <a:latin typeface="Arial"/>
+                <a:latin typeface="Roboto"/>
               </a:rPr>
               <a:t>January 2026: Locked. January 2026 is locked (closed 3 Feb 2026). These numbers won't change.</a:t>
             </a:r>
           </a:p>
           <a:p>
+            <a:pPr>
+              <a:defRPr>
+                <a:latin typeface="Roboto"/>
+              </a:defRPr>
+            </a:pPr>
             <a:r>
               <a:rPr sz="1100" b="0">
                 <a:solidFill>
                   <a:srgbClr val="5F6F63"/>
                 </a:solidFill>
-                <a:latin typeface="Arial"/>
+                <a:latin typeface="Roboto"/>
               </a:rPr>
               <a:t>October 2026: Incomplete. October 2026 is still in progress: figures to 6 Oct only.</a:t>
             </a:r>
@@ -4415,12 +4474,17 @@
           </a:bodyPr>
           <a:lstStyle/>
           <a:p>
+            <a:pPr>
+              <a:defRPr>
+                <a:latin typeface="Roboto"/>
+              </a:defRPr>
+            </a:pPr>
             <a:r>
               <a:rPr sz="900" b="0">
                 <a:solidFill>
                   <a:srgbClr val="5F6F63"/>
                 </a:solidFill>
-                <a:latin typeface="Arial"/>
+                <a:latin typeface="Roboto"/>
               </a:rPr>
               <a:t>growth.pptx</a:t>
             </a:r>
@@ -4449,13 +4513,17 @@
           </a:bodyPr>
           <a:lstStyle/>
           <a:p>
-            <a:pPr algn="ctr"/>
+            <a:pPr algn="ctr">
+              <a:defRPr>
+                <a:latin typeface="Roboto"/>
+              </a:defRPr>
+            </a:pPr>
             <a:r>
               <a:rPr sz="900" b="0">
                 <a:solidFill>
                   <a:srgbClr val="5F6F63"/>
                 </a:solidFill>
-                <a:latin typeface="Arial"/>
+                <a:latin typeface="Roboto"/>
               </a:rPr>
               <a:t>Data retrieved 2pm, Tue 6 Oct 2026 · Sample data</a:t>
             </a:r>
@@ -4484,13 +4552,17 @@
           </a:bodyPr>
           <a:lstStyle/>
           <a:p>
-            <a:pPr algn="r"/>
+            <a:pPr algn="r">
+              <a:defRPr>
+                <a:latin typeface="Roboto"/>
+              </a:defRPr>
+            </a:pPr>
             <a:r>
               <a:rPr sz="900" b="0">
                 <a:solidFill>
                   <a:srgbClr val="5F6F63"/>
                 </a:solidFill>
-                <a:latin typeface="Arial"/>
+                <a:latin typeface="Roboto"/>
               </a:rPr>
               <a:t>Slide 1 of 27</a:t>
             </a:r>
@@ -4554,7 +4626,11 @@
           <a:bodyPr rtlCol="0" anchor="ctr"/>
           <a:lstStyle/>
           <a:p>
-            <a:pPr algn="ctr"/>
+            <a:pPr algn="ctr">
+              <a:defRPr>
+                <a:latin typeface="Roboto"/>
+              </a:defRPr>
+            </a:pPr>
           </a:p>
         </p:txBody>
       </p:sp>
@@ -4580,12 +4656,17 @@
           </a:bodyPr>
           <a:lstStyle/>
           <a:p>
+            <a:pPr>
+              <a:defRPr>
+                <a:latin typeface="Roboto"/>
+              </a:defRPr>
+            </a:pPr>
             <a:r>
               <a:rPr sz="1000" b="0">
                 <a:solidFill>
                   <a:srgbClr val="5F6F63"/>
                 </a:solidFill>
-                <a:latin typeface="Arial"/>
+                <a:latin typeface="Roboto"/>
               </a:rPr>
               <a:t>SME sample businesses · Which products and services are growing?</a:t>
             </a:r>
@@ -4614,12 +4695,17 @@
           </a:bodyPr>
           <a:lstStyle/>
           <a:p>
+            <a:pPr>
+              <a:defRPr>
+                <a:latin typeface="Roboto"/>
+              </a:defRPr>
+            </a:pPr>
             <a:r>
               <a:rPr sz="2400" b="1">
                 <a:solidFill>
                   <a:srgbClr val="25342A"/>
                 </a:solidFill>
-                <a:latin typeface="Arial"/>
+                <a:latin typeface="Roboto"/>
               </a:rPr>
               <a:t>Headline numbers · Trades · Line: Call-outs and repairs</a:t>
             </a:r>
@@ -4667,7 +4753,11 @@
           <a:bodyPr rtlCol="0" anchor="ctr"/>
           <a:lstStyle/>
           <a:p>
-            <a:pPr algn="ctr"/>
+            <a:pPr algn="ctr">
+              <a:defRPr>
+                <a:latin typeface="Roboto"/>
+              </a:defRPr>
+            </a:pPr>
           </a:p>
         </p:txBody>
       </p:sp>
@@ -4693,12 +4783,17 @@
           </a:bodyPr>
           <a:lstStyle/>
           <a:p>
+            <a:pPr>
+              <a:defRPr>
+                <a:latin typeface="Roboto"/>
+              </a:defRPr>
+            </a:pPr>
             <a:r>
               <a:rPr sz="1200" b="0">
                 <a:solidFill>
                   <a:srgbClr val="5F6F63"/>
                 </a:solidFill>
-                <a:latin typeface="Arial"/>
+                <a:latin typeface="Roboto"/>
               </a:rPr>
               <a:t>January against January last year</a:t>
             </a:r>
@@ -4727,12 +4822,17 @@
           </a:bodyPr>
           <a:lstStyle/>
           <a:p>
+            <a:pPr>
+              <a:defRPr>
+                <a:latin typeface="Roboto"/>
+              </a:defRPr>
+            </a:pPr>
             <a:r>
               <a:rPr sz="3000" b="1">
                 <a:solidFill>
                   <a:srgbClr val="2F7A5D"/>
                 </a:solidFill>
-                <a:latin typeface="Arial"/>
+                <a:latin typeface="Roboto"/>
               </a:rPr>
               <a:t>17.3%</a:t>
             </a:r>
@@ -4761,12 +4861,17 @@
           </a:bodyPr>
           <a:lstStyle/>
           <a:p>
+            <a:pPr>
+              <a:defRPr>
+                <a:latin typeface="Roboto"/>
+              </a:defRPr>
+            </a:pPr>
             <a:r>
               <a:rPr sz="1100" b="0">
                 <a:solidFill>
                   <a:srgbClr val="5F6F63"/>
                 </a:solidFill>
-                <a:latin typeface="Arial"/>
+                <a:latin typeface="Roboto"/>
               </a:rPr>
               <a:t>$31,480 against $26,839</a:t>
             </a:r>
@@ -4814,7 +4919,11 @@
           <a:bodyPr rtlCol="0" anchor="ctr"/>
           <a:lstStyle/>
           <a:p>
-            <a:pPr algn="ctr"/>
+            <a:pPr algn="ctr">
+              <a:defRPr>
+                <a:latin typeface="Roboto"/>
+              </a:defRPr>
+            </a:pPr>
           </a:p>
         </p:txBody>
       </p:sp>
@@ -4840,12 +4949,17 @@
           </a:bodyPr>
           <a:lstStyle/>
           <a:p>
+            <a:pPr>
+              <a:defRPr>
+                <a:latin typeface="Roboto"/>
+              </a:defRPr>
+            </a:pPr>
             <a:r>
               <a:rPr sz="1200" b="0">
                 <a:solidFill>
                   <a:srgbClr val="5F6F63"/>
                 </a:solidFill>
-                <a:latin typeface="Arial"/>
+                <a:latin typeface="Roboto"/>
               </a:rPr>
               <a:t>Year to date (Jul to Jan 2026)</a:t>
             </a:r>
@@ -4874,12 +4988,17 @@
           </a:bodyPr>
           <a:lstStyle/>
           <a:p>
+            <a:pPr>
+              <a:defRPr>
+                <a:latin typeface="Roboto"/>
+              </a:defRPr>
+            </a:pPr>
             <a:r>
               <a:rPr sz="3000" b="1">
                 <a:solidFill>
                   <a:srgbClr val="2F7A5D"/>
                 </a:solidFill>
-                <a:latin typeface="Arial"/>
+                <a:latin typeface="Roboto"/>
               </a:rPr>
               <a:t>$166,522</a:t>
             </a:r>
@@ -4908,12 +5027,17 @@
           </a:bodyPr>
           <a:lstStyle/>
           <a:p>
+            <a:pPr>
+              <a:defRPr>
+                <a:latin typeface="Roboto"/>
+              </a:defRPr>
+            </a:pPr>
             <a:r>
               <a:rPr sz="1100" b="0">
                 <a:solidFill>
                   <a:srgbClr val="5F6F63"/>
                 </a:solidFill>
-                <a:latin typeface="Arial"/>
+                <a:latin typeface="Roboto"/>
               </a:rPr>
               <a:t>same period last year: not in the data</a:t>
             </a:r>
@@ -4961,7 +5085,11 @@
           <a:bodyPr rtlCol="0" anchor="ctr"/>
           <a:lstStyle/>
           <a:p>
-            <a:pPr algn="ctr"/>
+            <a:pPr algn="ctr">
+              <a:defRPr>
+                <a:latin typeface="Roboto"/>
+              </a:defRPr>
+            </a:pPr>
           </a:p>
         </p:txBody>
       </p:sp>
@@ -4987,12 +5115,17 @@
           </a:bodyPr>
           <a:lstStyle/>
           <a:p>
+            <a:pPr>
+              <a:defRPr>
+                <a:latin typeface="Roboto"/>
+              </a:defRPr>
+            </a:pPr>
             <a:r>
               <a:rPr sz="1200" b="0">
                 <a:solidFill>
                   <a:srgbClr val="5F6F63"/>
                 </a:solidFill>
-                <a:latin typeface="Arial"/>
+                <a:latin typeface="Roboto"/>
               </a:rPr>
               <a:t>Gross margin, year to date</a:t>
             </a:r>
@@ -5021,12 +5154,17 @@
           </a:bodyPr>
           <a:lstStyle/>
           <a:p>
+            <a:pPr>
+              <a:defRPr>
+                <a:latin typeface="Roboto"/>
+              </a:defRPr>
+            </a:pPr>
             <a:r>
               <a:rPr sz="3000" b="1">
                 <a:solidFill>
                   <a:srgbClr val="2F7A5D"/>
                 </a:solidFill>
-                <a:latin typeface="Arial"/>
+                <a:latin typeface="Roboto"/>
               </a:rPr>
               <a:t>43.7%</a:t>
             </a:r>
@@ -5055,12 +5193,17 @@
           </a:bodyPr>
           <a:lstStyle/>
           <a:p>
+            <a:pPr>
+              <a:defRPr>
+                <a:latin typeface="Roboto"/>
+              </a:defRPr>
+            </a:pPr>
             <a:r>
               <a:rPr sz="1100" b="0">
                 <a:solidFill>
                   <a:srgbClr val="5F6F63"/>
                 </a:solidFill>
-                <a:latin typeface="Arial"/>
+                <a:latin typeface="Roboto"/>
               </a:rPr>
               <a:t>$72,712 before overheads</a:t>
             </a:r>
@@ -5089,12 +5232,17 @@
           </a:bodyPr>
           <a:lstStyle/>
           <a:p>
+            <a:pPr>
+              <a:defRPr>
+                <a:latin typeface="Roboto"/>
+              </a:defRPr>
+            </a:pPr>
             <a:r>
               <a:rPr sz="900" b="0">
                 <a:solidFill>
                   <a:srgbClr val="5F6F63"/>
                 </a:solidFill>
-                <a:latin typeface="Arial"/>
+                <a:latin typeface="Roboto"/>
               </a:rPr>
               <a:t>growth.pptx</a:t>
             </a:r>
@@ -5123,13 +5271,17 @@
           </a:bodyPr>
           <a:lstStyle/>
           <a:p>
-            <a:pPr algn="ctr"/>
+            <a:pPr algn="ctr">
+              <a:defRPr>
+                <a:latin typeface="Roboto"/>
+              </a:defRPr>
+            </a:pPr>
             <a:r>
               <a:rPr sz="900" b="0">
                 <a:solidFill>
                   <a:srgbClr val="5F6F63"/>
                 </a:solidFill>
-                <a:latin typeface="Arial"/>
+                <a:latin typeface="Roboto"/>
               </a:rPr>
               <a:t>Data retrieved 2pm, Tue 6 Oct 2026 · Sample data</a:t>
             </a:r>
@@ -5158,13 +5310,17 @@
           </a:bodyPr>
           <a:lstStyle/>
           <a:p>
-            <a:pPr algn="r"/>
+            <a:pPr algn="r">
+              <a:defRPr>
+                <a:latin typeface="Roboto"/>
+              </a:defRPr>
+            </a:pPr>
             <a:r>
               <a:rPr sz="900" b="0">
                 <a:solidFill>
                   <a:srgbClr val="5F6F63"/>
                 </a:solidFill>
-                <a:latin typeface="Arial"/>
+                <a:latin typeface="Roboto"/>
               </a:rPr>
               <a:t>Slide 10 of 27</a:t>
             </a:r>
@@ -5228,7 +5384,11 @@
           <a:bodyPr rtlCol="0" anchor="ctr"/>
           <a:lstStyle/>
           <a:p>
-            <a:pPr algn="ctr"/>
+            <a:pPr algn="ctr">
+              <a:defRPr>
+                <a:latin typeface="Roboto"/>
+              </a:defRPr>
+            </a:pPr>
           </a:p>
         </p:txBody>
       </p:sp>
@@ -5254,12 +5414,17 @@
           </a:bodyPr>
           <a:lstStyle/>
           <a:p>
+            <a:pPr>
+              <a:defRPr>
+                <a:latin typeface="Roboto"/>
+              </a:defRPr>
+            </a:pPr>
             <a:r>
               <a:rPr sz="1000" b="0">
                 <a:solidFill>
                   <a:srgbClr val="5F6F63"/>
                 </a:solidFill>
-                <a:latin typeface="Arial"/>
+                <a:latin typeface="Roboto"/>
               </a:rPr>
               <a:t>SME sample businesses · Which products and services are growing?</a:t>
             </a:r>
@@ -5288,12 +5453,17 @@
           </a:bodyPr>
           <a:lstStyle/>
           <a:p>
+            <a:pPr>
+              <a:defRPr>
+                <a:latin typeface="Roboto"/>
+              </a:defRPr>
+            </a:pPr>
             <a:r>
               <a:rPr sz="2400" b="1">
                 <a:solidFill>
                   <a:srgbClr val="25342A"/>
                 </a:solidFill>
-                <a:latin typeface="Arial"/>
+                <a:latin typeface="Roboto"/>
               </a:rPr>
               <a:t>What it shows · Trades · Line: Call-outs and repairs</a:t>
             </a:r>
@@ -5341,7 +5511,11 @@
           <a:bodyPr rtlCol="0" anchor="ctr"/>
           <a:lstStyle/>
           <a:p>
-            <a:pPr algn="ctr"/>
+            <a:pPr algn="ctr">
+              <a:defRPr>
+                <a:latin typeface="Roboto"/>
+              </a:defRPr>
+            </a:pPr>
           </a:p>
         </p:txBody>
       </p:sp>
@@ -5367,12 +5541,17 @@
           </a:bodyPr>
           <a:lstStyle/>
           <a:p>
+            <a:pPr>
+              <a:defRPr>
+                <a:latin typeface="Roboto"/>
+              </a:defRPr>
+            </a:pPr>
             <a:r>
               <a:rPr sz="1100" b="1">
                 <a:solidFill>
                   <a:srgbClr val="5F6F63"/>
                 </a:solidFill>
-                <a:latin typeface="Arial"/>
+                <a:latin typeface="Roboto"/>
               </a:rPr>
               <a:t>WHAT IT SHOWS</a:t>
             </a:r>
@@ -5401,12 +5580,17 @@
           </a:bodyPr>
           <a:lstStyle/>
           <a:p>
+            <a:pPr>
+              <a:defRPr>
+                <a:latin typeface="Roboto"/>
+              </a:defRPr>
+            </a:pPr>
             <a:r>
               <a:rPr sz="1600" b="0">
                 <a:solidFill>
                   <a:srgbClr val="25342A"/>
                 </a:solidFill>
-                <a:latin typeface="Arial"/>
+                <a:latin typeface="Roboto"/>
               </a:rPr>
               <a:t>Call-outs and repairs brought in $166,522 this financial year to date, at a 43.7% gross margin (above the 37.1% overall).</a:t>
             </a:r>
@@ -5454,7 +5638,11 @@
           <a:bodyPr rtlCol="0" anchor="ctr"/>
           <a:lstStyle/>
           <a:p>
-            <a:pPr algn="ctr"/>
+            <a:pPr algn="ctr">
+              <a:defRPr>
+                <a:latin typeface="Roboto"/>
+              </a:defRPr>
+            </a:pPr>
           </a:p>
         </p:txBody>
       </p:sp>
@@ -5480,12 +5668,17 @@
           </a:bodyPr>
           <a:lstStyle/>
           <a:p>
+            <a:pPr>
+              <a:defRPr>
+                <a:latin typeface="Roboto"/>
+              </a:defRPr>
+            </a:pPr>
             <a:r>
               <a:rPr sz="1100" b="1">
                 <a:solidFill>
                   <a:srgbClr val="5F6F63"/>
                 </a:solidFill>
-                <a:latin typeface="Arial"/>
+                <a:latin typeface="Roboto"/>
               </a:rPr>
               <a:t>WHAT YOU'D DO ABOUT IT</a:t>
             </a:r>
@@ -5514,12 +5707,17 @@
           </a:bodyPr>
           <a:lstStyle/>
           <a:p>
+            <a:pPr>
+              <a:defRPr>
+                <a:latin typeface="Roboto"/>
+              </a:defRPr>
+            </a:pPr>
             <a:r>
               <a:rPr sz="1600" b="0">
                 <a:solidFill>
                   <a:srgbClr val="25342A"/>
                 </a:solidFill>
-                <a:latin typeface="Arial"/>
+                <a:latin typeface="Roboto"/>
               </a:rPr>
               <a:t>Call-outs and repairs: 43.7% gross margin, 5.2 points clear of the 38.4% overheads need.</a:t>
             </a:r>
@@ -5548,12 +5746,17 @@
           </a:bodyPr>
           <a:lstStyle/>
           <a:p>
+            <a:pPr>
+              <a:defRPr>
+                <a:latin typeface="Roboto"/>
+              </a:defRPr>
+            </a:pPr>
             <a:r>
               <a:rPr sz="900" b="0">
                 <a:solidFill>
                   <a:srgbClr val="5F6F63"/>
                 </a:solidFill>
-                <a:latin typeface="Arial"/>
+                <a:latin typeface="Roboto"/>
               </a:rPr>
               <a:t>growth.pptx</a:t>
             </a:r>
@@ -5582,13 +5785,17 @@
           </a:bodyPr>
           <a:lstStyle/>
           <a:p>
-            <a:pPr algn="ctr"/>
+            <a:pPr algn="ctr">
+              <a:defRPr>
+                <a:latin typeface="Roboto"/>
+              </a:defRPr>
+            </a:pPr>
             <a:r>
               <a:rPr sz="900" b="0">
                 <a:solidFill>
                   <a:srgbClr val="5F6F63"/>
                 </a:solidFill>
-                <a:latin typeface="Arial"/>
+                <a:latin typeface="Roboto"/>
               </a:rPr>
               <a:t>Data retrieved 2pm, Tue 6 Oct 2026 · Sample data</a:t>
             </a:r>
@@ -5617,13 +5824,17 @@
           </a:bodyPr>
           <a:lstStyle/>
           <a:p>
-            <a:pPr algn="r"/>
+            <a:pPr algn="r">
+              <a:defRPr>
+                <a:latin typeface="Roboto"/>
+              </a:defRPr>
+            </a:pPr>
             <a:r>
               <a:rPr sz="900" b="0">
                 <a:solidFill>
                   <a:srgbClr val="5F6F63"/>
                 </a:solidFill>
-                <a:latin typeface="Arial"/>
+                <a:latin typeface="Roboto"/>
               </a:rPr>
               <a:t>Slide 11 of 27</a:t>
             </a:r>
@@ -5687,7 +5898,11 @@
           <a:bodyPr rtlCol="0" anchor="ctr"/>
           <a:lstStyle/>
           <a:p>
-            <a:pPr algn="ctr"/>
+            <a:pPr algn="ctr">
+              <a:defRPr>
+                <a:latin typeface="Roboto"/>
+              </a:defRPr>
+            </a:pPr>
           </a:p>
         </p:txBody>
       </p:sp>
@@ -5713,12 +5928,17 @@
           </a:bodyPr>
           <a:lstStyle/>
           <a:p>
+            <a:pPr>
+              <a:defRPr>
+                <a:latin typeface="Roboto"/>
+              </a:defRPr>
+            </a:pPr>
             <a:r>
               <a:rPr sz="1000" b="0">
                 <a:solidFill>
                   <a:srgbClr val="5F6F63"/>
                 </a:solidFill>
-                <a:latin typeface="Arial"/>
+                <a:latin typeface="Roboto"/>
               </a:rPr>
               <a:t>SME sample businesses · Which products and services are growing?</a:t>
             </a:r>
@@ -5747,12 +5967,17 @@
           </a:bodyPr>
           <a:lstStyle/>
           <a:p>
+            <a:pPr>
+              <a:defRPr>
+                <a:latin typeface="Roboto"/>
+              </a:defRPr>
+            </a:pPr>
             <a:r>
               <a:rPr sz="2400" b="1">
                 <a:solidFill>
                   <a:srgbClr val="25342A"/>
                 </a:solidFill>
-                <a:latin typeface="Arial"/>
+                <a:latin typeface="Roboto"/>
               </a:rPr>
               <a:t>Revenue, gross margin and growth by line, by month · Revenue $ · Trades · Every line at once</a:t>
             </a:r>
@@ -5781,12 +6006,17 @@
           </a:bodyPr>
           <a:lstStyle/>
           <a:p>
+            <a:pPr>
+              <a:defRPr>
+                <a:latin typeface="Roboto"/>
+              </a:defRPr>
+            </a:pPr>
             <a:r>
               <a:rPr sz="1200" b="0">
                 <a:solidFill>
                   <a:srgbClr val="5F6F63"/>
                 </a:solidFill>
-                <a:latin typeface="Arial"/>
+                <a:latin typeface="Roboto"/>
               </a:rPr>
               <a:t>Gross margin = revenue less direct cost (materials, subcontractors and time at cost for trades; contractors and consultant time for services), before overheads. Growth is year on year: each month against the same month a year earlier.</a:t>
             </a:r>
@@ -5833,12 +6063,17 @@
           </a:bodyPr>
           <a:lstStyle/>
           <a:p>
+            <a:pPr>
+              <a:defRPr>
+                <a:latin typeface="Roboto"/>
+              </a:defRPr>
+            </a:pPr>
             <a:r>
               <a:rPr sz="900" b="0">
                 <a:solidFill>
                   <a:srgbClr val="5F6F63"/>
                 </a:solidFill>
-                <a:latin typeface="Arial"/>
+                <a:latin typeface="Roboto"/>
               </a:rPr>
               <a:t>growth.pptx</a:t>
             </a:r>
@@ -5867,13 +6102,17 @@
           </a:bodyPr>
           <a:lstStyle/>
           <a:p>
-            <a:pPr algn="ctr"/>
+            <a:pPr algn="ctr">
+              <a:defRPr>
+                <a:latin typeface="Roboto"/>
+              </a:defRPr>
+            </a:pPr>
             <a:r>
               <a:rPr sz="900" b="0">
                 <a:solidFill>
                   <a:srgbClr val="5F6F63"/>
                 </a:solidFill>
-                <a:latin typeface="Arial"/>
+                <a:latin typeface="Roboto"/>
               </a:rPr>
               <a:t>Data retrieved 2pm, Tue 6 Oct 2026 · Sample data</a:t>
             </a:r>
@@ -5902,13 +6141,17 @@
           </a:bodyPr>
           <a:lstStyle/>
           <a:p>
-            <a:pPr algn="r"/>
+            <a:pPr algn="r">
+              <a:defRPr>
+                <a:latin typeface="Roboto"/>
+              </a:defRPr>
+            </a:pPr>
             <a:r>
               <a:rPr sz="900" b="0">
                 <a:solidFill>
                   <a:srgbClr val="5F6F63"/>
                 </a:solidFill>
-                <a:latin typeface="Arial"/>
+                <a:latin typeface="Roboto"/>
               </a:rPr>
               <a:t>Slide 12 of 27</a:t>
             </a:r>
@@ -5972,7 +6215,11 @@
           <a:bodyPr rtlCol="0" anchor="ctr"/>
           <a:lstStyle/>
           <a:p>
-            <a:pPr algn="ctr"/>
+            <a:pPr algn="ctr">
+              <a:defRPr>
+                <a:latin typeface="Roboto"/>
+              </a:defRPr>
+            </a:pPr>
           </a:p>
         </p:txBody>
       </p:sp>
@@ -5998,12 +6245,17 @@
           </a:bodyPr>
           <a:lstStyle/>
           <a:p>
+            <a:pPr>
+              <a:defRPr>
+                <a:latin typeface="Roboto"/>
+              </a:defRPr>
+            </a:pPr>
             <a:r>
               <a:rPr sz="1000" b="0">
                 <a:solidFill>
                   <a:srgbClr val="5F6F63"/>
                 </a:solidFill>
-                <a:latin typeface="Arial"/>
+                <a:latin typeface="Roboto"/>
               </a:rPr>
               <a:t>SME sample businesses · Which products and services are growing?</a:t>
             </a:r>
@@ -6032,12 +6284,17 @@
           </a:bodyPr>
           <a:lstStyle/>
           <a:p>
+            <a:pPr>
+              <a:defRPr>
+                <a:latin typeface="Roboto"/>
+              </a:defRPr>
+            </a:pPr>
             <a:r>
               <a:rPr sz="2400" b="1">
                 <a:solidFill>
                   <a:srgbClr val="25342A"/>
                 </a:solidFill>
-                <a:latin typeface="Arial"/>
+                <a:latin typeface="Roboto"/>
               </a:rPr>
               <a:t>Revenue, gross margin and growth by line, by month · Gross margin % · Trades · Every line at once</a:t>
             </a:r>
@@ -6066,12 +6323,17 @@
           </a:bodyPr>
           <a:lstStyle/>
           <a:p>
+            <a:pPr>
+              <a:defRPr>
+                <a:latin typeface="Roboto"/>
+              </a:defRPr>
+            </a:pPr>
             <a:r>
               <a:rPr sz="1200" b="0">
                 <a:solidFill>
                   <a:srgbClr val="5F6F63"/>
                 </a:solidFill>
-                <a:latin typeface="Arial"/>
+                <a:latin typeface="Roboto"/>
               </a:rPr>
               <a:t>Gross margin = revenue less direct cost (materials, subcontractors and time at cost for trades; contractors and consultant time for services), before overheads. Growth is year on year: each month against the same month a year earlier.</a:t>
             </a:r>
@@ -6118,12 +6380,17 @@
           </a:bodyPr>
           <a:lstStyle/>
           <a:p>
+            <a:pPr>
+              <a:defRPr>
+                <a:latin typeface="Roboto"/>
+              </a:defRPr>
+            </a:pPr>
             <a:r>
               <a:rPr sz="900" b="0">
                 <a:solidFill>
                   <a:srgbClr val="5F6F63"/>
                 </a:solidFill>
-                <a:latin typeface="Arial"/>
+                <a:latin typeface="Roboto"/>
               </a:rPr>
               <a:t>growth.pptx</a:t>
             </a:r>
@@ -6152,13 +6419,17 @@
           </a:bodyPr>
           <a:lstStyle/>
           <a:p>
-            <a:pPr algn="ctr"/>
+            <a:pPr algn="ctr">
+              <a:defRPr>
+                <a:latin typeface="Roboto"/>
+              </a:defRPr>
+            </a:pPr>
             <a:r>
               <a:rPr sz="900" b="0">
                 <a:solidFill>
                   <a:srgbClr val="5F6F63"/>
                 </a:solidFill>
-                <a:latin typeface="Arial"/>
+                <a:latin typeface="Roboto"/>
               </a:rPr>
               <a:t>Data retrieved 2pm, Tue 6 Oct 2026 · Sample data</a:t>
             </a:r>
@@ -6187,13 +6458,17 @@
           </a:bodyPr>
           <a:lstStyle/>
           <a:p>
-            <a:pPr algn="r"/>
+            <a:pPr algn="r">
+              <a:defRPr>
+                <a:latin typeface="Roboto"/>
+              </a:defRPr>
+            </a:pPr>
             <a:r>
               <a:rPr sz="900" b="0">
                 <a:solidFill>
                   <a:srgbClr val="5F6F63"/>
                 </a:solidFill>
-                <a:latin typeface="Arial"/>
+                <a:latin typeface="Roboto"/>
               </a:rPr>
               <a:t>Slide 13 of 27</a:t>
             </a:r>
@@ -6257,7 +6532,11 @@
           <a:bodyPr rtlCol="0" anchor="ctr"/>
           <a:lstStyle/>
           <a:p>
-            <a:pPr algn="ctr"/>
+            <a:pPr algn="ctr">
+              <a:defRPr>
+                <a:latin typeface="Roboto"/>
+              </a:defRPr>
+            </a:pPr>
           </a:p>
         </p:txBody>
       </p:sp>
@@ -6283,12 +6562,17 @@
           </a:bodyPr>
           <a:lstStyle/>
           <a:p>
+            <a:pPr>
+              <a:defRPr>
+                <a:latin typeface="Roboto"/>
+              </a:defRPr>
+            </a:pPr>
             <a:r>
               <a:rPr sz="1000" b="0">
                 <a:solidFill>
                   <a:srgbClr val="5F6F63"/>
                 </a:solidFill>
-                <a:latin typeface="Arial"/>
+                <a:latin typeface="Roboto"/>
               </a:rPr>
               <a:t>SME sample businesses · Which products and services are growing?</a:t>
             </a:r>
@@ -6317,12 +6601,17 @@
           </a:bodyPr>
           <a:lstStyle/>
           <a:p>
+            <a:pPr>
+              <a:defRPr>
+                <a:latin typeface="Roboto"/>
+              </a:defRPr>
+            </a:pPr>
             <a:r>
               <a:rPr sz="2400" b="1">
                 <a:solidFill>
                   <a:srgbClr val="25342A"/>
                 </a:solidFill>
-                <a:latin typeface="Arial"/>
+                <a:latin typeface="Roboto"/>
               </a:rPr>
               <a:t>By line: financial year to date (Jul to Jan 2026) against the same period last year · Trades · Every line at once</a:t>
             </a:r>
@@ -6360,7 +6649,13 @@
                   <a:txBody>
                     <a:bodyPr/>
                     <a:lstStyle/>
-                    <a:p/>
+                    <a:p>
+                      <a:pPr>
+                        <a:defRPr>
+                          <a:latin typeface="Roboto"/>
+                        </a:defRPr>
+                      </a:pPr>
+                    </a:p>
                   </a:txBody>
                   <a:tcPr>
                     <a:solidFill>
@@ -6373,12 +6668,17 @@
                     <a:bodyPr/>
                     <a:lstStyle/>
                     <a:p>
-                      <a:pPr algn="r"/>
+                      <a:pPr algn="r">
+                        <a:defRPr>
+                          <a:latin typeface="Roboto"/>
+                        </a:defRPr>
+                      </a:pPr>
                       <a:r>
                         <a:rPr sz="1100" b="1">
                           <a:solidFill>
                             <a:srgbClr val="FFFFFF"/>
                           </a:solidFill>
+                          <a:latin typeface="Roboto"/>
                         </a:rPr>
                         <a:t>Year to date</a:t>
                       </a:r>
@@ -6395,12 +6695,17 @@
                     <a:bodyPr/>
                     <a:lstStyle/>
                     <a:p>
-                      <a:pPr algn="r"/>
+                      <a:pPr algn="r">
+                        <a:defRPr>
+                          <a:latin typeface="Roboto"/>
+                        </a:defRPr>
+                      </a:pPr>
                       <a:r>
                         <a:rPr sz="1100" b="1">
                           <a:solidFill>
                             <a:srgbClr val="FFFFFF"/>
                           </a:solidFill>
+                          <a:latin typeface="Roboto"/>
                         </a:rPr>
                         <a:t>Same period last year</a:t>
                       </a:r>
@@ -6417,12 +6722,17 @@
                     <a:bodyPr/>
                     <a:lstStyle/>
                     <a:p>
-                      <a:pPr algn="r"/>
+                      <a:pPr algn="r">
+                        <a:defRPr>
+                          <a:latin typeface="Roboto"/>
+                        </a:defRPr>
+                      </a:pPr>
                       <a:r>
                         <a:rPr sz="1100" b="1">
                           <a:solidFill>
                             <a:srgbClr val="FFFFFF"/>
                           </a:solidFill>
+                          <a:latin typeface="Roboto"/>
                         </a:rPr>
                         <a:t>Growth</a:t>
                       </a:r>
@@ -6439,12 +6749,17 @@
                     <a:bodyPr/>
                     <a:lstStyle/>
                     <a:p>
-                      <a:pPr algn="r"/>
+                      <a:pPr algn="r">
+                        <a:defRPr>
+                          <a:latin typeface="Roboto"/>
+                        </a:defRPr>
+                      </a:pPr>
                       <a:r>
                         <a:rPr sz="1100" b="1">
                           <a:solidFill>
                             <a:srgbClr val="FFFFFF"/>
                           </a:solidFill>
+                          <a:latin typeface="Roboto"/>
                         </a:rPr>
                         <a:t>Gross margin $</a:t>
                       </a:r>
@@ -6461,12 +6776,17 @@
                     <a:bodyPr/>
                     <a:lstStyle/>
                     <a:p>
-                      <a:pPr algn="r"/>
+                      <a:pPr algn="r">
+                        <a:defRPr>
+                          <a:latin typeface="Roboto"/>
+                        </a:defRPr>
+                      </a:pPr>
                       <a:r>
                         <a:rPr sz="1100" b="1">
                           <a:solidFill>
                             <a:srgbClr val="FFFFFF"/>
                           </a:solidFill>
+                          <a:latin typeface="Roboto"/>
                         </a:rPr>
                         <a:t>Gross margin %</a:t>
                       </a:r>
@@ -6485,11 +6805,17 @@
                     <a:bodyPr/>
                     <a:lstStyle/>
                     <a:p>
+                      <a:pPr>
+                        <a:defRPr>
+                          <a:latin typeface="Roboto"/>
+                        </a:defRPr>
+                      </a:pPr>
                       <a:r>
                         <a:rPr sz="1050">
                           <a:solidFill>
                             <a:srgbClr val="25342A"/>
                           </a:solidFill>
+                          <a:latin typeface="Roboto"/>
                         </a:rPr>
                         <a:t>Maintenance contracts</a:t>
                       </a:r>
@@ -6506,12 +6832,17 @@
                     <a:bodyPr/>
                     <a:lstStyle/>
                     <a:p>
-                      <a:pPr algn="r"/>
+                      <a:pPr algn="r">
+                        <a:defRPr>
+                          <a:latin typeface="Roboto"/>
+                        </a:defRPr>
+                      </a:pPr>
                       <a:r>
                         <a:rPr sz="1050">
                           <a:solidFill>
                             <a:srgbClr val="25342A"/>
                           </a:solidFill>
+                          <a:latin typeface="Roboto"/>
                         </a:rPr>
                         <a:t>$242,800</a:t>
                       </a:r>
@@ -6528,12 +6859,17 @@
                     <a:bodyPr/>
                     <a:lstStyle/>
                     <a:p>
-                      <a:pPr algn="r"/>
+                      <a:pPr algn="r">
+                        <a:defRPr>
+                          <a:latin typeface="Roboto"/>
+                        </a:defRPr>
+                      </a:pPr>
                       <a:r>
                         <a:rPr sz="1050">
                           <a:solidFill>
                             <a:srgbClr val="25342A"/>
                           </a:solidFill>
+                          <a:latin typeface="Roboto"/>
                         </a:rPr>
                         <a:t>–</a:t>
                       </a:r>
@@ -6550,12 +6886,17 @@
                     <a:bodyPr/>
                     <a:lstStyle/>
                     <a:p>
-                      <a:pPr algn="r"/>
+                      <a:pPr algn="r">
+                        <a:defRPr>
+                          <a:latin typeface="Roboto"/>
+                        </a:defRPr>
+                      </a:pPr>
                       <a:r>
                         <a:rPr sz="1050">
                           <a:solidFill>
                             <a:srgbClr val="25342A"/>
                           </a:solidFill>
+                          <a:latin typeface="Roboto"/>
                         </a:rPr>
                         <a:t>–</a:t>
                       </a:r>
@@ -6572,12 +6913,17 @@
                     <a:bodyPr/>
                     <a:lstStyle/>
                     <a:p>
-                      <a:pPr algn="r"/>
+                      <a:pPr algn="r">
+                        <a:defRPr>
+                          <a:latin typeface="Roboto"/>
+                        </a:defRPr>
+                      </a:pPr>
                       <a:r>
                         <a:rPr sz="1050">
                           <a:solidFill>
                             <a:srgbClr val="25342A"/>
                           </a:solidFill>
+                          <a:latin typeface="Roboto"/>
                         </a:rPr>
                         <a:t>$144,398</a:t>
                       </a:r>
@@ -6594,12 +6940,17 @@
                     <a:bodyPr/>
                     <a:lstStyle/>
                     <a:p>
-                      <a:pPr algn="r"/>
+                      <a:pPr algn="r">
+                        <a:defRPr>
+                          <a:latin typeface="Roboto"/>
+                        </a:defRPr>
+                      </a:pPr>
                       <a:r>
                         <a:rPr sz="1050">
                           <a:solidFill>
                             <a:srgbClr val="25342A"/>
                           </a:solidFill>
+                          <a:latin typeface="Roboto"/>
                         </a:rPr>
                         <a:t>59.5%</a:t>
                       </a:r>
@@ -6618,11 +6969,17 @@
                     <a:bodyPr/>
                     <a:lstStyle/>
                     <a:p>
+                      <a:pPr>
+                        <a:defRPr>
+                          <a:latin typeface="Roboto"/>
+                        </a:defRPr>
+                      </a:pPr>
                       <a:r>
                         <a:rPr sz="1050">
                           <a:solidFill>
                             <a:srgbClr val="25342A"/>
                           </a:solidFill>
+                          <a:latin typeface="Roboto"/>
                         </a:rPr>
                         <a:t>Installations</a:t>
                       </a:r>
@@ -6639,12 +6996,17 @@
                     <a:bodyPr/>
                     <a:lstStyle/>
                     <a:p>
-                      <a:pPr algn="r"/>
+                      <a:pPr algn="r">
+                        <a:defRPr>
+                          <a:latin typeface="Roboto"/>
+                        </a:defRPr>
+                      </a:pPr>
                       <a:r>
                         <a:rPr sz="1050">
                           <a:solidFill>
                             <a:srgbClr val="25342A"/>
                           </a:solidFill>
+                          <a:latin typeface="Roboto"/>
                         </a:rPr>
                         <a:t>$648,400</a:t>
                       </a:r>
@@ -6661,12 +7023,17 @@
                     <a:bodyPr/>
                     <a:lstStyle/>
                     <a:p>
-                      <a:pPr algn="r"/>
+                      <a:pPr algn="r">
+                        <a:defRPr>
+                          <a:latin typeface="Roboto"/>
+                        </a:defRPr>
+                      </a:pPr>
                       <a:r>
                         <a:rPr sz="1050">
                           <a:solidFill>
                             <a:srgbClr val="25342A"/>
                           </a:solidFill>
+                          <a:latin typeface="Roboto"/>
                         </a:rPr>
                         <a:t>–</a:t>
                       </a:r>
@@ -6683,12 +7050,17 @@
                     <a:bodyPr/>
                     <a:lstStyle/>
                     <a:p>
-                      <a:pPr algn="r"/>
+                      <a:pPr algn="r">
+                        <a:defRPr>
+                          <a:latin typeface="Roboto"/>
+                        </a:defRPr>
+                      </a:pPr>
                       <a:r>
                         <a:rPr sz="1050">
                           <a:solidFill>
                             <a:srgbClr val="25342A"/>
                           </a:solidFill>
+                          <a:latin typeface="Roboto"/>
                         </a:rPr>
                         <a:t>–</a:t>
                       </a:r>
@@ -6705,12 +7077,17 @@
                     <a:bodyPr/>
                     <a:lstStyle/>
                     <a:p>
-                      <a:pPr algn="r"/>
+                      <a:pPr algn="r">
+                        <a:defRPr>
+                          <a:latin typeface="Roboto"/>
+                        </a:defRPr>
+                      </a:pPr>
                       <a:r>
                         <a:rPr sz="1050">
                           <a:solidFill>
                             <a:srgbClr val="25342A"/>
                           </a:solidFill>
+                          <a:latin typeface="Roboto"/>
                         </a:rPr>
                         <a:t>$175,364</a:t>
                       </a:r>
@@ -6727,12 +7104,17 @@
                     <a:bodyPr/>
                     <a:lstStyle/>
                     <a:p>
-                      <a:pPr algn="r"/>
+                      <a:pPr algn="r">
+                        <a:defRPr>
+                          <a:latin typeface="Roboto"/>
+                        </a:defRPr>
+                      </a:pPr>
                       <a:r>
                         <a:rPr sz="1050">
                           <a:solidFill>
                             <a:srgbClr val="25342A"/>
                           </a:solidFill>
+                          <a:latin typeface="Roboto"/>
                         </a:rPr>
                         <a:t>27.0%</a:t>
                       </a:r>
@@ -6751,11 +7133,17 @@
                     <a:bodyPr/>
                     <a:lstStyle/>
                     <a:p>
+                      <a:pPr>
+                        <a:defRPr>
+                          <a:latin typeface="Roboto"/>
+                        </a:defRPr>
+                      </a:pPr>
                       <a:r>
                         <a:rPr sz="1050">
                           <a:solidFill>
                             <a:srgbClr val="25342A"/>
                           </a:solidFill>
+                          <a:latin typeface="Roboto"/>
                         </a:rPr>
                         <a:t>Call-outs and repairs</a:t>
                       </a:r>
@@ -6772,12 +7160,17 @@
                     <a:bodyPr/>
                     <a:lstStyle/>
                     <a:p>
-                      <a:pPr algn="r"/>
+                      <a:pPr algn="r">
+                        <a:defRPr>
+                          <a:latin typeface="Roboto"/>
+                        </a:defRPr>
+                      </a:pPr>
                       <a:r>
                         <a:rPr sz="1050">
                           <a:solidFill>
                             <a:srgbClr val="25342A"/>
                           </a:solidFill>
+                          <a:latin typeface="Roboto"/>
                         </a:rPr>
                         <a:t>$166,522</a:t>
                       </a:r>
@@ -6794,12 +7187,17 @@
                     <a:bodyPr/>
                     <a:lstStyle/>
                     <a:p>
-                      <a:pPr algn="r"/>
+                      <a:pPr algn="r">
+                        <a:defRPr>
+                          <a:latin typeface="Roboto"/>
+                        </a:defRPr>
+                      </a:pPr>
                       <a:r>
                         <a:rPr sz="1050">
                           <a:solidFill>
                             <a:srgbClr val="25342A"/>
                           </a:solidFill>
+                          <a:latin typeface="Roboto"/>
                         </a:rPr>
                         <a:t>–</a:t>
                       </a:r>
@@ -6816,12 +7214,17 @@
                     <a:bodyPr/>
                     <a:lstStyle/>
                     <a:p>
-                      <a:pPr algn="r"/>
+                      <a:pPr algn="r">
+                        <a:defRPr>
+                          <a:latin typeface="Roboto"/>
+                        </a:defRPr>
+                      </a:pPr>
                       <a:r>
                         <a:rPr sz="1050">
                           <a:solidFill>
                             <a:srgbClr val="25342A"/>
                           </a:solidFill>
+                          <a:latin typeface="Roboto"/>
                         </a:rPr>
                         <a:t>–</a:t>
                       </a:r>
@@ -6838,12 +7241,17 @@
                     <a:bodyPr/>
                     <a:lstStyle/>
                     <a:p>
-                      <a:pPr algn="r"/>
+                      <a:pPr algn="r">
+                        <a:defRPr>
+                          <a:latin typeface="Roboto"/>
+                        </a:defRPr>
+                      </a:pPr>
                       <a:r>
                         <a:rPr sz="1050">
                           <a:solidFill>
                             <a:srgbClr val="25342A"/>
                           </a:solidFill>
+                          <a:latin typeface="Roboto"/>
                         </a:rPr>
                         <a:t>$72,712</a:t>
                       </a:r>
@@ -6860,12 +7268,17 @@
                     <a:bodyPr/>
                     <a:lstStyle/>
                     <a:p>
-                      <a:pPr algn="r"/>
+                      <a:pPr algn="r">
+                        <a:defRPr>
+                          <a:latin typeface="Roboto"/>
+                        </a:defRPr>
+                      </a:pPr>
                       <a:r>
                         <a:rPr sz="1050">
                           <a:solidFill>
                             <a:srgbClr val="25342A"/>
                           </a:solidFill>
+                          <a:latin typeface="Roboto"/>
                         </a:rPr>
                         <a:t>43.7%</a:t>
                       </a:r>
@@ -6884,11 +7297,17 @@
                     <a:bodyPr/>
                     <a:lstStyle/>
                     <a:p>
+                      <a:pPr>
+                        <a:defRPr>
+                          <a:latin typeface="Roboto"/>
+                        </a:defRPr>
+                      </a:pPr>
                       <a:r>
                         <a:rPr sz="1050" b="1">
                           <a:solidFill>
                             <a:srgbClr val="25342A"/>
                           </a:solidFill>
+                          <a:latin typeface="Roboto"/>
                         </a:rPr>
                         <a:t>Total</a:t>
                       </a:r>
@@ -6905,12 +7324,17 @@
                     <a:bodyPr/>
                     <a:lstStyle/>
                     <a:p>
-                      <a:pPr algn="r"/>
+                      <a:pPr algn="r">
+                        <a:defRPr>
+                          <a:latin typeface="Roboto"/>
+                        </a:defRPr>
+                      </a:pPr>
                       <a:r>
                         <a:rPr sz="1050" b="1">
                           <a:solidFill>
                             <a:srgbClr val="25342A"/>
                           </a:solidFill>
+                          <a:latin typeface="Roboto"/>
                         </a:rPr>
                         <a:t>$1,057,722</a:t>
                       </a:r>
@@ -6927,12 +7351,17 @@
                     <a:bodyPr/>
                     <a:lstStyle/>
                     <a:p>
-                      <a:pPr algn="r"/>
+                      <a:pPr algn="r">
+                        <a:defRPr>
+                          <a:latin typeface="Roboto"/>
+                        </a:defRPr>
+                      </a:pPr>
                       <a:r>
                         <a:rPr sz="1050" b="1">
                           <a:solidFill>
                             <a:srgbClr val="25342A"/>
                           </a:solidFill>
+                          <a:latin typeface="Roboto"/>
                         </a:rPr>
                         <a:t>–</a:t>
                       </a:r>
@@ -6949,12 +7378,17 @@
                     <a:bodyPr/>
                     <a:lstStyle/>
                     <a:p>
-                      <a:pPr algn="r"/>
+                      <a:pPr algn="r">
+                        <a:defRPr>
+                          <a:latin typeface="Roboto"/>
+                        </a:defRPr>
+                      </a:pPr>
                       <a:r>
                         <a:rPr sz="1050" b="1">
                           <a:solidFill>
                             <a:srgbClr val="25342A"/>
                           </a:solidFill>
+                          <a:latin typeface="Roboto"/>
                         </a:rPr>
                         <a:t>–</a:t>
                       </a:r>
@@ -6971,12 +7405,17 @@
                     <a:bodyPr/>
                     <a:lstStyle/>
                     <a:p>
-                      <a:pPr algn="r"/>
+                      <a:pPr algn="r">
+                        <a:defRPr>
+                          <a:latin typeface="Roboto"/>
+                        </a:defRPr>
+                      </a:pPr>
                       <a:r>
                         <a:rPr sz="1050" b="1">
                           <a:solidFill>
                             <a:srgbClr val="25342A"/>
                           </a:solidFill>
+                          <a:latin typeface="Roboto"/>
                         </a:rPr>
                         <a:t>$392,474</a:t>
                       </a:r>
@@ -6993,12 +7432,17 @@
                     <a:bodyPr/>
                     <a:lstStyle/>
                     <a:p>
-                      <a:pPr algn="r"/>
+                      <a:pPr algn="r">
+                        <a:defRPr>
+                          <a:latin typeface="Roboto"/>
+                        </a:defRPr>
+                      </a:pPr>
                       <a:r>
                         <a:rPr sz="1050" b="1">
                           <a:solidFill>
                             <a:srgbClr val="25342A"/>
                           </a:solidFill>
+                          <a:latin typeface="Roboto"/>
                         </a:rPr>
                         <a:t>37.1%</a:t>
                       </a:r>
@@ -7037,12 +7481,17 @@
           </a:bodyPr>
           <a:lstStyle/>
           <a:p>
+            <a:pPr>
+              <a:defRPr>
+                <a:latin typeface="Roboto"/>
+              </a:defRPr>
+            </a:pPr>
             <a:r>
               <a:rPr sz="900" b="0">
                 <a:solidFill>
                   <a:srgbClr val="5F6F63"/>
                 </a:solidFill>
-                <a:latin typeface="Arial"/>
+                <a:latin typeface="Roboto"/>
               </a:rPr>
               <a:t>growth.pptx</a:t>
             </a:r>
@@ -7071,13 +7520,17 @@
           </a:bodyPr>
           <a:lstStyle/>
           <a:p>
-            <a:pPr algn="ctr"/>
+            <a:pPr algn="ctr">
+              <a:defRPr>
+                <a:latin typeface="Roboto"/>
+              </a:defRPr>
+            </a:pPr>
             <a:r>
               <a:rPr sz="900" b="0">
                 <a:solidFill>
                   <a:srgbClr val="5F6F63"/>
                 </a:solidFill>
-                <a:latin typeface="Arial"/>
+                <a:latin typeface="Roboto"/>
               </a:rPr>
               <a:t>Data retrieved 2pm, Tue 6 Oct 2026 · Sample data</a:t>
             </a:r>
@@ -7106,13 +7559,17 @@
           </a:bodyPr>
           <a:lstStyle/>
           <a:p>
-            <a:pPr algn="r"/>
+            <a:pPr algn="r">
+              <a:defRPr>
+                <a:latin typeface="Roboto"/>
+              </a:defRPr>
+            </a:pPr>
             <a:r>
               <a:rPr sz="900" b="0">
                 <a:solidFill>
                   <a:srgbClr val="5F6F63"/>
                 </a:solidFill>
-                <a:latin typeface="Arial"/>
+                <a:latin typeface="Roboto"/>
               </a:rPr>
               <a:t>Slide 14 of 27</a:t>
             </a:r>
@@ -7176,7 +7633,11 @@
           <a:bodyPr rtlCol="0" anchor="ctr"/>
           <a:lstStyle/>
           <a:p>
-            <a:pPr algn="ctr"/>
+            <a:pPr algn="ctr">
+              <a:defRPr>
+                <a:latin typeface="Roboto"/>
+              </a:defRPr>
+            </a:pPr>
           </a:p>
         </p:txBody>
       </p:sp>
@@ -7202,12 +7663,17 @@
           </a:bodyPr>
           <a:lstStyle/>
           <a:p>
+            <a:pPr>
+              <a:defRPr>
+                <a:latin typeface="Roboto"/>
+              </a:defRPr>
+            </a:pPr>
             <a:r>
               <a:rPr sz="1000" b="0">
                 <a:solidFill>
                   <a:srgbClr val="5F6F63"/>
                 </a:solidFill>
-                <a:latin typeface="Arial"/>
+                <a:latin typeface="Roboto"/>
               </a:rPr>
               <a:t>SME sample businesses · Which products and services are growing?</a:t>
             </a:r>
@@ -7236,12 +7702,17 @@
           </a:bodyPr>
           <a:lstStyle/>
           <a:p>
+            <a:pPr>
+              <a:defRPr>
+                <a:latin typeface="Roboto"/>
+              </a:defRPr>
+            </a:pPr>
             <a:r>
               <a:rPr sz="2400" b="1">
                 <a:solidFill>
                   <a:srgbClr val="25342A"/>
                 </a:solidFill>
-                <a:latin typeface="Arial"/>
+                <a:latin typeface="Roboto"/>
               </a:rPr>
               <a:t>Gross margin, not profit</a:t>
             </a:r>
@@ -7289,7 +7760,11 @@
           <a:bodyPr rtlCol="0" anchor="ctr"/>
           <a:lstStyle/>
           <a:p>
-            <a:pPr algn="ctr"/>
+            <a:pPr algn="ctr">
+              <a:defRPr>
+                <a:latin typeface="Roboto"/>
+              </a:defRPr>
+            </a:pPr>
           </a:p>
         </p:txBody>
       </p:sp>
@@ -7315,12 +7790,17 @@
           </a:bodyPr>
           <a:lstStyle/>
           <a:p>
+            <a:pPr>
+              <a:defRPr>
+                <a:latin typeface="Roboto"/>
+              </a:defRPr>
+            </a:pPr>
             <a:r>
               <a:rPr sz="1100" b="1">
                 <a:solidFill>
                   <a:srgbClr val="5F6F63"/>
                 </a:solidFill>
-                <a:latin typeface="Arial"/>
+                <a:latin typeface="Roboto"/>
               </a:rPr>
               <a:t>GROSS MARGIN, NOT PROFIT</a:t>
             </a:r>
@@ -7349,12 +7829,17 @@
           </a:bodyPr>
           <a:lstStyle/>
           <a:p>
+            <a:pPr>
+              <a:defRPr>
+                <a:latin typeface="Roboto"/>
+              </a:defRPr>
+            </a:pPr>
             <a:r>
               <a:rPr sz="1600" b="0">
                 <a:solidFill>
                   <a:srgbClr val="25342A"/>
                 </a:solidFill>
-                <a:latin typeface="Arial"/>
+                <a:latin typeface="Roboto"/>
               </a:rPr>
               <a:t>Gross margin is not profit. Gross margin = revenue less contractors and consultant time charged to the work at $60 an hour (wages and all on-costs). Not included: consultant time not charged to clients, and overheads (management and admin wages, marketing, rent, IT, insurance, travel, depreciation, interest). Profit is what's left after those. Wages always include all on-costs: super, payroll tax, workers' compensation insurance and leave.</a:t>
             </a:r>
@@ -7383,12 +7868,17 @@
           </a:bodyPr>
           <a:lstStyle/>
           <a:p>
+            <a:pPr>
+              <a:defRPr>
+                <a:latin typeface="Roboto"/>
+              </a:defRPr>
+            </a:pPr>
             <a:r>
               <a:rPr sz="900" b="0">
                 <a:solidFill>
                   <a:srgbClr val="5F6F63"/>
                 </a:solidFill>
-                <a:latin typeface="Arial"/>
+                <a:latin typeface="Roboto"/>
               </a:rPr>
               <a:t>growth.pptx</a:t>
             </a:r>
@@ -7417,13 +7907,17 @@
           </a:bodyPr>
           <a:lstStyle/>
           <a:p>
-            <a:pPr algn="ctr"/>
+            <a:pPr algn="ctr">
+              <a:defRPr>
+                <a:latin typeface="Roboto"/>
+              </a:defRPr>
+            </a:pPr>
             <a:r>
               <a:rPr sz="900" b="0">
                 <a:solidFill>
                   <a:srgbClr val="5F6F63"/>
                 </a:solidFill>
-                <a:latin typeface="Arial"/>
+                <a:latin typeface="Roboto"/>
               </a:rPr>
               <a:t>Data retrieved 2pm, Tue 6 Oct 2026 · Sample data</a:t>
             </a:r>
@@ -7452,13 +7946,17 @@
           </a:bodyPr>
           <a:lstStyle/>
           <a:p>
-            <a:pPr algn="r"/>
+            <a:pPr algn="r">
+              <a:defRPr>
+                <a:latin typeface="Roboto"/>
+              </a:defRPr>
+            </a:pPr>
             <a:r>
               <a:rPr sz="900" b="0">
                 <a:solidFill>
                   <a:srgbClr val="5F6F63"/>
                 </a:solidFill>
-                <a:latin typeface="Arial"/>
+                <a:latin typeface="Roboto"/>
               </a:rPr>
               <a:t>Slide 15 of 27</a:t>
             </a:r>
@@ -7522,7 +8020,11 @@
           <a:bodyPr rtlCol="0" anchor="ctr"/>
           <a:lstStyle/>
           <a:p>
-            <a:pPr algn="ctr"/>
+            <a:pPr algn="ctr">
+              <a:defRPr>
+                <a:latin typeface="Roboto"/>
+              </a:defRPr>
+            </a:pPr>
           </a:p>
         </p:txBody>
       </p:sp>
@@ -7548,12 +8050,17 @@
           </a:bodyPr>
           <a:lstStyle/>
           <a:p>
+            <a:pPr>
+              <a:defRPr>
+                <a:latin typeface="Roboto"/>
+              </a:defRPr>
+            </a:pPr>
             <a:r>
               <a:rPr sz="1000" b="0">
                 <a:solidFill>
                   <a:srgbClr val="5F6F63"/>
                 </a:solidFill>
-                <a:latin typeface="Arial"/>
+                <a:latin typeface="Roboto"/>
               </a:rPr>
               <a:t>SME sample businesses · Which products and services are growing?</a:t>
             </a:r>
@@ -7582,12 +8089,17 @@
           </a:bodyPr>
           <a:lstStyle/>
           <a:p>
+            <a:pPr>
+              <a:defRPr>
+                <a:latin typeface="Roboto"/>
+              </a:defRPr>
+            </a:pPr>
             <a:r>
               <a:rPr sz="2400" b="1">
                 <a:solidFill>
                   <a:srgbClr val="25342A"/>
                 </a:solidFill>
-                <a:latin typeface="Arial"/>
+                <a:latin typeface="Roboto"/>
               </a:rPr>
               <a:t>From gross margin to profit · Services</a:t>
             </a:r>
@@ -7616,12 +8128,17 @@
           </a:bodyPr>
           <a:lstStyle/>
           <a:p>
+            <a:pPr>
+              <a:defRPr>
+                <a:latin typeface="Roboto"/>
+              </a:defRPr>
+            </a:pPr>
             <a:r>
               <a:rPr sz="1200" b="0">
                 <a:solidFill>
                   <a:srgbClr val="5F6F63"/>
                 </a:solidFill>
-                <a:latin typeface="Arial"/>
+                <a:latin typeface="Roboto"/>
               </a:rPr>
               <a:t>January's client work made $59,850 gross margin (64.8%). Consultant time not charged to client work took $8,330 and overheads $51,360, leaving $160 profit before tax (0.2% of revenue). To cover overheads, client work needs a 64.6% gross margin on average.</a:t>
             </a:r>
@@ -7655,7 +8172,13 @@
                   <a:txBody>
                     <a:bodyPr/>
                     <a:lstStyle/>
-                    <a:p/>
+                    <a:p>
+                      <a:pPr>
+                        <a:defRPr>
+                          <a:latin typeface="Roboto"/>
+                        </a:defRPr>
+                      </a:pPr>
+                    </a:p>
                   </a:txBody>
                   <a:tcPr>
                     <a:solidFill>
@@ -7668,12 +8191,17 @@
                     <a:bodyPr/>
                     <a:lstStyle/>
                     <a:p>
-                      <a:pPr algn="r"/>
+                      <a:pPr algn="r">
+                        <a:defRPr>
+                          <a:latin typeface="Roboto"/>
+                        </a:defRPr>
+                      </a:pPr>
                       <a:r>
                         <a:rPr sz="1100" b="1">
                           <a:solidFill>
                             <a:srgbClr val="FFFFFF"/>
                           </a:solidFill>
+                          <a:latin typeface="Roboto"/>
                         </a:rPr>
                         <a:t>January 2026</a:t>
                       </a:r>
@@ -7692,11 +8220,17 @@
                     <a:bodyPr/>
                     <a:lstStyle/>
                     <a:p>
+                      <a:pPr>
+                        <a:defRPr>
+                          <a:latin typeface="Roboto"/>
+                        </a:defRPr>
+                      </a:pPr>
                       <a:r>
                         <a:rPr sz="1050">
                           <a:solidFill>
                             <a:srgbClr val="25342A"/>
                           </a:solidFill>
+                          <a:latin typeface="Roboto"/>
                         </a:rPr>
                         <a:t>Gross margin on client work</a:t>
                       </a:r>
@@ -7713,12 +8247,17 @@
                     <a:bodyPr/>
                     <a:lstStyle/>
                     <a:p>
-                      <a:pPr algn="r"/>
+                      <a:pPr algn="r">
+                        <a:defRPr>
+                          <a:latin typeface="Roboto"/>
+                        </a:defRPr>
+                      </a:pPr>
                       <a:r>
                         <a:rPr sz="1050">
                           <a:solidFill>
                             <a:srgbClr val="25342A"/>
                           </a:solidFill>
+                          <a:latin typeface="Roboto"/>
                         </a:rPr>
                         <a:t>$59,850</a:t>
                       </a:r>
@@ -7737,11 +8276,17 @@
                     <a:bodyPr/>
                     <a:lstStyle/>
                     <a:p>
+                      <a:pPr>
+                        <a:defRPr>
+                          <a:latin typeface="Roboto"/>
+                        </a:defRPr>
+                      </a:pPr>
                       <a:r>
                         <a:rPr sz="1050">
                           <a:solidFill>
                             <a:srgbClr val="25342A"/>
                           </a:solidFill>
+                          <a:latin typeface="Roboto"/>
                         </a:rPr>
                         <a:t>Consultant wages and on-costs</a:t>
                       </a:r>
@@ -7758,12 +8303,17 @@
                     <a:bodyPr/>
                     <a:lstStyle/>
                     <a:p>
-                      <a:pPr algn="r"/>
+                      <a:pPr algn="r">
+                        <a:defRPr>
+                          <a:latin typeface="Roboto"/>
+                        </a:defRPr>
+                      </a:pPr>
                       <a:r>
                         <a:rPr sz="1050">
                           <a:solidFill>
                             <a:srgbClr val="25342A"/>
                           </a:solidFill>
+                          <a:latin typeface="Roboto"/>
                         </a:rPr>
                         <a:t>$38,750</a:t>
                       </a:r>
@@ -7782,11 +8332,17 @@
                     <a:bodyPr/>
                     <a:lstStyle/>
                     <a:p>
+                      <a:pPr>
+                        <a:defRPr>
+                          <a:latin typeface="Roboto"/>
+                        </a:defRPr>
+                      </a:pPr>
                       <a:r>
                         <a:rPr sz="1050">
                           <a:solidFill>
                             <a:srgbClr val="25342A"/>
                           </a:solidFill>
+                          <a:latin typeface="Roboto"/>
                         </a:rPr>
                         <a:t>Consultant time charged to client work (at cost)</a:t>
                       </a:r>
@@ -7803,12 +8359,17 @@
                     <a:bodyPr/>
                     <a:lstStyle/>
                     <a:p>
-                      <a:pPr algn="r"/>
+                      <a:pPr algn="r">
+                        <a:defRPr>
+                          <a:latin typeface="Roboto"/>
+                        </a:defRPr>
+                      </a:pPr>
                       <a:r>
                         <a:rPr sz="1050">
                           <a:solidFill>
                             <a:srgbClr val="25342A"/>
                           </a:solidFill>
+                          <a:latin typeface="Roboto"/>
                         </a:rPr>
                         <a:t>$30,420</a:t>
                       </a:r>
@@ -7827,11 +8388,17 @@
                     <a:bodyPr/>
                     <a:lstStyle/>
                     <a:p>
+                      <a:pPr>
+                        <a:defRPr>
+                          <a:latin typeface="Roboto"/>
+                        </a:defRPr>
+                      </a:pPr>
                       <a:r>
                         <a:rPr sz="1050">
                           <a:solidFill>
                             <a:srgbClr val="25342A"/>
                           </a:solidFill>
+                          <a:latin typeface="Roboto"/>
                         </a:rPr>
                         <a:t>Consultant time not charged to client work</a:t>
                       </a:r>
@@ -7848,12 +8415,17 @@
                     <a:bodyPr/>
                     <a:lstStyle/>
                     <a:p>
-                      <a:pPr algn="r"/>
+                      <a:pPr algn="r">
+                        <a:defRPr>
+                          <a:latin typeface="Roboto"/>
+                        </a:defRPr>
+                      </a:pPr>
                       <a:r>
                         <a:rPr sz="1050">
                           <a:solidFill>
                             <a:srgbClr val="25342A"/>
                           </a:solidFill>
+                          <a:latin typeface="Roboto"/>
                         </a:rPr>
                         <a:t>$8,330</a:t>
                       </a:r>
@@ -7872,11 +8444,17 @@
                     <a:bodyPr/>
                     <a:lstStyle/>
                     <a:p>
+                      <a:pPr>
+                        <a:defRPr>
+                          <a:latin typeface="Roboto"/>
+                        </a:defRPr>
+                      </a:pPr>
                       <a:r>
                         <a:rPr sz="1050">
                           <a:solidFill>
                             <a:srgbClr val="25342A"/>
                           </a:solidFill>
+                          <a:latin typeface="Roboto"/>
                         </a:rPr>
                         <a:t>Gross profit (the P&amp;L)</a:t>
                       </a:r>
@@ -7893,12 +8471,17 @@
                     <a:bodyPr/>
                     <a:lstStyle/>
                     <a:p>
-                      <a:pPr algn="r"/>
+                      <a:pPr algn="r">
+                        <a:defRPr>
+                          <a:latin typeface="Roboto"/>
+                        </a:defRPr>
+                      </a:pPr>
                       <a:r>
                         <a:rPr sz="1050">
                           <a:solidFill>
                             <a:srgbClr val="25342A"/>
                           </a:solidFill>
+                          <a:latin typeface="Roboto"/>
                         </a:rPr>
                         <a:t>$51,520</a:t>
                       </a:r>
@@ -7917,11 +8500,17 @@
                     <a:bodyPr/>
                     <a:lstStyle/>
                     <a:p>
+                      <a:pPr>
+                        <a:defRPr>
+                          <a:latin typeface="Roboto"/>
+                        </a:defRPr>
+                      </a:pPr>
                       <a:r>
                         <a:rPr sz="1050">
                           <a:solidFill>
                             <a:srgbClr val="25342A"/>
                           </a:solidFill>
+                          <a:latin typeface="Roboto"/>
                         </a:rPr>
                         <a:t>Overheads (operating expenses, depreciation, interest)</a:t>
                       </a:r>
@@ -7938,12 +8527,17 @@
                     <a:bodyPr/>
                     <a:lstStyle/>
                     <a:p>
-                      <a:pPr algn="r"/>
+                      <a:pPr algn="r">
+                        <a:defRPr>
+                          <a:latin typeface="Roboto"/>
+                        </a:defRPr>
+                      </a:pPr>
                       <a:r>
                         <a:rPr sz="1050">
                           <a:solidFill>
                             <a:srgbClr val="25342A"/>
                           </a:solidFill>
+                          <a:latin typeface="Roboto"/>
                         </a:rPr>
                         <a:t>$51,360</a:t>
                       </a:r>
@@ -7962,11 +8556,17 @@
                     <a:bodyPr/>
                     <a:lstStyle/>
                     <a:p>
+                      <a:pPr>
+                        <a:defRPr>
+                          <a:latin typeface="Roboto"/>
+                        </a:defRPr>
+                      </a:pPr>
                       <a:r>
                         <a:rPr sz="1050">
                           <a:solidFill>
                             <a:srgbClr val="25342A"/>
                           </a:solidFill>
+                          <a:latin typeface="Roboto"/>
                         </a:rPr>
                         <a:t>Profit before tax (the P&amp;L)</a:t>
                       </a:r>
@@ -7983,12 +8583,17 @@
                     <a:bodyPr/>
                     <a:lstStyle/>
                     <a:p>
-                      <a:pPr algn="r"/>
+                      <a:pPr algn="r">
+                        <a:defRPr>
+                          <a:latin typeface="Roboto"/>
+                        </a:defRPr>
+                      </a:pPr>
                       <a:r>
                         <a:rPr sz="1050">
                           <a:solidFill>
                             <a:srgbClr val="25342A"/>
                           </a:solidFill>
+                          <a:latin typeface="Roboto"/>
                         </a:rPr>
                         <a:t>$160</a:t>
                       </a:r>
@@ -8007,11 +8612,17 @@
                     <a:bodyPr/>
                     <a:lstStyle/>
                     <a:p>
+                      <a:pPr>
+                        <a:defRPr>
+                          <a:latin typeface="Roboto"/>
+                        </a:defRPr>
+                      </a:pPr>
                       <a:r>
                         <a:rPr sz="1050">
                           <a:solidFill>
                             <a:srgbClr val="25342A"/>
                           </a:solidFill>
+                          <a:latin typeface="Roboto"/>
                         </a:rPr>
                         <a:t>Revenue</a:t>
                       </a:r>
@@ -8028,12 +8639,17 @@
                     <a:bodyPr/>
                     <a:lstStyle/>
                     <a:p>
-                      <a:pPr algn="r"/>
+                      <a:pPr algn="r">
+                        <a:defRPr>
+                          <a:latin typeface="Roboto"/>
+                        </a:defRPr>
+                      </a:pPr>
                       <a:r>
                         <a:rPr sz="1050">
                           <a:solidFill>
                             <a:srgbClr val="25342A"/>
                           </a:solidFill>
+                          <a:latin typeface="Roboto"/>
                         </a:rPr>
                         <a:t>$92,370</a:t>
                       </a:r>
@@ -8052,11 +8668,17 @@
                     <a:bodyPr/>
                     <a:lstStyle/>
                     <a:p>
+                      <a:pPr>
+                        <a:defRPr>
+                          <a:latin typeface="Roboto"/>
+                        </a:defRPr>
+                      </a:pPr>
                       <a:r>
                         <a:rPr sz="1050">
                           <a:solidFill>
                             <a:srgbClr val="25342A"/>
                           </a:solidFill>
+                          <a:latin typeface="Roboto"/>
                         </a:rPr>
                         <a:t>Gross margin on client work, %</a:t>
                       </a:r>
@@ -8073,12 +8695,17 @@
                     <a:bodyPr/>
                     <a:lstStyle/>
                     <a:p>
-                      <a:pPr algn="r"/>
+                      <a:pPr algn="r">
+                        <a:defRPr>
+                          <a:latin typeface="Roboto"/>
+                        </a:defRPr>
+                      </a:pPr>
                       <a:r>
                         <a:rPr sz="1050">
                           <a:solidFill>
                             <a:srgbClr val="25342A"/>
                           </a:solidFill>
+                          <a:latin typeface="Roboto"/>
                         </a:rPr>
                         <a:t>64.8%</a:t>
                       </a:r>
@@ -8097,11 +8724,17 @@
                     <a:bodyPr/>
                     <a:lstStyle/>
                     <a:p>
+                      <a:pPr>
+                        <a:defRPr>
+                          <a:latin typeface="Roboto"/>
+                        </a:defRPr>
+                      </a:pPr>
                       <a:r>
                         <a:rPr sz="1050">
                           <a:solidFill>
                             <a:srgbClr val="25342A"/>
                           </a:solidFill>
+                          <a:latin typeface="Roboto"/>
                         </a:rPr>
                         <a:t>Profit before tax, % of revenue</a:t>
                       </a:r>
@@ -8118,12 +8751,17 @@
                     <a:bodyPr/>
                     <a:lstStyle/>
                     <a:p>
-                      <a:pPr algn="r"/>
+                      <a:pPr algn="r">
+                        <a:defRPr>
+                          <a:latin typeface="Roboto"/>
+                        </a:defRPr>
+                      </a:pPr>
                       <a:r>
                         <a:rPr sz="1050">
                           <a:solidFill>
                             <a:srgbClr val="25342A"/>
                           </a:solidFill>
+                          <a:latin typeface="Roboto"/>
                         </a:rPr>
                         <a:t>0.2%</a:t>
                       </a:r>
@@ -8142,11 +8780,17 @@
                     <a:bodyPr/>
                     <a:lstStyle/>
                     <a:p>
+                      <a:pPr>
+                        <a:defRPr>
+                          <a:latin typeface="Roboto"/>
+                        </a:defRPr>
+                      </a:pPr>
                       <a:r>
                         <a:rPr sz="1050">
                           <a:solidFill>
                             <a:srgbClr val="25342A"/>
                           </a:solidFill>
+                          <a:latin typeface="Roboto"/>
                         </a:rPr>
                         <a:t>Gross margin client work need just to cover overheads and time not charged</a:t>
                       </a:r>
@@ -8163,12 +8807,17 @@
                     <a:bodyPr/>
                     <a:lstStyle/>
                     <a:p>
-                      <a:pPr algn="r"/>
+                      <a:pPr algn="r">
+                        <a:defRPr>
+                          <a:latin typeface="Roboto"/>
+                        </a:defRPr>
+                      </a:pPr>
                       <a:r>
                         <a:rPr sz="1050">
                           <a:solidFill>
                             <a:srgbClr val="25342A"/>
                           </a:solidFill>
+                          <a:latin typeface="Roboto"/>
                         </a:rPr>
                         <a:t>64.6%</a:t>
                       </a:r>
@@ -8207,12 +8856,17 @@
           </a:bodyPr>
           <a:lstStyle/>
           <a:p>
+            <a:pPr>
+              <a:defRPr>
+                <a:latin typeface="Roboto"/>
+              </a:defRPr>
+            </a:pPr>
             <a:r>
               <a:rPr sz="900" b="0">
                 <a:solidFill>
                   <a:srgbClr val="5F6F63"/>
                 </a:solidFill>
-                <a:latin typeface="Arial"/>
+                <a:latin typeface="Roboto"/>
               </a:rPr>
               <a:t>growth.pptx</a:t>
             </a:r>
@@ -8241,13 +8895,17 @@
           </a:bodyPr>
           <a:lstStyle/>
           <a:p>
-            <a:pPr algn="ctr"/>
+            <a:pPr algn="ctr">
+              <a:defRPr>
+                <a:latin typeface="Roboto"/>
+              </a:defRPr>
+            </a:pPr>
             <a:r>
               <a:rPr sz="900" b="0">
                 <a:solidFill>
                   <a:srgbClr val="5F6F63"/>
                 </a:solidFill>
-                <a:latin typeface="Arial"/>
+                <a:latin typeface="Roboto"/>
               </a:rPr>
               <a:t>Data retrieved 2pm, Tue 6 Oct 2026 · Sample data</a:t>
             </a:r>
@@ -8276,13 +8934,17 @@
           </a:bodyPr>
           <a:lstStyle/>
           <a:p>
-            <a:pPr algn="r"/>
+            <a:pPr algn="r">
+              <a:defRPr>
+                <a:latin typeface="Roboto"/>
+              </a:defRPr>
+            </a:pPr>
             <a:r>
               <a:rPr sz="900" b="0">
                 <a:solidFill>
                   <a:srgbClr val="5F6F63"/>
                 </a:solidFill>
-                <a:latin typeface="Arial"/>
+                <a:latin typeface="Roboto"/>
               </a:rPr>
               <a:t>Slide 16 of 27</a:t>
             </a:r>
@@ -8346,7 +9008,11 @@
           <a:bodyPr rtlCol="0" anchor="ctr"/>
           <a:lstStyle/>
           <a:p>
-            <a:pPr algn="ctr"/>
+            <a:pPr algn="ctr">
+              <a:defRPr>
+                <a:latin typeface="Roboto"/>
+              </a:defRPr>
+            </a:pPr>
           </a:p>
         </p:txBody>
       </p:sp>
@@ -8372,12 +9038,17 @@
           </a:bodyPr>
           <a:lstStyle/>
           <a:p>
+            <a:pPr>
+              <a:defRPr>
+                <a:latin typeface="Roboto"/>
+              </a:defRPr>
+            </a:pPr>
             <a:r>
               <a:rPr sz="1000" b="0">
                 <a:solidFill>
                   <a:srgbClr val="5F6F63"/>
                 </a:solidFill>
-                <a:latin typeface="Arial"/>
+                <a:latin typeface="Roboto"/>
               </a:rPr>
               <a:t>SME sample businesses · Which products and services are growing?</a:t>
             </a:r>
@@ -8406,12 +9077,17 @@
           </a:bodyPr>
           <a:lstStyle/>
           <a:p>
+            <a:pPr>
+              <a:defRPr>
+                <a:latin typeface="Roboto"/>
+              </a:defRPr>
+            </a:pPr>
             <a:r>
               <a:rPr sz="2400" b="1">
                 <a:solidFill>
                   <a:srgbClr val="25342A"/>
                 </a:solidFill>
-                <a:latin typeface="Arial"/>
+                <a:latin typeface="Roboto"/>
               </a:rPr>
               <a:t>Headline numbers · Services · Type of work: All</a:t>
             </a:r>
@@ -8459,7 +9135,11 @@
           <a:bodyPr rtlCol="0" anchor="ctr"/>
           <a:lstStyle/>
           <a:p>
-            <a:pPr algn="ctr"/>
+            <a:pPr algn="ctr">
+              <a:defRPr>
+                <a:latin typeface="Roboto"/>
+              </a:defRPr>
+            </a:pPr>
           </a:p>
         </p:txBody>
       </p:sp>
@@ -8485,12 +9165,17 @@
           </a:bodyPr>
           <a:lstStyle/>
           <a:p>
+            <a:pPr>
+              <a:defRPr>
+                <a:latin typeface="Roboto"/>
+              </a:defRPr>
+            </a:pPr>
             <a:r>
               <a:rPr sz="1200" b="0">
                 <a:solidFill>
                   <a:srgbClr val="5F6F63"/>
                 </a:solidFill>
-                <a:latin typeface="Arial"/>
+                <a:latin typeface="Roboto"/>
               </a:rPr>
               <a:t>January against January last year</a:t>
             </a:r>
@@ -8519,12 +9204,17 @@
           </a:bodyPr>
           <a:lstStyle/>
           <a:p>
+            <a:pPr>
+              <a:defRPr>
+                <a:latin typeface="Roboto"/>
+              </a:defRPr>
+            </a:pPr>
             <a:r>
               <a:rPr sz="3000" b="1">
                 <a:solidFill>
                   <a:srgbClr val="2F7A5D"/>
                 </a:solidFill>
-                <a:latin typeface="Arial"/>
+                <a:latin typeface="Roboto"/>
               </a:rPr>
               <a:t>4.7%</a:t>
             </a:r>
@@ -8553,12 +9243,17 @@
           </a:bodyPr>
           <a:lstStyle/>
           <a:p>
+            <a:pPr>
+              <a:defRPr>
+                <a:latin typeface="Roboto"/>
+              </a:defRPr>
+            </a:pPr>
             <a:r>
               <a:rPr sz="1100" b="0">
                 <a:solidFill>
                   <a:srgbClr val="5F6F63"/>
                 </a:solidFill>
-                <a:latin typeface="Arial"/>
+                <a:latin typeface="Roboto"/>
               </a:rPr>
               <a:t>$92,370 against $88,250</a:t>
             </a:r>
@@ -8606,7 +9301,11 @@
           <a:bodyPr rtlCol="0" anchor="ctr"/>
           <a:lstStyle/>
           <a:p>
-            <a:pPr algn="ctr"/>
+            <a:pPr algn="ctr">
+              <a:defRPr>
+                <a:latin typeface="Roboto"/>
+              </a:defRPr>
+            </a:pPr>
           </a:p>
         </p:txBody>
       </p:sp>
@@ -8632,12 +9331,17 @@
           </a:bodyPr>
           <a:lstStyle/>
           <a:p>
+            <a:pPr>
+              <a:defRPr>
+                <a:latin typeface="Roboto"/>
+              </a:defRPr>
+            </a:pPr>
             <a:r>
               <a:rPr sz="1200" b="0">
                 <a:solidFill>
                   <a:srgbClr val="5F6F63"/>
                 </a:solidFill>
-                <a:latin typeface="Arial"/>
+                <a:latin typeface="Roboto"/>
               </a:rPr>
               <a:t>Year to date (Jul to Jan 2026)</a:t>
             </a:r>
@@ -8666,12 +9370,17 @@
           </a:bodyPr>
           <a:lstStyle/>
           <a:p>
+            <a:pPr>
+              <a:defRPr>
+                <a:latin typeface="Roboto"/>
+              </a:defRPr>
+            </a:pPr>
             <a:r>
               <a:rPr sz="3000" b="1">
                 <a:solidFill>
                   <a:srgbClr val="2F7A5D"/>
                 </a:solidFill>
-                <a:latin typeface="Arial"/>
+                <a:latin typeface="Roboto"/>
               </a:rPr>
               <a:t>$524,320</a:t>
             </a:r>
@@ -8700,12 +9409,17 @@
           </a:bodyPr>
           <a:lstStyle/>
           <a:p>
+            <a:pPr>
+              <a:defRPr>
+                <a:latin typeface="Roboto"/>
+              </a:defRPr>
+            </a:pPr>
             <a:r>
               <a:rPr sz="1100" b="0">
                 <a:solidFill>
                   <a:srgbClr val="5F6F63"/>
                 </a:solidFill>
-                <a:latin typeface="Arial"/>
+                <a:latin typeface="Roboto"/>
               </a:rPr>
               <a:t>same period last year: not in the data</a:t>
             </a:r>
@@ -8753,7 +9467,11 @@
           <a:bodyPr rtlCol="0" anchor="ctr"/>
           <a:lstStyle/>
           <a:p>
-            <a:pPr algn="ctr"/>
+            <a:pPr algn="ctr">
+              <a:defRPr>
+                <a:latin typeface="Roboto"/>
+              </a:defRPr>
+            </a:pPr>
           </a:p>
         </p:txBody>
       </p:sp>
@@ -8779,12 +9497,17 @@
           </a:bodyPr>
           <a:lstStyle/>
           <a:p>
+            <a:pPr>
+              <a:defRPr>
+                <a:latin typeface="Roboto"/>
+              </a:defRPr>
+            </a:pPr>
             <a:r>
               <a:rPr sz="1200" b="0">
                 <a:solidFill>
                   <a:srgbClr val="5F6F63"/>
                 </a:solidFill>
-                <a:latin typeface="Arial"/>
+                <a:latin typeface="Roboto"/>
               </a:rPr>
               <a:t>Gross margin, year to date</a:t>
             </a:r>
@@ -8813,12 +9536,17 @@
           </a:bodyPr>
           <a:lstStyle/>
           <a:p>
+            <a:pPr>
+              <a:defRPr>
+                <a:latin typeface="Roboto"/>
+              </a:defRPr>
+            </a:pPr>
             <a:r>
               <a:rPr sz="3000" b="1">
                 <a:solidFill>
                   <a:srgbClr val="2F7A5D"/>
                 </a:solidFill>
-                <a:latin typeface="Arial"/>
+                <a:latin typeface="Roboto"/>
               </a:rPr>
               <a:t>64.1%</a:t>
             </a:r>
@@ -8847,12 +9575,17 @@
           </a:bodyPr>
           <a:lstStyle/>
           <a:p>
+            <a:pPr>
+              <a:defRPr>
+                <a:latin typeface="Roboto"/>
+              </a:defRPr>
+            </a:pPr>
             <a:r>
               <a:rPr sz="1100" b="0">
                 <a:solidFill>
                   <a:srgbClr val="5F6F63"/>
                 </a:solidFill>
-                <a:latin typeface="Arial"/>
+                <a:latin typeface="Roboto"/>
               </a:rPr>
               <a:t>$336,140 before overheads</a:t>
             </a:r>
@@ -8881,12 +9614,17 @@
           </a:bodyPr>
           <a:lstStyle/>
           <a:p>
+            <a:pPr>
+              <a:defRPr>
+                <a:latin typeface="Roboto"/>
+              </a:defRPr>
+            </a:pPr>
             <a:r>
               <a:rPr sz="900" b="0">
                 <a:solidFill>
                   <a:srgbClr val="5F6F63"/>
                 </a:solidFill>
-                <a:latin typeface="Arial"/>
+                <a:latin typeface="Roboto"/>
               </a:rPr>
               <a:t>growth.pptx</a:t>
             </a:r>
@@ -8915,13 +9653,17 @@
           </a:bodyPr>
           <a:lstStyle/>
           <a:p>
-            <a:pPr algn="ctr"/>
+            <a:pPr algn="ctr">
+              <a:defRPr>
+                <a:latin typeface="Roboto"/>
+              </a:defRPr>
+            </a:pPr>
             <a:r>
               <a:rPr sz="900" b="0">
                 <a:solidFill>
                   <a:srgbClr val="5F6F63"/>
                 </a:solidFill>
-                <a:latin typeface="Arial"/>
+                <a:latin typeface="Roboto"/>
               </a:rPr>
               <a:t>Data retrieved 2pm, Tue 6 Oct 2026 · Sample data</a:t>
             </a:r>
@@ -8950,13 +9692,17 @@
           </a:bodyPr>
           <a:lstStyle/>
           <a:p>
-            <a:pPr algn="r"/>
+            <a:pPr algn="r">
+              <a:defRPr>
+                <a:latin typeface="Roboto"/>
+              </a:defRPr>
+            </a:pPr>
             <a:r>
               <a:rPr sz="900" b="0">
                 <a:solidFill>
                   <a:srgbClr val="5F6F63"/>
                 </a:solidFill>
-                <a:latin typeface="Arial"/>
+                <a:latin typeface="Roboto"/>
               </a:rPr>
               <a:t>Slide 17 of 27</a:t>
             </a:r>
@@ -9020,7 +9766,11 @@
           <a:bodyPr rtlCol="0" anchor="ctr"/>
           <a:lstStyle/>
           <a:p>
-            <a:pPr algn="ctr"/>
+            <a:pPr algn="ctr">
+              <a:defRPr>
+                <a:latin typeface="Roboto"/>
+              </a:defRPr>
+            </a:pPr>
           </a:p>
         </p:txBody>
       </p:sp>
@@ -9046,12 +9796,17 @@
           </a:bodyPr>
           <a:lstStyle/>
           <a:p>
+            <a:pPr>
+              <a:defRPr>
+                <a:latin typeface="Roboto"/>
+              </a:defRPr>
+            </a:pPr>
             <a:r>
               <a:rPr sz="1000" b="0">
                 <a:solidFill>
                   <a:srgbClr val="5F6F63"/>
                 </a:solidFill>
-                <a:latin typeface="Arial"/>
+                <a:latin typeface="Roboto"/>
               </a:rPr>
               <a:t>SME sample businesses · Which products and services are growing?</a:t>
             </a:r>
@@ -9080,12 +9835,17 @@
           </a:bodyPr>
           <a:lstStyle/>
           <a:p>
+            <a:pPr>
+              <a:defRPr>
+                <a:latin typeface="Roboto"/>
+              </a:defRPr>
+            </a:pPr>
             <a:r>
               <a:rPr sz="2400" b="1">
                 <a:solidFill>
                   <a:srgbClr val="25342A"/>
                 </a:solidFill>
-                <a:latin typeface="Arial"/>
+                <a:latin typeface="Roboto"/>
               </a:rPr>
               <a:t>What it shows · Services · Type of work: All</a:t>
             </a:r>
@@ -9133,7 +9893,11 @@
           <a:bodyPr rtlCol="0" anchor="ctr"/>
           <a:lstStyle/>
           <a:p>
-            <a:pPr algn="ctr"/>
+            <a:pPr algn="ctr">
+              <a:defRPr>
+                <a:latin typeface="Roboto"/>
+              </a:defRPr>
+            </a:pPr>
           </a:p>
         </p:txBody>
       </p:sp>
@@ -9159,12 +9923,17 @@
           </a:bodyPr>
           <a:lstStyle/>
           <a:p>
+            <a:pPr>
+              <a:defRPr>
+                <a:latin typeface="Roboto"/>
+              </a:defRPr>
+            </a:pPr>
             <a:r>
               <a:rPr sz="1100" b="1">
                 <a:solidFill>
                   <a:srgbClr val="5F6F63"/>
                 </a:solidFill>
-                <a:latin typeface="Arial"/>
+                <a:latin typeface="Roboto"/>
               </a:rPr>
               <a:t>WHAT IT SHOWS</a:t>
             </a:r>
@@ -9193,12 +9962,17 @@
           </a:bodyPr>
           <a:lstStyle/>
           <a:p>
+            <a:pPr>
+              <a:defRPr>
+                <a:latin typeface="Roboto"/>
+              </a:defRPr>
+            </a:pPr>
             <a:r>
               <a:rPr sz="1600" b="0">
                 <a:solidFill>
                   <a:srgbClr val="25342A"/>
                 </a:solidFill>
-                <a:latin typeface="Arial"/>
+                <a:latin typeface="Roboto"/>
               </a:rPr>
               <a:t>Revenue is $524,320 this financial year to date (Jul to Jan 2026). Training makes the highest gross margin (75.7%); Projects the lowest (61.3%). The business needs 64.6% gross margin just to cover overheads.</a:t>
             </a:r>
@@ -9246,7 +10020,11 @@
           <a:bodyPr rtlCol="0" anchor="ctr"/>
           <a:lstStyle/>
           <a:p>
-            <a:pPr algn="ctr"/>
+            <a:pPr algn="ctr">
+              <a:defRPr>
+                <a:latin typeface="Roboto"/>
+              </a:defRPr>
+            </a:pPr>
           </a:p>
         </p:txBody>
       </p:sp>
@@ -9272,12 +10050,17 @@
           </a:bodyPr>
           <a:lstStyle/>
           <a:p>
+            <a:pPr>
+              <a:defRPr>
+                <a:latin typeface="Roboto"/>
+              </a:defRPr>
+            </a:pPr>
             <a:r>
               <a:rPr sz="1100" b="1">
                 <a:solidFill>
                   <a:srgbClr val="5F6F63"/>
                 </a:solidFill>
-                <a:latin typeface="Arial"/>
+                <a:latin typeface="Roboto"/>
               </a:rPr>
               <a:t>WHAT YOU'D DO ABOUT IT</a:t>
             </a:r>
@@ -9306,12 +10089,17 @@
           </a:bodyPr>
           <a:lstStyle/>
           <a:p>
+            <a:pPr>
+              <a:defRPr>
+                <a:latin typeface="Roboto"/>
+              </a:defRPr>
+            </a:pPr>
             <a:r>
               <a:rPr sz="1600" b="0">
                 <a:solidFill>
                   <a:srgbClr val="25342A"/>
                 </a:solidFill>
-                <a:latin typeface="Arial"/>
+                <a:latin typeface="Roboto"/>
               </a:rPr>
               <a:t>Training: 75.7% gross margin, the most profitable work you do. Projects: 61.3% gross margin, below the 64.6% needed to cover overheads.</a:t>
             </a:r>
@@ -9340,12 +10128,17 @@
           </a:bodyPr>
           <a:lstStyle/>
           <a:p>
+            <a:pPr>
+              <a:defRPr>
+                <a:latin typeface="Roboto"/>
+              </a:defRPr>
+            </a:pPr>
             <a:r>
               <a:rPr sz="900" b="0">
                 <a:solidFill>
                   <a:srgbClr val="5F6F63"/>
                 </a:solidFill>
-                <a:latin typeface="Arial"/>
+                <a:latin typeface="Roboto"/>
               </a:rPr>
               <a:t>growth.pptx</a:t>
             </a:r>
@@ -9374,13 +10167,17 @@
           </a:bodyPr>
           <a:lstStyle/>
           <a:p>
-            <a:pPr algn="ctr"/>
+            <a:pPr algn="ctr">
+              <a:defRPr>
+                <a:latin typeface="Roboto"/>
+              </a:defRPr>
+            </a:pPr>
             <a:r>
               <a:rPr sz="900" b="0">
                 <a:solidFill>
                   <a:srgbClr val="5F6F63"/>
                 </a:solidFill>
-                <a:latin typeface="Arial"/>
+                <a:latin typeface="Roboto"/>
               </a:rPr>
               <a:t>Data retrieved 2pm, Tue 6 Oct 2026 · Sample data</a:t>
             </a:r>
@@ -9409,13 +10206,17 @@
           </a:bodyPr>
           <a:lstStyle/>
           <a:p>
-            <a:pPr algn="r"/>
+            <a:pPr algn="r">
+              <a:defRPr>
+                <a:latin typeface="Roboto"/>
+              </a:defRPr>
+            </a:pPr>
             <a:r>
               <a:rPr sz="900" b="0">
                 <a:solidFill>
                   <a:srgbClr val="5F6F63"/>
                 </a:solidFill>
-                <a:latin typeface="Arial"/>
+                <a:latin typeface="Roboto"/>
               </a:rPr>
               <a:t>Slide 18 of 27</a:t>
             </a:r>
@@ -9479,7 +10280,11 @@
           <a:bodyPr rtlCol="0" anchor="ctr"/>
           <a:lstStyle/>
           <a:p>
-            <a:pPr algn="ctr"/>
+            <a:pPr algn="ctr">
+              <a:defRPr>
+                <a:latin typeface="Roboto"/>
+              </a:defRPr>
+            </a:pPr>
           </a:p>
         </p:txBody>
       </p:sp>
@@ -9505,12 +10310,17 @@
           </a:bodyPr>
           <a:lstStyle/>
           <a:p>
+            <a:pPr>
+              <a:defRPr>
+                <a:latin typeface="Roboto"/>
+              </a:defRPr>
+            </a:pPr>
             <a:r>
               <a:rPr sz="1000" b="0">
                 <a:solidFill>
                   <a:srgbClr val="5F6F63"/>
                 </a:solidFill>
-                <a:latin typeface="Arial"/>
+                <a:latin typeface="Roboto"/>
               </a:rPr>
               <a:t>SME sample businesses · Which products and services are growing?</a:t>
             </a:r>
@@ -9539,12 +10349,17 @@
           </a:bodyPr>
           <a:lstStyle/>
           <a:p>
+            <a:pPr>
+              <a:defRPr>
+                <a:latin typeface="Roboto"/>
+              </a:defRPr>
+            </a:pPr>
             <a:r>
               <a:rPr sz="2400" b="1">
                 <a:solidFill>
                   <a:srgbClr val="25342A"/>
                 </a:solidFill>
-                <a:latin typeface="Arial"/>
+                <a:latin typeface="Roboto"/>
               </a:rPr>
               <a:t>Headline numbers · Services · Type of work: Projects</a:t>
             </a:r>
@@ -9592,7 +10407,11 @@
           <a:bodyPr rtlCol="0" anchor="ctr"/>
           <a:lstStyle/>
           <a:p>
-            <a:pPr algn="ctr"/>
+            <a:pPr algn="ctr">
+              <a:defRPr>
+                <a:latin typeface="Roboto"/>
+              </a:defRPr>
+            </a:pPr>
           </a:p>
         </p:txBody>
       </p:sp>
@@ -9618,12 +10437,17 @@
           </a:bodyPr>
           <a:lstStyle/>
           <a:p>
+            <a:pPr>
+              <a:defRPr>
+                <a:latin typeface="Roboto"/>
+              </a:defRPr>
+            </a:pPr>
             <a:r>
               <a:rPr sz="1200" b="0">
                 <a:solidFill>
                   <a:srgbClr val="5F6F63"/>
                 </a:solidFill>
-                <a:latin typeface="Arial"/>
+                <a:latin typeface="Roboto"/>
               </a:rPr>
               <a:t>January against January last year</a:t>
             </a:r>
@@ -9652,12 +10476,17 @@
           </a:bodyPr>
           <a:lstStyle/>
           <a:p>
+            <a:pPr>
+              <a:defRPr>
+                <a:latin typeface="Roboto"/>
+              </a:defRPr>
+            </a:pPr>
             <a:r>
               <a:rPr sz="3000" b="1">
                 <a:solidFill>
                   <a:srgbClr val="B42318"/>
                 </a:solidFill>
-                <a:latin typeface="Arial"/>
+                <a:latin typeface="Roboto"/>
               </a:rPr>
               <a:t>(10.0%)</a:t>
             </a:r>
@@ -9686,12 +10515,17 @@
           </a:bodyPr>
           <a:lstStyle/>
           <a:p>
+            <a:pPr>
+              <a:defRPr>
+                <a:latin typeface="Roboto"/>
+              </a:defRPr>
+            </a:pPr>
             <a:r>
               <a:rPr sz="1100" b="0">
                 <a:solidFill>
                   <a:srgbClr val="5F6F63"/>
                 </a:solidFill>
-                <a:latin typeface="Arial"/>
+                <a:latin typeface="Roboto"/>
               </a:rPr>
               <a:t>$60,170 against $66,850</a:t>
             </a:r>
@@ -9739,7 +10573,11 @@
           <a:bodyPr rtlCol="0" anchor="ctr"/>
           <a:lstStyle/>
           <a:p>
-            <a:pPr algn="ctr"/>
+            <a:pPr algn="ctr">
+              <a:defRPr>
+                <a:latin typeface="Roboto"/>
+              </a:defRPr>
+            </a:pPr>
           </a:p>
         </p:txBody>
       </p:sp>
@@ -9765,12 +10603,17 @@
           </a:bodyPr>
           <a:lstStyle/>
           <a:p>
+            <a:pPr>
+              <a:defRPr>
+                <a:latin typeface="Roboto"/>
+              </a:defRPr>
+            </a:pPr>
             <a:r>
               <a:rPr sz="1200" b="0">
                 <a:solidFill>
                   <a:srgbClr val="5F6F63"/>
                 </a:solidFill>
-                <a:latin typeface="Arial"/>
+                <a:latin typeface="Roboto"/>
               </a:rPr>
               <a:t>Year to date (Jul to Jan 2026)</a:t>
             </a:r>
@@ -9799,12 +10642,17 @@
           </a:bodyPr>
           <a:lstStyle/>
           <a:p>
+            <a:pPr>
+              <a:defRPr>
+                <a:latin typeface="Roboto"/>
+              </a:defRPr>
+            </a:pPr>
             <a:r>
               <a:rPr sz="3000" b="1">
                 <a:solidFill>
                   <a:srgbClr val="2F7A5D"/>
                 </a:solidFill>
-                <a:latin typeface="Arial"/>
+                <a:latin typeface="Roboto"/>
               </a:rPr>
               <a:t>$324,020</a:t>
             </a:r>
@@ -9833,12 +10681,17 @@
           </a:bodyPr>
           <a:lstStyle/>
           <a:p>
+            <a:pPr>
+              <a:defRPr>
+                <a:latin typeface="Roboto"/>
+              </a:defRPr>
+            </a:pPr>
             <a:r>
               <a:rPr sz="1100" b="0">
                 <a:solidFill>
                   <a:srgbClr val="5F6F63"/>
                 </a:solidFill>
-                <a:latin typeface="Arial"/>
+                <a:latin typeface="Roboto"/>
               </a:rPr>
               <a:t>same period last year: not in the data</a:t>
             </a:r>
@@ -9886,7 +10739,11 @@
           <a:bodyPr rtlCol="0" anchor="ctr"/>
           <a:lstStyle/>
           <a:p>
-            <a:pPr algn="ctr"/>
+            <a:pPr algn="ctr">
+              <a:defRPr>
+                <a:latin typeface="Roboto"/>
+              </a:defRPr>
+            </a:pPr>
           </a:p>
         </p:txBody>
       </p:sp>
@@ -9912,12 +10769,17 @@
           </a:bodyPr>
           <a:lstStyle/>
           <a:p>
+            <a:pPr>
+              <a:defRPr>
+                <a:latin typeface="Roboto"/>
+              </a:defRPr>
+            </a:pPr>
             <a:r>
               <a:rPr sz="1200" b="0">
                 <a:solidFill>
                   <a:srgbClr val="5F6F63"/>
                 </a:solidFill>
-                <a:latin typeface="Arial"/>
+                <a:latin typeface="Roboto"/>
               </a:rPr>
               <a:t>Gross margin, year to date</a:t>
             </a:r>
@@ -9946,12 +10808,17 @@
           </a:bodyPr>
           <a:lstStyle/>
           <a:p>
+            <a:pPr>
+              <a:defRPr>
+                <a:latin typeface="Roboto"/>
+              </a:defRPr>
+            </a:pPr>
             <a:r>
               <a:rPr sz="3000" b="1">
                 <a:solidFill>
                   <a:srgbClr val="2F7A5D"/>
                 </a:solidFill>
-                <a:latin typeface="Arial"/>
+                <a:latin typeface="Roboto"/>
               </a:rPr>
               <a:t>61.3%</a:t>
             </a:r>
@@ -9980,12 +10847,17 @@
           </a:bodyPr>
           <a:lstStyle/>
           <a:p>
+            <a:pPr>
+              <a:defRPr>
+                <a:latin typeface="Roboto"/>
+              </a:defRPr>
+            </a:pPr>
             <a:r>
               <a:rPr sz="1100" b="0">
                 <a:solidFill>
                   <a:srgbClr val="5F6F63"/>
                 </a:solidFill>
-                <a:latin typeface="Arial"/>
+                <a:latin typeface="Roboto"/>
               </a:rPr>
               <a:t>$198,720 before overheads</a:t>
             </a:r>
@@ -10014,12 +10886,17 @@
           </a:bodyPr>
           <a:lstStyle/>
           <a:p>
+            <a:pPr>
+              <a:defRPr>
+                <a:latin typeface="Roboto"/>
+              </a:defRPr>
+            </a:pPr>
             <a:r>
               <a:rPr sz="900" b="0">
                 <a:solidFill>
                   <a:srgbClr val="5F6F63"/>
                 </a:solidFill>
-                <a:latin typeface="Arial"/>
+                <a:latin typeface="Roboto"/>
               </a:rPr>
               <a:t>growth.pptx</a:t>
             </a:r>
@@ -10048,13 +10925,17 @@
           </a:bodyPr>
           <a:lstStyle/>
           <a:p>
-            <a:pPr algn="ctr"/>
+            <a:pPr algn="ctr">
+              <a:defRPr>
+                <a:latin typeface="Roboto"/>
+              </a:defRPr>
+            </a:pPr>
             <a:r>
               <a:rPr sz="900" b="0">
                 <a:solidFill>
                   <a:srgbClr val="5F6F63"/>
                 </a:solidFill>
-                <a:latin typeface="Arial"/>
+                <a:latin typeface="Roboto"/>
               </a:rPr>
               <a:t>Data retrieved 2pm, Tue 6 Oct 2026 · Sample data</a:t>
             </a:r>
@@ -10083,13 +10964,17 @@
           </a:bodyPr>
           <a:lstStyle/>
           <a:p>
-            <a:pPr algn="r"/>
+            <a:pPr algn="r">
+              <a:defRPr>
+                <a:latin typeface="Roboto"/>
+              </a:defRPr>
+            </a:pPr>
             <a:r>
               <a:rPr sz="900" b="0">
                 <a:solidFill>
                   <a:srgbClr val="5F6F63"/>
                 </a:solidFill>
-                <a:latin typeface="Arial"/>
+                <a:latin typeface="Roboto"/>
               </a:rPr>
               <a:t>Slide 19 of 27</a:t>
             </a:r>
@@ -10153,7 +11038,11 @@
           <a:bodyPr rtlCol="0" anchor="ctr"/>
           <a:lstStyle/>
           <a:p>
-            <a:pPr algn="ctr"/>
+            <a:pPr algn="ctr">
+              <a:defRPr>
+                <a:latin typeface="Roboto"/>
+              </a:defRPr>
+            </a:pPr>
           </a:p>
         </p:txBody>
       </p:sp>
@@ -10179,12 +11068,17 @@
           </a:bodyPr>
           <a:lstStyle/>
           <a:p>
+            <a:pPr>
+              <a:defRPr>
+                <a:latin typeface="Roboto"/>
+              </a:defRPr>
+            </a:pPr>
             <a:r>
               <a:rPr sz="1000" b="0">
                 <a:solidFill>
                   <a:srgbClr val="5F6F63"/>
                 </a:solidFill>
-                <a:latin typeface="Arial"/>
+                <a:latin typeface="Roboto"/>
               </a:rPr>
               <a:t>SME sample businesses · Which products and services are growing?</a:t>
             </a:r>
@@ -10213,12 +11107,17 @@
           </a:bodyPr>
           <a:lstStyle/>
           <a:p>
+            <a:pPr>
+              <a:defRPr>
+                <a:latin typeface="Roboto"/>
+              </a:defRPr>
+            </a:pPr>
             <a:r>
               <a:rPr sz="2400" b="1">
                 <a:solidFill>
                   <a:srgbClr val="25342A"/>
                 </a:solidFill>
-                <a:latin typeface="Arial"/>
+                <a:latin typeface="Roboto"/>
               </a:rPr>
               <a:t>Gross margin, not profit</a:t>
             </a:r>
@@ -10266,7 +11165,11 @@
           <a:bodyPr rtlCol="0" anchor="ctr"/>
           <a:lstStyle/>
           <a:p>
-            <a:pPr algn="ctr"/>
+            <a:pPr algn="ctr">
+              <a:defRPr>
+                <a:latin typeface="Roboto"/>
+              </a:defRPr>
+            </a:pPr>
           </a:p>
         </p:txBody>
       </p:sp>
@@ -10292,12 +11195,17 @@
           </a:bodyPr>
           <a:lstStyle/>
           <a:p>
+            <a:pPr>
+              <a:defRPr>
+                <a:latin typeface="Roboto"/>
+              </a:defRPr>
+            </a:pPr>
             <a:r>
               <a:rPr sz="1100" b="1">
                 <a:solidFill>
                   <a:srgbClr val="5F6F63"/>
                 </a:solidFill>
-                <a:latin typeface="Arial"/>
+                <a:latin typeface="Roboto"/>
               </a:rPr>
               <a:t>GROSS MARGIN, NOT PROFIT</a:t>
             </a:r>
@@ -10326,12 +11234,17 @@
           </a:bodyPr>
           <a:lstStyle/>
           <a:p>
+            <a:pPr>
+              <a:defRPr>
+                <a:latin typeface="Roboto"/>
+              </a:defRPr>
+            </a:pPr>
             <a:r>
               <a:rPr sz="1600" b="0">
                 <a:solidFill>
                   <a:srgbClr val="25342A"/>
                 </a:solidFill>
-                <a:latin typeface="Arial"/>
+                <a:latin typeface="Roboto"/>
               </a:rPr>
               <a:t>Gross margin is not profit. Job gross margin = revenue less materials, subcontractors and technician time charged to the job at $68 an hour (wages and all on-costs). Not included: technician time not charged to any job (travel, training, waiting), and overheads (office wages, marketing, vehicles, rent, insurance, IT, depreciation, interest). Profit is what's left after those. Wages always include all on-costs: super, payroll tax, workers' compensation insurance and leave.</a:t>
             </a:r>
@@ -10360,12 +11273,17 @@
           </a:bodyPr>
           <a:lstStyle/>
           <a:p>
+            <a:pPr>
+              <a:defRPr>
+                <a:latin typeface="Roboto"/>
+              </a:defRPr>
+            </a:pPr>
             <a:r>
               <a:rPr sz="900" b="0">
                 <a:solidFill>
                   <a:srgbClr val="5F6F63"/>
                 </a:solidFill>
-                <a:latin typeface="Arial"/>
+                <a:latin typeface="Roboto"/>
               </a:rPr>
               <a:t>growth.pptx</a:t>
             </a:r>
@@ -10394,13 +11312,17 @@
           </a:bodyPr>
           <a:lstStyle/>
           <a:p>
-            <a:pPr algn="ctr"/>
+            <a:pPr algn="ctr">
+              <a:defRPr>
+                <a:latin typeface="Roboto"/>
+              </a:defRPr>
+            </a:pPr>
             <a:r>
               <a:rPr sz="900" b="0">
                 <a:solidFill>
                   <a:srgbClr val="5F6F63"/>
                 </a:solidFill>
-                <a:latin typeface="Arial"/>
+                <a:latin typeface="Roboto"/>
               </a:rPr>
               <a:t>Data retrieved 2pm, Tue 6 Oct 2026 · Sample data</a:t>
             </a:r>
@@ -10429,13 +11351,17 @@
           </a:bodyPr>
           <a:lstStyle/>
           <a:p>
-            <a:pPr algn="r"/>
+            <a:pPr algn="r">
+              <a:defRPr>
+                <a:latin typeface="Roboto"/>
+              </a:defRPr>
+            </a:pPr>
             <a:r>
               <a:rPr sz="900" b="0">
                 <a:solidFill>
                   <a:srgbClr val="5F6F63"/>
                 </a:solidFill>
-                <a:latin typeface="Arial"/>
+                <a:latin typeface="Roboto"/>
               </a:rPr>
               <a:t>Slide 2 of 27</a:t>
             </a:r>
@@ -10499,7 +11425,11 @@
           <a:bodyPr rtlCol="0" anchor="ctr"/>
           <a:lstStyle/>
           <a:p>
-            <a:pPr algn="ctr"/>
+            <a:pPr algn="ctr">
+              <a:defRPr>
+                <a:latin typeface="Roboto"/>
+              </a:defRPr>
+            </a:pPr>
           </a:p>
         </p:txBody>
       </p:sp>
@@ -10525,12 +11455,17 @@
           </a:bodyPr>
           <a:lstStyle/>
           <a:p>
+            <a:pPr>
+              <a:defRPr>
+                <a:latin typeface="Roboto"/>
+              </a:defRPr>
+            </a:pPr>
             <a:r>
               <a:rPr sz="1000" b="0">
                 <a:solidFill>
                   <a:srgbClr val="5F6F63"/>
                 </a:solidFill>
-                <a:latin typeface="Arial"/>
+                <a:latin typeface="Roboto"/>
               </a:rPr>
               <a:t>SME sample businesses · Which products and services are growing?</a:t>
             </a:r>
@@ -10559,12 +11494,17 @@
           </a:bodyPr>
           <a:lstStyle/>
           <a:p>
+            <a:pPr>
+              <a:defRPr>
+                <a:latin typeface="Roboto"/>
+              </a:defRPr>
+            </a:pPr>
             <a:r>
               <a:rPr sz="2400" b="1">
                 <a:solidFill>
                   <a:srgbClr val="25342A"/>
                 </a:solidFill>
-                <a:latin typeface="Arial"/>
+                <a:latin typeface="Roboto"/>
               </a:rPr>
               <a:t>What it shows · Services · Type of work: Projects</a:t>
             </a:r>
@@ -10612,7 +11552,11 @@
           <a:bodyPr rtlCol="0" anchor="ctr"/>
           <a:lstStyle/>
           <a:p>
-            <a:pPr algn="ctr"/>
+            <a:pPr algn="ctr">
+              <a:defRPr>
+                <a:latin typeface="Roboto"/>
+              </a:defRPr>
+            </a:pPr>
           </a:p>
         </p:txBody>
       </p:sp>
@@ -10638,12 +11582,17 @@
           </a:bodyPr>
           <a:lstStyle/>
           <a:p>
+            <a:pPr>
+              <a:defRPr>
+                <a:latin typeface="Roboto"/>
+              </a:defRPr>
+            </a:pPr>
             <a:r>
               <a:rPr sz="1100" b="1">
                 <a:solidFill>
                   <a:srgbClr val="5F6F63"/>
                 </a:solidFill>
-                <a:latin typeface="Arial"/>
+                <a:latin typeface="Roboto"/>
               </a:rPr>
               <a:t>WHAT IT SHOWS</a:t>
             </a:r>
@@ -10672,12 +11621,17 @@
           </a:bodyPr>
           <a:lstStyle/>
           <a:p>
+            <a:pPr>
+              <a:defRPr>
+                <a:latin typeface="Roboto"/>
+              </a:defRPr>
+            </a:pPr>
             <a:r>
               <a:rPr sz="1600" b="0">
                 <a:solidFill>
                   <a:srgbClr val="25342A"/>
                 </a:solidFill>
-                <a:latin typeface="Arial"/>
+                <a:latin typeface="Roboto"/>
               </a:rPr>
               <a:t>Projects brought in $324,020 this financial year to date, at a 61.3% gross margin (below the 64.1% overall).</a:t>
             </a:r>
@@ -10725,7 +11679,11 @@
           <a:bodyPr rtlCol="0" anchor="ctr"/>
           <a:lstStyle/>
           <a:p>
-            <a:pPr algn="ctr"/>
+            <a:pPr algn="ctr">
+              <a:defRPr>
+                <a:latin typeface="Roboto"/>
+              </a:defRPr>
+            </a:pPr>
           </a:p>
         </p:txBody>
       </p:sp>
@@ -10751,12 +11709,17 @@
           </a:bodyPr>
           <a:lstStyle/>
           <a:p>
+            <a:pPr>
+              <a:defRPr>
+                <a:latin typeface="Roboto"/>
+              </a:defRPr>
+            </a:pPr>
             <a:r>
               <a:rPr sz="1100" b="1">
                 <a:solidFill>
                   <a:srgbClr val="5F6F63"/>
                 </a:solidFill>
-                <a:latin typeface="Arial"/>
+                <a:latin typeface="Roboto"/>
               </a:rPr>
               <a:t>WHAT YOU'D DO ABOUT IT</a:t>
             </a:r>
@@ -10785,12 +11748,17 @@
           </a:bodyPr>
           <a:lstStyle/>
           <a:p>
+            <a:pPr>
+              <a:defRPr>
+                <a:latin typeface="Roboto"/>
+              </a:defRPr>
+            </a:pPr>
             <a:r>
               <a:rPr sz="1600" b="0">
                 <a:solidFill>
                   <a:srgbClr val="25342A"/>
                 </a:solidFill>
-                <a:latin typeface="Arial"/>
+                <a:latin typeface="Roboto"/>
               </a:rPr>
               <a:t>Projects: 61.3% gross margin, below the 64.6% needed to cover overheads.</a:t>
             </a:r>
@@ -10819,12 +11787,17 @@
           </a:bodyPr>
           <a:lstStyle/>
           <a:p>
+            <a:pPr>
+              <a:defRPr>
+                <a:latin typeface="Roboto"/>
+              </a:defRPr>
+            </a:pPr>
             <a:r>
               <a:rPr sz="900" b="0">
                 <a:solidFill>
                   <a:srgbClr val="5F6F63"/>
                 </a:solidFill>
-                <a:latin typeface="Arial"/>
+                <a:latin typeface="Roboto"/>
               </a:rPr>
               <a:t>growth.pptx</a:t>
             </a:r>
@@ -10853,13 +11826,17 @@
           </a:bodyPr>
           <a:lstStyle/>
           <a:p>
-            <a:pPr algn="ctr"/>
+            <a:pPr algn="ctr">
+              <a:defRPr>
+                <a:latin typeface="Roboto"/>
+              </a:defRPr>
+            </a:pPr>
             <a:r>
               <a:rPr sz="900" b="0">
                 <a:solidFill>
                   <a:srgbClr val="5F6F63"/>
                 </a:solidFill>
-                <a:latin typeface="Arial"/>
+                <a:latin typeface="Roboto"/>
               </a:rPr>
               <a:t>Data retrieved 2pm, Tue 6 Oct 2026 · Sample data</a:t>
             </a:r>
@@ -10888,13 +11865,17 @@
           </a:bodyPr>
           <a:lstStyle/>
           <a:p>
-            <a:pPr algn="r"/>
+            <a:pPr algn="r">
+              <a:defRPr>
+                <a:latin typeface="Roboto"/>
+              </a:defRPr>
+            </a:pPr>
             <a:r>
               <a:rPr sz="900" b="0">
                 <a:solidFill>
                   <a:srgbClr val="5F6F63"/>
                 </a:solidFill>
-                <a:latin typeface="Arial"/>
+                <a:latin typeface="Roboto"/>
               </a:rPr>
               <a:t>Slide 20 of 27</a:t>
             </a:r>
@@ -10958,7 +11939,11 @@
           <a:bodyPr rtlCol="0" anchor="ctr"/>
           <a:lstStyle/>
           <a:p>
-            <a:pPr algn="ctr"/>
+            <a:pPr algn="ctr">
+              <a:defRPr>
+                <a:latin typeface="Roboto"/>
+              </a:defRPr>
+            </a:pPr>
           </a:p>
         </p:txBody>
       </p:sp>
@@ -10984,12 +11969,17 @@
           </a:bodyPr>
           <a:lstStyle/>
           <a:p>
+            <a:pPr>
+              <a:defRPr>
+                <a:latin typeface="Roboto"/>
+              </a:defRPr>
+            </a:pPr>
             <a:r>
               <a:rPr sz="1000" b="0">
                 <a:solidFill>
                   <a:srgbClr val="5F6F63"/>
                 </a:solidFill>
-                <a:latin typeface="Arial"/>
+                <a:latin typeface="Roboto"/>
               </a:rPr>
               <a:t>SME sample businesses · Which products and services are growing?</a:t>
             </a:r>
@@ -11018,12 +12008,17 @@
           </a:bodyPr>
           <a:lstStyle/>
           <a:p>
+            <a:pPr>
+              <a:defRPr>
+                <a:latin typeface="Roboto"/>
+              </a:defRPr>
+            </a:pPr>
             <a:r>
               <a:rPr sz="2400" b="1">
                 <a:solidFill>
                   <a:srgbClr val="25342A"/>
                 </a:solidFill>
-                <a:latin typeface="Arial"/>
+                <a:latin typeface="Roboto"/>
               </a:rPr>
               <a:t>Headline numbers · Services · Type of work: Retainers</a:t>
             </a:r>
@@ -11071,7 +12066,11 @@
           <a:bodyPr rtlCol="0" anchor="ctr"/>
           <a:lstStyle/>
           <a:p>
-            <a:pPr algn="ctr"/>
+            <a:pPr algn="ctr">
+              <a:defRPr>
+                <a:latin typeface="Roboto"/>
+              </a:defRPr>
+            </a:pPr>
           </a:p>
         </p:txBody>
       </p:sp>
@@ -11097,12 +12096,17 @@
           </a:bodyPr>
           <a:lstStyle/>
           <a:p>
+            <a:pPr>
+              <a:defRPr>
+                <a:latin typeface="Roboto"/>
+              </a:defRPr>
+            </a:pPr>
             <a:r>
               <a:rPr sz="1200" b="0">
                 <a:solidFill>
                   <a:srgbClr val="5F6F63"/>
                 </a:solidFill>
-                <a:latin typeface="Arial"/>
+                <a:latin typeface="Roboto"/>
               </a:rPr>
               <a:t>January against January last year</a:t>
             </a:r>
@@ -11131,12 +12135,17 @@
           </a:bodyPr>
           <a:lstStyle/>
           <a:p>
+            <a:pPr>
+              <a:defRPr>
+                <a:latin typeface="Roboto"/>
+              </a:defRPr>
+            </a:pPr>
             <a:r>
               <a:rPr sz="3000" b="1">
                 <a:solidFill>
                   <a:srgbClr val="2F7A5D"/>
                 </a:solidFill>
-                <a:latin typeface="Arial"/>
+                <a:latin typeface="Roboto"/>
               </a:rPr>
               <a:t>88.7%</a:t>
             </a:r>
@@ -11165,12 +12174,17 @@
           </a:bodyPr>
           <a:lstStyle/>
           <a:p>
+            <a:pPr>
+              <a:defRPr>
+                <a:latin typeface="Roboto"/>
+              </a:defRPr>
+            </a:pPr>
             <a:r>
               <a:rPr sz="1100" b="0">
                 <a:solidFill>
                   <a:srgbClr val="5F6F63"/>
                 </a:solidFill>
-                <a:latin typeface="Arial"/>
+                <a:latin typeface="Roboto"/>
               </a:rPr>
               <a:t>$28,300 against $15,000</a:t>
             </a:r>
@@ -11218,7 +12232,11 @@
           <a:bodyPr rtlCol="0" anchor="ctr"/>
           <a:lstStyle/>
           <a:p>
-            <a:pPr algn="ctr"/>
+            <a:pPr algn="ctr">
+              <a:defRPr>
+                <a:latin typeface="Roboto"/>
+              </a:defRPr>
+            </a:pPr>
           </a:p>
         </p:txBody>
       </p:sp>
@@ -11244,12 +12262,17 @@
           </a:bodyPr>
           <a:lstStyle/>
           <a:p>
+            <a:pPr>
+              <a:defRPr>
+                <a:latin typeface="Roboto"/>
+              </a:defRPr>
+            </a:pPr>
             <a:r>
               <a:rPr sz="1200" b="0">
                 <a:solidFill>
                   <a:srgbClr val="5F6F63"/>
                 </a:solidFill>
-                <a:latin typeface="Arial"/>
+                <a:latin typeface="Roboto"/>
               </a:rPr>
               <a:t>Year to date (Jul to Jan 2026)</a:t>
             </a:r>
@@ -11278,12 +12301,17 @@
           </a:bodyPr>
           <a:lstStyle/>
           <a:p>
+            <a:pPr>
+              <a:defRPr>
+                <a:latin typeface="Roboto"/>
+              </a:defRPr>
+            </a:pPr>
             <a:r>
               <a:rPr sz="3000" b="1">
                 <a:solidFill>
                   <a:srgbClr val="2F7A5D"/>
                 </a:solidFill>
-                <a:latin typeface="Arial"/>
+                <a:latin typeface="Roboto"/>
               </a:rPr>
               <a:t>$150,100</a:t>
             </a:r>
@@ -11312,12 +12340,17 @@
           </a:bodyPr>
           <a:lstStyle/>
           <a:p>
+            <a:pPr>
+              <a:defRPr>
+                <a:latin typeface="Roboto"/>
+              </a:defRPr>
+            </a:pPr>
             <a:r>
               <a:rPr sz="1100" b="0">
                 <a:solidFill>
                   <a:srgbClr val="5F6F63"/>
                 </a:solidFill>
-                <a:latin typeface="Arial"/>
+                <a:latin typeface="Roboto"/>
               </a:rPr>
               <a:t>same period last year: not in the data</a:t>
             </a:r>
@@ -11365,7 +12398,11 @@
           <a:bodyPr rtlCol="0" anchor="ctr"/>
           <a:lstStyle/>
           <a:p>
-            <a:pPr algn="ctr"/>
+            <a:pPr algn="ctr">
+              <a:defRPr>
+                <a:latin typeface="Roboto"/>
+              </a:defRPr>
+            </a:pPr>
           </a:p>
         </p:txBody>
       </p:sp>
@@ -11391,12 +12428,17 @@
           </a:bodyPr>
           <a:lstStyle/>
           <a:p>
+            <a:pPr>
+              <a:defRPr>
+                <a:latin typeface="Roboto"/>
+              </a:defRPr>
+            </a:pPr>
             <a:r>
               <a:rPr sz="1200" b="0">
                 <a:solidFill>
                   <a:srgbClr val="5F6F63"/>
                 </a:solidFill>
-                <a:latin typeface="Arial"/>
+                <a:latin typeface="Roboto"/>
               </a:rPr>
               <a:t>Gross margin, year to date</a:t>
             </a:r>
@@ -11425,12 +12467,17 @@
           </a:bodyPr>
           <a:lstStyle/>
           <a:p>
+            <a:pPr>
+              <a:defRPr>
+                <a:latin typeface="Roboto"/>
+              </a:defRPr>
+            </a:pPr>
             <a:r>
               <a:rPr sz="3000" b="1">
                 <a:solidFill>
                   <a:srgbClr val="2F7A5D"/>
                 </a:solidFill>
-                <a:latin typeface="Arial"/>
+                <a:latin typeface="Roboto"/>
               </a:rPr>
               <a:t>66.2%</a:t>
             </a:r>
@@ -11459,12 +12506,17 @@
           </a:bodyPr>
           <a:lstStyle/>
           <a:p>
+            <a:pPr>
+              <a:defRPr>
+                <a:latin typeface="Roboto"/>
+              </a:defRPr>
+            </a:pPr>
             <a:r>
               <a:rPr sz="1100" b="0">
                 <a:solidFill>
                   <a:srgbClr val="5F6F63"/>
                 </a:solidFill>
-                <a:latin typeface="Arial"/>
+                <a:latin typeface="Roboto"/>
               </a:rPr>
               <a:t>$99,400 before overheads</a:t>
             </a:r>
@@ -11493,12 +12545,17 @@
           </a:bodyPr>
           <a:lstStyle/>
           <a:p>
+            <a:pPr>
+              <a:defRPr>
+                <a:latin typeface="Roboto"/>
+              </a:defRPr>
+            </a:pPr>
             <a:r>
               <a:rPr sz="900" b="0">
                 <a:solidFill>
                   <a:srgbClr val="5F6F63"/>
                 </a:solidFill>
-                <a:latin typeface="Arial"/>
+                <a:latin typeface="Roboto"/>
               </a:rPr>
               <a:t>growth.pptx</a:t>
             </a:r>
@@ -11527,13 +12584,17 @@
           </a:bodyPr>
           <a:lstStyle/>
           <a:p>
-            <a:pPr algn="ctr"/>
+            <a:pPr algn="ctr">
+              <a:defRPr>
+                <a:latin typeface="Roboto"/>
+              </a:defRPr>
+            </a:pPr>
             <a:r>
               <a:rPr sz="900" b="0">
                 <a:solidFill>
                   <a:srgbClr val="5F6F63"/>
                 </a:solidFill>
-                <a:latin typeface="Arial"/>
+                <a:latin typeface="Roboto"/>
               </a:rPr>
               <a:t>Data retrieved 2pm, Tue 6 Oct 2026 · Sample data</a:t>
             </a:r>
@@ -11562,13 +12623,17 @@
           </a:bodyPr>
           <a:lstStyle/>
           <a:p>
-            <a:pPr algn="r"/>
+            <a:pPr algn="r">
+              <a:defRPr>
+                <a:latin typeface="Roboto"/>
+              </a:defRPr>
+            </a:pPr>
             <a:r>
               <a:rPr sz="900" b="0">
                 <a:solidFill>
                   <a:srgbClr val="5F6F63"/>
                 </a:solidFill>
-                <a:latin typeface="Arial"/>
+                <a:latin typeface="Roboto"/>
               </a:rPr>
               <a:t>Slide 21 of 27</a:t>
             </a:r>
@@ -11632,7 +12697,11 @@
           <a:bodyPr rtlCol="0" anchor="ctr"/>
           <a:lstStyle/>
           <a:p>
-            <a:pPr algn="ctr"/>
+            <a:pPr algn="ctr">
+              <a:defRPr>
+                <a:latin typeface="Roboto"/>
+              </a:defRPr>
+            </a:pPr>
           </a:p>
         </p:txBody>
       </p:sp>
@@ -11658,12 +12727,17 @@
           </a:bodyPr>
           <a:lstStyle/>
           <a:p>
+            <a:pPr>
+              <a:defRPr>
+                <a:latin typeface="Roboto"/>
+              </a:defRPr>
+            </a:pPr>
             <a:r>
               <a:rPr sz="1000" b="0">
                 <a:solidFill>
                   <a:srgbClr val="5F6F63"/>
                 </a:solidFill>
-                <a:latin typeface="Arial"/>
+                <a:latin typeface="Roboto"/>
               </a:rPr>
               <a:t>SME sample businesses · Which products and services are growing?</a:t>
             </a:r>
@@ -11692,12 +12766,17 @@
           </a:bodyPr>
           <a:lstStyle/>
           <a:p>
+            <a:pPr>
+              <a:defRPr>
+                <a:latin typeface="Roboto"/>
+              </a:defRPr>
+            </a:pPr>
             <a:r>
               <a:rPr sz="2400" b="1">
                 <a:solidFill>
                   <a:srgbClr val="25342A"/>
                 </a:solidFill>
-                <a:latin typeface="Arial"/>
+                <a:latin typeface="Roboto"/>
               </a:rPr>
               <a:t>What it shows · Services · Type of work: Retainers</a:t>
             </a:r>
@@ -11745,7 +12824,11 @@
           <a:bodyPr rtlCol="0" anchor="ctr"/>
           <a:lstStyle/>
           <a:p>
-            <a:pPr algn="ctr"/>
+            <a:pPr algn="ctr">
+              <a:defRPr>
+                <a:latin typeface="Roboto"/>
+              </a:defRPr>
+            </a:pPr>
           </a:p>
         </p:txBody>
       </p:sp>
@@ -11771,12 +12854,17 @@
           </a:bodyPr>
           <a:lstStyle/>
           <a:p>
+            <a:pPr>
+              <a:defRPr>
+                <a:latin typeface="Roboto"/>
+              </a:defRPr>
+            </a:pPr>
             <a:r>
               <a:rPr sz="1100" b="1">
                 <a:solidFill>
                   <a:srgbClr val="5F6F63"/>
                 </a:solidFill>
-                <a:latin typeface="Arial"/>
+                <a:latin typeface="Roboto"/>
               </a:rPr>
               <a:t>WHAT IT SHOWS</a:t>
             </a:r>
@@ -11805,12 +12893,17 @@
           </a:bodyPr>
           <a:lstStyle/>
           <a:p>
+            <a:pPr>
+              <a:defRPr>
+                <a:latin typeface="Roboto"/>
+              </a:defRPr>
+            </a:pPr>
             <a:r>
               <a:rPr sz="1600" b="0">
                 <a:solidFill>
                   <a:srgbClr val="25342A"/>
                 </a:solidFill>
-                <a:latin typeface="Arial"/>
+                <a:latin typeface="Roboto"/>
               </a:rPr>
               <a:t>Retainers brought in $150,100 this financial year to date, at a 66.2% gross margin (above the 64.1% overall).</a:t>
             </a:r>
@@ -11858,7 +12951,11 @@
           <a:bodyPr rtlCol="0" anchor="ctr"/>
           <a:lstStyle/>
           <a:p>
-            <a:pPr algn="ctr"/>
+            <a:pPr algn="ctr">
+              <a:defRPr>
+                <a:latin typeface="Roboto"/>
+              </a:defRPr>
+            </a:pPr>
           </a:p>
         </p:txBody>
       </p:sp>
@@ -11884,12 +12981,17 @@
           </a:bodyPr>
           <a:lstStyle/>
           <a:p>
+            <a:pPr>
+              <a:defRPr>
+                <a:latin typeface="Roboto"/>
+              </a:defRPr>
+            </a:pPr>
             <a:r>
               <a:rPr sz="1100" b="1">
                 <a:solidFill>
                   <a:srgbClr val="5F6F63"/>
                 </a:solidFill>
-                <a:latin typeface="Arial"/>
+                <a:latin typeface="Roboto"/>
               </a:rPr>
               <a:t>WHAT YOU'D DO ABOUT IT</a:t>
             </a:r>
@@ -11918,12 +13020,17 @@
           </a:bodyPr>
           <a:lstStyle/>
           <a:p>
+            <a:pPr>
+              <a:defRPr>
+                <a:latin typeface="Roboto"/>
+              </a:defRPr>
+            </a:pPr>
             <a:r>
               <a:rPr sz="1600" b="0">
                 <a:solidFill>
                   <a:srgbClr val="25342A"/>
                 </a:solidFill>
-                <a:latin typeface="Arial"/>
+                <a:latin typeface="Roboto"/>
               </a:rPr>
               <a:t>Retainers: 66.2% gross margin, 1.6 points clear of the 64.6% overheads need.</a:t>
             </a:r>
@@ -11952,12 +13059,17 @@
           </a:bodyPr>
           <a:lstStyle/>
           <a:p>
+            <a:pPr>
+              <a:defRPr>
+                <a:latin typeface="Roboto"/>
+              </a:defRPr>
+            </a:pPr>
             <a:r>
               <a:rPr sz="900" b="0">
                 <a:solidFill>
                   <a:srgbClr val="5F6F63"/>
                 </a:solidFill>
-                <a:latin typeface="Arial"/>
+                <a:latin typeface="Roboto"/>
               </a:rPr>
               <a:t>growth.pptx</a:t>
             </a:r>
@@ -11986,13 +13098,17 @@
           </a:bodyPr>
           <a:lstStyle/>
           <a:p>
-            <a:pPr algn="ctr"/>
+            <a:pPr algn="ctr">
+              <a:defRPr>
+                <a:latin typeface="Roboto"/>
+              </a:defRPr>
+            </a:pPr>
             <a:r>
               <a:rPr sz="900" b="0">
                 <a:solidFill>
                   <a:srgbClr val="5F6F63"/>
                 </a:solidFill>
-                <a:latin typeface="Arial"/>
+                <a:latin typeface="Roboto"/>
               </a:rPr>
               <a:t>Data retrieved 2pm, Tue 6 Oct 2026 · Sample data</a:t>
             </a:r>
@@ -12021,13 +13137,17 @@
           </a:bodyPr>
           <a:lstStyle/>
           <a:p>
-            <a:pPr algn="r"/>
+            <a:pPr algn="r">
+              <a:defRPr>
+                <a:latin typeface="Roboto"/>
+              </a:defRPr>
+            </a:pPr>
             <a:r>
               <a:rPr sz="900" b="0">
                 <a:solidFill>
                   <a:srgbClr val="5F6F63"/>
                 </a:solidFill>
-                <a:latin typeface="Arial"/>
+                <a:latin typeface="Roboto"/>
               </a:rPr>
               <a:t>Slide 22 of 27</a:t>
             </a:r>
@@ -12091,7 +13211,11 @@
           <a:bodyPr rtlCol="0" anchor="ctr"/>
           <a:lstStyle/>
           <a:p>
-            <a:pPr algn="ctr"/>
+            <a:pPr algn="ctr">
+              <a:defRPr>
+                <a:latin typeface="Roboto"/>
+              </a:defRPr>
+            </a:pPr>
           </a:p>
         </p:txBody>
       </p:sp>
@@ -12117,12 +13241,17 @@
           </a:bodyPr>
           <a:lstStyle/>
           <a:p>
+            <a:pPr>
+              <a:defRPr>
+                <a:latin typeface="Roboto"/>
+              </a:defRPr>
+            </a:pPr>
             <a:r>
               <a:rPr sz="1000" b="0">
                 <a:solidFill>
                   <a:srgbClr val="5F6F63"/>
                 </a:solidFill>
-                <a:latin typeface="Arial"/>
+                <a:latin typeface="Roboto"/>
               </a:rPr>
               <a:t>SME sample businesses · Which products and services are growing?</a:t>
             </a:r>
@@ -12151,12 +13280,17 @@
           </a:bodyPr>
           <a:lstStyle/>
           <a:p>
+            <a:pPr>
+              <a:defRPr>
+                <a:latin typeface="Roboto"/>
+              </a:defRPr>
+            </a:pPr>
             <a:r>
               <a:rPr sz="2400" b="1">
                 <a:solidFill>
                   <a:srgbClr val="25342A"/>
                 </a:solidFill>
-                <a:latin typeface="Arial"/>
+                <a:latin typeface="Roboto"/>
               </a:rPr>
               <a:t>Headline numbers · Services · Type of work: Training</a:t>
             </a:r>
@@ -12204,7 +13338,11 @@
           <a:bodyPr rtlCol="0" anchor="ctr"/>
           <a:lstStyle/>
           <a:p>
-            <a:pPr algn="ctr"/>
+            <a:pPr algn="ctr">
+              <a:defRPr>
+                <a:latin typeface="Roboto"/>
+              </a:defRPr>
+            </a:pPr>
           </a:p>
         </p:txBody>
       </p:sp>
@@ -12230,12 +13368,17 @@
           </a:bodyPr>
           <a:lstStyle/>
           <a:p>
+            <a:pPr>
+              <a:defRPr>
+                <a:latin typeface="Roboto"/>
+              </a:defRPr>
+            </a:pPr>
             <a:r>
               <a:rPr sz="1200" b="0">
                 <a:solidFill>
                   <a:srgbClr val="5F6F63"/>
                 </a:solidFill>
-                <a:latin typeface="Arial"/>
+                <a:latin typeface="Roboto"/>
               </a:rPr>
               <a:t>January against January last year</a:t>
             </a:r>
@@ -12264,12 +13407,17 @@
           </a:bodyPr>
           <a:lstStyle/>
           <a:p>
+            <a:pPr>
+              <a:defRPr>
+                <a:latin typeface="Roboto"/>
+              </a:defRPr>
+            </a:pPr>
             <a:r>
               <a:rPr sz="3000" b="1">
                 <a:solidFill>
                   <a:srgbClr val="B42318"/>
                 </a:solidFill>
-                <a:latin typeface="Arial"/>
+                <a:latin typeface="Roboto"/>
               </a:rPr>
               <a:t>(39.1%)</a:t>
             </a:r>
@@ -12298,12 +13446,17 @@
           </a:bodyPr>
           <a:lstStyle/>
           <a:p>
+            <a:pPr>
+              <a:defRPr>
+                <a:latin typeface="Roboto"/>
+              </a:defRPr>
+            </a:pPr>
             <a:r>
               <a:rPr sz="1100" b="0">
                 <a:solidFill>
                   <a:srgbClr val="5F6F63"/>
                 </a:solidFill>
-                <a:latin typeface="Arial"/>
+                <a:latin typeface="Roboto"/>
               </a:rPr>
               <a:t>$3,900 against $6,400</a:t>
             </a:r>
@@ -12351,7 +13504,11 @@
           <a:bodyPr rtlCol="0" anchor="ctr"/>
           <a:lstStyle/>
           <a:p>
-            <a:pPr algn="ctr"/>
+            <a:pPr algn="ctr">
+              <a:defRPr>
+                <a:latin typeface="Roboto"/>
+              </a:defRPr>
+            </a:pPr>
           </a:p>
         </p:txBody>
       </p:sp>
@@ -12377,12 +13534,17 @@
           </a:bodyPr>
           <a:lstStyle/>
           <a:p>
+            <a:pPr>
+              <a:defRPr>
+                <a:latin typeface="Roboto"/>
+              </a:defRPr>
+            </a:pPr>
             <a:r>
               <a:rPr sz="1200" b="0">
                 <a:solidFill>
                   <a:srgbClr val="5F6F63"/>
                 </a:solidFill>
-                <a:latin typeface="Arial"/>
+                <a:latin typeface="Roboto"/>
               </a:rPr>
               <a:t>Year to date (Jul to Jan 2026)</a:t>
             </a:r>
@@ -12411,12 +13573,17 @@
           </a:bodyPr>
           <a:lstStyle/>
           <a:p>
+            <a:pPr>
+              <a:defRPr>
+                <a:latin typeface="Roboto"/>
+              </a:defRPr>
+            </a:pPr>
             <a:r>
               <a:rPr sz="3000" b="1">
                 <a:solidFill>
                   <a:srgbClr val="2F7A5D"/>
                 </a:solidFill>
-                <a:latin typeface="Arial"/>
+                <a:latin typeface="Roboto"/>
               </a:rPr>
               <a:t>$50,200</a:t>
             </a:r>
@@ -12445,12 +13612,17 @@
           </a:bodyPr>
           <a:lstStyle/>
           <a:p>
+            <a:pPr>
+              <a:defRPr>
+                <a:latin typeface="Roboto"/>
+              </a:defRPr>
+            </a:pPr>
             <a:r>
               <a:rPr sz="1100" b="0">
                 <a:solidFill>
                   <a:srgbClr val="5F6F63"/>
                 </a:solidFill>
-                <a:latin typeface="Arial"/>
+                <a:latin typeface="Roboto"/>
               </a:rPr>
               <a:t>same period last year: not in the data</a:t>
             </a:r>
@@ -12498,7 +13670,11 @@
           <a:bodyPr rtlCol="0" anchor="ctr"/>
           <a:lstStyle/>
           <a:p>
-            <a:pPr algn="ctr"/>
+            <a:pPr algn="ctr">
+              <a:defRPr>
+                <a:latin typeface="Roboto"/>
+              </a:defRPr>
+            </a:pPr>
           </a:p>
         </p:txBody>
       </p:sp>
@@ -12524,12 +13700,17 @@
           </a:bodyPr>
           <a:lstStyle/>
           <a:p>
+            <a:pPr>
+              <a:defRPr>
+                <a:latin typeface="Roboto"/>
+              </a:defRPr>
+            </a:pPr>
             <a:r>
               <a:rPr sz="1200" b="0">
                 <a:solidFill>
                   <a:srgbClr val="5F6F63"/>
                 </a:solidFill>
-                <a:latin typeface="Arial"/>
+                <a:latin typeface="Roboto"/>
               </a:rPr>
               <a:t>Gross margin, year to date</a:t>
             </a:r>
@@ -12558,12 +13739,17 @@
           </a:bodyPr>
           <a:lstStyle/>
           <a:p>
+            <a:pPr>
+              <a:defRPr>
+                <a:latin typeface="Roboto"/>
+              </a:defRPr>
+            </a:pPr>
             <a:r>
               <a:rPr sz="3000" b="1">
                 <a:solidFill>
                   <a:srgbClr val="2F7A5D"/>
                 </a:solidFill>
-                <a:latin typeface="Arial"/>
+                <a:latin typeface="Roboto"/>
               </a:rPr>
               <a:t>75.7%</a:t>
             </a:r>
@@ -12592,12 +13778,17 @@
           </a:bodyPr>
           <a:lstStyle/>
           <a:p>
+            <a:pPr>
+              <a:defRPr>
+                <a:latin typeface="Roboto"/>
+              </a:defRPr>
+            </a:pPr>
             <a:r>
               <a:rPr sz="1100" b="0">
                 <a:solidFill>
                   <a:srgbClr val="5F6F63"/>
                 </a:solidFill>
-                <a:latin typeface="Arial"/>
+                <a:latin typeface="Roboto"/>
               </a:rPr>
               <a:t>$38,020 before overheads</a:t>
             </a:r>
@@ -12626,12 +13817,17 @@
           </a:bodyPr>
           <a:lstStyle/>
           <a:p>
+            <a:pPr>
+              <a:defRPr>
+                <a:latin typeface="Roboto"/>
+              </a:defRPr>
+            </a:pPr>
             <a:r>
               <a:rPr sz="900" b="0">
                 <a:solidFill>
                   <a:srgbClr val="5F6F63"/>
                 </a:solidFill>
-                <a:latin typeface="Arial"/>
+                <a:latin typeface="Roboto"/>
               </a:rPr>
               <a:t>growth.pptx</a:t>
             </a:r>
@@ -12660,13 +13856,17 @@
           </a:bodyPr>
           <a:lstStyle/>
           <a:p>
-            <a:pPr algn="ctr"/>
+            <a:pPr algn="ctr">
+              <a:defRPr>
+                <a:latin typeface="Roboto"/>
+              </a:defRPr>
+            </a:pPr>
             <a:r>
               <a:rPr sz="900" b="0">
                 <a:solidFill>
                   <a:srgbClr val="5F6F63"/>
                 </a:solidFill>
-                <a:latin typeface="Arial"/>
+                <a:latin typeface="Roboto"/>
               </a:rPr>
               <a:t>Data retrieved 2pm, Tue 6 Oct 2026 · Sample data</a:t>
             </a:r>
@@ -12695,13 +13895,17 @@
           </a:bodyPr>
           <a:lstStyle/>
           <a:p>
-            <a:pPr algn="r"/>
+            <a:pPr algn="r">
+              <a:defRPr>
+                <a:latin typeface="Roboto"/>
+              </a:defRPr>
+            </a:pPr>
             <a:r>
               <a:rPr sz="900" b="0">
                 <a:solidFill>
                   <a:srgbClr val="5F6F63"/>
                 </a:solidFill>
-                <a:latin typeface="Arial"/>
+                <a:latin typeface="Roboto"/>
               </a:rPr>
               <a:t>Slide 23 of 27</a:t>
             </a:r>
@@ -12765,7 +13969,11 @@
           <a:bodyPr rtlCol="0" anchor="ctr"/>
           <a:lstStyle/>
           <a:p>
-            <a:pPr algn="ctr"/>
+            <a:pPr algn="ctr">
+              <a:defRPr>
+                <a:latin typeface="Roboto"/>
+              </a:defRPr>
+            </a:pPr>
           </a:p>
         </p:txBody>
       </p:sp>
@@ -12791,12 +13999,17 @@
           </a:bodyPr>
           <a:lstStyle/>
           <a:p>
+            <a:pPr>
+              <a:defRPr>
+                <a:latin typeface="Roboto"/>
+              </a:defRPr>
+            </a:pPr>
             <a:r>
               <a:rPr sz="1000" b="0">
                 <a:solidFill>
                   <a:srgbClr val="5F6F63"/>
                 </a:solidFill>
-                <a:latin typeface="Arial"/>
+                <a:latin typeface="Roboto"/>
               </a:rPr>
               <a:t>SME sample businesses · Which products and services are growing?</a:t>
             </a:r>
@@ -12825,12 +14038,17 @@
           </a:bodyPr>
           <a:lstStyle/>
           <a:p>
+            <a:pPr>
+              <a:defRPr>
+                <a:latin typeface="Roboto"/>
+              </a:defRPr>
+            </a:pPr>
             <a:r>
               <a:rPr sz="2400" b="1">
                 <a:solidFill>
                   <a:srgbClr val="25342A"/>
                 </a:solidFill>
-                <a:latin typeface="Arial"/>
+                <a:latin typeface="Roboto"/>
               </a:rPr>
               <a:t>What it shows · Services · Type of work: Training</a:t>
             </a:r>
@@ -12878,7 +14096,11 @@
           <a:bodyPr rtlCol="0" anchor="ctr"/>
           <a:lstStyle/>
           <a:p>
-            <a:pPr algn="ctr"/>
+            <a:pPr algn="ctr">
+              <a:defRPr>
+                <a:latin typeface="Roboto"/>
+              </a:defRPr>
+            </a:pPr>
           </a:p>
         </p:txBody>
       </p:sp>
@@ -12904,12 +14126,17 @@
           </a:bodyPr>
           <a:lstStyle/>
           <a:p>
+            <a:pPr>
+              <a:defRPr>
+                <a:latin typeface="Roboto"/>
+              </a:defRPr>
+            </a:pPr>
             <a:r>
               <a:rPr sz="1100" b="1">
                 <a:solidFill>
                   <a:srgbClr val="5F6F63"/>
                 </a:solidFill>
-                <a:latin typeface="Arial"/>
+                <a:latin typeface="Roboto"/>
               </a:rPr>
               <a:t>WHAT IT SHOWS</a:t>
             </a:r>
@@ -12938,12 +14165,17 @@
           </a:bodyPr>
           <a:lstStyle/>
           <a:p>
+            <a:pPr>
+              <a:defRPr>
+                <a:latin typeface="Roboto"/>
+              </a:defRPr>
+            </a:pPr>
             <a:r>
               <a:rPr sz="1600" b="0">
                 <a:solidFill>
                   <a:srgbClr val="25342A"/>
                 </a:solidFill>
-                <a:latin typeface="Arial"/>
+                <a:latin typeface="Roboto"/>
               </a:rPr>
               <a:t>Training brought in $50,200 this financial year to date, at a 75.7% gross margin (above the 64.1% overall).</a:t>
             </a:r>
@@ -12991,7 +14223,11 @@
           <a:bodyPr rtlCol="0" anchor="ctr"/>
           <a:lstStyle/>
           <a:p>
-            <a:pPr algn="ctr"/>
+            <a:pPr algn="ctr">
+              <a:defRPr>
+                <a:latin typeface="Roboto"/>
+              </a:defRPr>
+            </a:pPr>
           </a:p>
         </p:txBody>
       </p:sp>
@@ -13017,12 +14253,17 @@
           </a:bodyPr>
           <a:lstStyle/>
           <a:p>
+            <a:pPr>
+              <a:defRPr>
+                <a:latin typeface="Roboto"/>
+              </a:defRPr>
+            </a:pPr>
             <a:r>
               <a:rPr sz="1100" b="1">
                 <a:solidFill>
                   <a:srgbClr val="5F6F63"/>
                 </a:solidFill>
-                <a:latin typeface="Arial"/>
+                <a:latin typeface="Roboto"/>
               </a:rPr>
               <a:t>WHAT YOU'D DO ABOUT IT</a:t>
             </a:r>
@@ -13051,12 +14292,17 @@
           </a:bodyPr>
           <a:lstStyle/>
           <a:p>
+            <a:pPr>
+              <a:defRPr>
+                <a:latin typeface="Roboto"/>
+              </a:defRPr>
+            </a:pPr>
             <a:r>
               <a:rPr sz="1600" b="0">
                 <a:solidFill>
                   <a:srgbClr val="25342A"/>
                 </a:solidFill>
-                <a:latin typeface="Arial"/>
+                <a:latin typeface="Roboto"/>
               </a:rPr>
               <a:t>Training: 75.7% gross margin, 11.1 points clear of the 64.6% overheads need.</a:t>
             </a:r>
@@ -13085,12 +14331,17 @@
           </a:bodyPr>
           <a:lstStyle/>
           <a:p>
+            <a:pPr>
+              <a:defRPr>
+                <a:latin typeface="Roboto"/>
+              </a:defRPr>
+            </a:pPr>
             <a:r>
               <a:rPr sz="900" b="0">
                 <a:solidFill>
                   <a:srgbClr val="5F6F63"/>
                 </a:solidFill>
-                <a:latin typeface="Arial"/>
+                <a:latin typeface="Roboto"/>
               </a:rPr>
               <a:t>growth.pptx</a:t>
             </a:r>
@@ -13119,13 +14370,17 @@
           </a:bodyPr>
           <a:lstStyle/>
           <a:p>
-            <a:pPr algn="ctr"/>
+            <a:pPr algn="ctr">
+              <a:defRPr>
+                <a:latin typeface="Roboto"/>
+              </a:defRPr>
+            </a:pPr>
             <a:r>
               <a:rPr sz="900" b="0">
                 <a:solidFill>
                   <a:srgbClr val="5F6F63"/>
                 </a:solidFill>
-                <a:latin typeface="Arial"/>
+                <a:latin typeface="Roboto"/>
               </a:rPr>
               <a:t>Data retrieved 2pm, Tue 6 Oct 2026 · Sample data</a:t>
             </a:r>
@@ -13154,13 +14409,17 @@
           </a:bodyPr>
           <a:lstStyle/>
           <a:p>
-            <a:pPr algn="r"/>
+            <a:pPr algn="r">
+              <a:defRPr>
+                <a:latin typeface="Roboto"/>
+              </a:defRPr>
+            </a:pPr>
             <a:r>
               <a:rPr sz="900" b="0">
                 <a:solidFill>
                   <a:srgbClr val="5F6F63"/>
                 </a:solidFill>
-                <a:latin typeface="Arial"/>
+                <a:latin typeface="Roboto"/>
               </a:rPr>
               <a:t>Slide 24 of 27</a:t>
             </a:r>
@@ -13224,7 +14483,11 @@
           <a:bodyPr rtlCol="0" anchor="ctr"/>
           <a:lstStyle/>
           <a:p>
-            <a:pPr algn="ctr"/>
+            <a:pPr algn="ctr">
+              <a:defRPr>
+                <a:latin typeface="Roboto"/>
+              </a:defRPr>
+            </a:pPr>
           </a:p>
         </p:txBody>
       </p:sp>
@@ -13250,12 +14513,17 @@
           </a:bodyPr>
           <a:lstStyle/>
           <a:p>
+            <a:pPr>
+              <a:defRPr>
+                <a:latin typeface="Roboto"/>
+              </a:defRPr>
+            </a:pPr>
             <a:r>
               <a:rPr sz="1000" b="0">
                 <a:solidFill>
                   <a:srgbClr val="5F6F63"/>
                 </a:solidFill>
-                <a:latin typeface="Arial"/>
+                <a:latin typeface="Roboto"/>
               </a:rPr>
               <a:t>SME sample businesses · Which products and services are growing?</a:t>
             </a:r>
@@ -13284,12 +14552,17 @@
           </a:bodyPr>
           <a:lstStyle/>
           <a:p>
+            <a:pPr>
+              <a:defRPr>
+                <a:latin typeface="Roboto"/>
+              </a:defRPr>
+            </a:pPr>
             <a:r>
               <a:rPr sz="2400" b="1">
                 <a:solidFill>
                   <a:srgbClr val="25342A"/>
                 </a:solidFill>
-                <a:latin typeface="Arial"/>
+                <a:latin typeface="Roboto"/>
               </a:rPr>
               <a:t>Revenue, gross margin and growth by type of work, by month · Revenue $ · Services · Every type of work at once</a:t>
             </a:r>
@@ -13318,12 +14591,17 @@
           </a:bodyPr>
           <a:lstStyle/>
           <a:p>
+            <a:pPr>
+              <a:defRPr>
+                <a:latin typeface="Roboto"/>
+              </a:defRPr>
+            </a:pPr>
             <a:r>
               <a:rPr sz="1200" b="0">
                 <a:solidFill>
                   <a:srgbClr val="5F6F63"/>
                 </a:solidFill>
-                <a:latin typeface="Arial"/>
+                <a:latin typeface="Roboto"/>
               </a:rPr>
               <a:t>Gross margin = revenue less direct cost (materials, subcontractors and time at cost for trades; contractors and consultant time for services), before overheads. Growth is year on year: each month against the same month a year earlier.</a:t>
             </a:r>
@@ -13370,12 +14648,17 @@
           </a:bodyPr>
           <a:lstStyle/>
           <a:p>
+            <a:pPr>
+              <a:defRPr>
+                <a:latin typeface="Roboto"/>
+              </a:defRPr>
+            </a:pPr>
             <a:r>
               <a:rPr sz="900" b="0">
                 <a:solidFill>
                   <a:srgbClr val="5F6F63"/>
                 </a:solidFill>
-                <a:latin typeface="Arial"/>
+                <a:latin typeface="Roboto"/>
               </a:rPr>
               <a:t>growth.pptx</a:t>
             </a:r>
@@ -13404,13 +14687,17 @@
           </a:bodyPr>
           <a:lstStyle/>
           <a:p>
-            <a:pPr algn="ctr"/>
+            <a:pPr algn="ctr">
+              <a:defRPr>
+                <a:latin typeface="Roboto"/>
+              </a:defRPr>
+            </a:pPr>
             <a:r>
               <a:rPr sz="900" b="0">
                 <a:solidFill>
                   <a:srgbClr val="5F6F63"/>
                 </a:solidFill>
-                <a:latin typeface="Arial"/>
+                <a:latin typeface="Roboto"/>
               </a:rPr>
               <a:t>Data retrieved 2pm, Tue 6 Oct 2026 · Sample data</a:t>
             </a:r>
@@ -13439,13 +14726,17 @@
           </a:bodyPr>
           <a:lstStyle/>
           <a:p>
-            <a:pPr algn="r"/>
+            <a:pPr algn="r">
+              <a:defRPr>
+                <a:latin typeface="Roboto"/>
+              </a:defRPr>
+            </a:pPr>
             <a:r>
               <a:rPr sz="900" b="0">
                 <a:solidFill>
                   <a:srgbClr val="5F6F63"/>
                 </a:solidFill>
-                <a:latin typeface="Arial"/>
+                <a:latin typeface="Roboto"/>
               </a:rPr>
               <a:t>Slide 25 of 27</a:t>
             </a:r>
@@ -13509,7 +14800,11 @@
           <a:bodyPr rtlCol="0" anchor="ctr"/>
           <a:lstStyle/>
           <a:p>
-            <a:pPr algn="ctr"/>
+            <a:pPr algn="ctr">
+              <a:defRPr>
+                <a:latin typeface="Roboto"/>
+              </a:defRPr>
+            </a:pPr>
           </a:p>
         </p:txBody>
       </p:sp>
@@ -13535,12 +14830,17 @@
           </a:bodyPr>
           <a:lstStyle/>
           <a:p>
+            <a:pPr>
+              <a:defRPr>
+                <a:latin typeface="Roboto"/>
+              </a:defRPr>
+            </a:pPr>
             <a:r>
               <a:rPr sz="1000" b="0">
                 <a:solidFill>
                   <a:srgbClr val="5F6F63"/>
                 </a:solidFill>
-                <a:latin typeface="Arial"/>
+                <a:latin typeface="Roboto"/>
               </a:rPr>
               <a:t>SME sample businesses · Which products and services are growing?</a:t>
             </a:r>
@@ -13569,12 +14869,17 @@
           </a:bodyPr>
           <a:lstStyle/>
           <a:p>
+            <a:pPr>
+              <a:defRPr>
+                <a:latin typeface="Roboto"/>
+              </a:defRPr>
+            </a:pPr>
             <a:r>
               <a:rPr sz="2400" b="1">
                 <a:solidFill>
                   <a:srgbClr val="25342A"/>
                 </a:solidFill>
-                <a:latin typeface="Arial"/>
+                <a:latin typeface="Roboto"/>
               </a:rPr>
               <a:t>Revenue, gross margin and growth by type of work, by month · Gross margin % · Services · Every type of work at once</a:t>
             </a:r>
@@ -13603,12 +14908,17 @@
           </a:bodyPr>
           <a:lstStyle/>
           <a:p>
+            <a:pPr>
+              <a:defRPr>
+                <a:latin typeface="Roboto"/>
+              </a:defRPr>
+            </a:pPr>
             <a:r>
               <a:rPr sz="1200" b="0">
                 <a:solidFill>
                   <a:srgbClr val="5F6F63"/>
                 </a:solidFill>
-                <a:latin typeface="Arial"/>
+                <a:latin typeface="Roboto"/>
               </a:rPr>
               <a:t>Gross margin = revenue less direct cost (materials, subcontractors and time at cost for trades; contractors and consultant time for services), before overheads. Growth is year on year: each month against the same month a year earlier.</a:t>
             </a:r>
@@ -13655,12 +14965,17 @@
           </a:bodyPr>
           <a:lstStyle/>
           <a:p>
+            <a:pPr>
+              <a:defRPr>
+                <a:latin typeface="Roboto"/>
+              </a:defRPr>
+            </a:pPr>
             <a:r>
               <a:rPr sz="900" b="0">
                 <a:solidFill>
                   <a:srgbClr val="5F6F63"/>
                 </a:solidFill>
-                <a:latin typeface="Arial"/>
+                <a:latin typeface="Roboto"/>
               </a:rPr>
               <a:t>growth.pptx</a:t>
             </a:r>
@@ -13689,13 +15004,17 @@
           </a:bodyPr>
           <a:lstStyle/>
           <a:p>
-            <a:pPr algn="ctr"/>
+            <a:pPr algn="ctr">
+              <a:defRPr>
+                <a:latin typeface="Roboto"/>
+              </a:defRPr>
+            </a:pPr>
             <a:r>
               <a:rPr sz="900" b="0">
                 <a:solidFill>
                   <a:srgbClr val="5F6F63"/>
                 </a:solidFill>
-                <a:latin typeface="Arial"/>
+                <a:latin typeface="Roboto"/>
               </a:rPr>
               <a:t>Data retrieved 2pm, Tue 6 Oct 2026 · Sample data</a:t>
             </a:r>
@@ -13724,13 +15043,17 @@
           </a:bodyPr>
           <a:lstStyle/>
           <a:p>
-            <a:pPr algn="r"/>
+            <a:pPr algn="r">
+              <a:defRPr>
+                <a:latin typeface="Roboto"/>
+              </a:defRPr>
+            </a:pPr>
             <a:r>
               <a:rPr sz="900" b="0">
                 <a:solidFill>
                   <a:srgbClr val="5F6F63"/>
                 </a:solidFill>
-                <a:latin typeface="Arial"/>
+                <a:latin typeface="Roboto"/>
               </a:rPr>
               <a:t>Slide 26 of 27</a:t>
             </a:r>
@@ -13794,7 +15117,11 @@
           <a:bodyPr rtlCol="0" anchor="ctr"/>
           <a:lstStyle/>
           <a:p>
-            <a:pPr algn="ctr"/>
+            <a:pPr algn="ctr">
+              <a:defRPr>
+                <a:latin typeface="Roboto"/>
+              </a:defRPr>
+            </a:pPr>
           </a:p>
         </p:txBody>
       </p:sp>
@@ -13820,12 +15147,17 @@
           </a:bodyPr>
           <a:lstStyle/>
           <a:p>
+            <a:pPr>
+              <a:defRPr>
+                <a:latin typeface="Roboto"/>
+              </a:defRPr>
+            </a:pPr>
             <a:r>
               <a:rPr sz="1000" b="0">
                 <a:solidFill>
                   <a:srgbClr val="5F6F63"/>
                 </a:solidFill>
-                <a:latin typeface="Arial"/>
+                <a:latin typeface="Roboto"/>
               </a:rPr>
               <a:t>SME sample businesses · Which products and services are growing?</a:t>
             </a:r>
@@ -13854,12 +15186,17 @@
           </a:bodyPr>
           <a:lstStyle/>
           <a:p>
+            <a:pPr>
+              <a:defRPr>
+                <a:latin typeface="Roboto"/>
+              </a:defRPr>
+            </a:pPr>
             <a:r>
               <a:rPr sz="2400" b="1">
                 <a:solidFill>
                   <a:srgbClr val="25342A"/>
                 </a:solidFill>
-                <a:latin typeface="Arial"/>
+                <a:latin typeface="Roboto"/>
               </a:rPr>
               <a:t>By type of work: financial year to date (Jul to Jan 2026) against the same period last year · Services · Every type of work at once</a:t>
             </a:r>
@@ -13897,7 +15234,13 @@
                   <a:txBody>
                     <a:bodyPr/>
                     <a:lstStyle/>
-                    <a:p/>
+                    <a:p>
+                      <a:pPr>
+                        <a:defRPr>
+                          <a:latin typeface="Roboto"/>
+                        </a:defRPr>
+                      </a:pPr>
+                    </a:p>
                   </a:txBody>
                   <a:tcPr>
                     <a:solidFill>
@@ -13910,12 +15253,17 @@
                     <a:bodyPr/>
                     <a:lstStyle/>
                     <a:p>
-                      <a:pPr algn="r"/>
+                      <a:pPr algn="r">
+                        <a:defRPr>
+                          <a:latin typeface="Roboto"/>
+                        </a:defRPr>
+                      </a:pPr>
                       <a:r>
                         <a:rPr sz="1100" b="1">
                           <a:solidFill>
                             <a:srgbClr val="FFFFFF"/>
                           </a:solidFill>
+                          <a:latin typeface="Roboto"/>
                         </a:rPr>
                         <a:t>Year to date</a:t>
                       </a:r>
@@ -13932,12 +15280,17 @@
                     <a:bodyPr/>
                     <a:lstStyle/>
                     <a:p>
-                      <a:pPr algn="r"/>
+                      <a:pPr algn="r">
+                        <a:defRPr>
+                          <a:latin typeface="Roboto"/>
+                        </a:defRPr>
+                      </a:pPr>
                       <a:r>
                         <a:rPr sz="1100" b="1">
                           <a:solidFill>
                             <a:srgbClr val="FFFFFF"/>
                           </a:solidFill>
+                          <a:latin typeface="Roboto"/>
                         </a:rPr>
                         <a:t>Same period last year</a:t>
                       </a:r>
@@ -13954,12 +15307,17 @@
                     <a:bodyPr/>
                     <a:lstStyle/>
                     <a:p>
-                      <a:pPr algn="r"/>
+                      <a:pPr algn="r">
+                        <a:defRPr>
+                          <a:latin typeface="Roboto"/>
+                        </a:defRPr>
+                      </a:pPr>
                       <a:r>
                         <a:rPr sz="1100" b="1">
                           <a:solidFill>
                             <a:srgbClr val="FFFFFF"/>
                           </a:solidFill>
+                          <a:latin typeface="Roboto"/>
                         </a:rPr>
                         <a:t>Growth</a:t>
                       </a:r>
@@ -13976,12 +15334,17 @@
                     <a:bodyPr/>
                     <a:lstStyle/>
                     <a:p>
-                      <a:pPr algn="r"/>
+                      <a:pPr algn="r">
+                        <a:defRPr>
+                          <a:latin typeface="Roboto"/>
+                        </a:defRPr>
+                      </a:pPr>
                       <a:r>
                         <a:rPr sz="1100" b="1">
                           <a:solidFill>
                             <a:srgbClr val="FFFFFF"/>
                           </a:solidFill>
+                          <a:latin typeface="Roboto"/>
                         </a:rPr>
                         <a:t>Gross margin $</a:t>
                       </a:r>
@@ -13998,12 +15361,17 @@
                     <a:bodyPr/>
                     <a:lstStyle/>
                     <a:p>
-                      <a:pPr algn="r"/>
+                      <a:pPr algn="r">
+                        <a:defRPr>
+                          <a:latin typeface="Roboto"/>
+                        </a:defRPr>
+                      </a:pPr>
                       <a:r>
                         <a:rPr sz="1100" b="1">
                           <a:solidFill>
                             <a:srgbClr val="FFFFFF"/>
                           </a:solidFill>
+                          <a:latin typeface="Roboto"/>
                         </a:rPr>
                         <a:t>Gross margin %</a:t>
                       </a:r>
@@ -14022,11 +15390,17 @@
                     <a:bodyPr/>
                     <a:lstStyle/>
                     <a:p>
+                      <a:pPr>
+                        <a:defRPr>
+                          <a:latin typeface="Roboto"/>
+                        </a:defRPr>
+                      </a:pPr>
                       <a:r>
                         <a:rPr sz="1050">
                           <a:solidFill>
                             <a:srgbClr val="25342A"/>
                           </a:solidFill>
+                          <a:latin typeface="Roboto"/>
                         </a:rPr>
                         <a:t>Projects</a:t>
                       </a:r>
@@ -14043,12 +15417,17 @@
                     <a:bodyPr/>
                     <a:lstStyle/>
                     <a:p>
-                      <a:pPr algn="r"/>
+                      <a:pPr algn="r">
+                        <a:defRPr>
+                          <a:latin typeface="Roboto"/>
+                        </a:defRPr>
+                      </a:pPr>
                       <a:r>
                         <a:rPr sz="1050">
                           <a:solidFill>
                             <a:srgbClr val="25342A"/>
                           </a:solidFill>
+                          <a:latin typeface="Roboto"/>
                         </a:rPr>
                         <a:t>$324,020</a:t>
                       </a:r>
@@ -14065,12 +15444,17 @@
                     <a:bodyPr/>
                     <a:lstStyle/>
                     <a:p>
-                      <a:pPr algn="r"/>
+                      <a:pPr algn="r">
+                        <a:defRPr>
+                          <a:latin typeface="Roboto"/>
+                        </a:defRPr>
+                      </a:pPr>
                       <a:r>
                         <a:rPr sz="1050">
                           <a:solidFill>
                             <a:srgbClr val="25342A"/>
                           </a:solidFill>
+                          <a:latin typeface="Roboto"/>
                         </a:rPr>
                         <a:t>–</a:t>
                       </a:r>
@@ -14087,12 +15471,17 @@
                     <a:bodyPr/>
                     <a:lstStyle/>
                     <a:p>
-                      <a:pPr algn="r"/>
+                      <a:pPr algn="r">
+                        <a:defRPr>
+                          <a:latin typeface="Roboto"/>
+                        </a:defRPr>
+                      </a:pPr>
                       <a:r>
                         <a:rPr sz="1050">
                           <a:solidFill>
                             <a:srgbClr val="25342A"/>
                           </a:solidFill>
+                          <a:latin typeface="Roboto"/>
                         </a:rPr>
                         <a:t>–</a:t>
                       </a:r>
@@ -14109,12 +15498,17 @@
                     <a:bodyPr/>
                     <a:lstStyle/>
                     <a:p>
-                      <a:pPr algn="r"/>
+                      <a:pPr algn="r">
+                        <a:defRPr>
+                          <a:latin typeface="Roboto"/>
+                        </a:defRPr>
+                      </a:pPr>
                       <a:r>
                         <a:rPr sz="1050">
                           <a:solidFill>
                             <a:srgbClr val="25342A"/>
                           </a:solidFill>
+                          <a:latin typeface="Roboto"/>
                         </a:rPr>
                         <a:t>$198,720</a:t>
                       </a:r>
@@ -14131,12 +15525,17 @@
                     <a:bodyPr/>
                     <a:lstStyle/>
                     <a:p>
-                      <a:pPr algn="r"/>
+                      <a:pPr algn="r">
+                        <a:defRPr>
+                          <a:latin typeface="Roboto"/>
+                        </a:defRPr>
+                      </a:pPr>
                       <a:r>
                         <a:rPr sz="1050">
                           <a:solidFill>
                             <a:srgbClr val="25342A"/>
                           </a:solidFill>
+                          <a:latin typeface="Roboto"/>
                         </a:rPr>
                         <a:t>61.3%</a:t>
                       </a:r>
@@ -14155,11 +15554,17 @@
                     <a:bodyPr/>
                     <a:lstStyle/>
                     <a:p>
+                      <a:pPr>
+                        <a:defRPr>
+                          <a:latin typeface="Roboto"/>
+                        </a:defRPr>
+                      </a:pPr>
                       <a:r>
                         <a:rPr sz="1050">
                           <a:solidFill>
                             <a:srgbClr val="25342A"/>
                           </a:solidFill>
+                          <a:latin typeface="Roboto"/>
                         </a:rPr>
                         <a:t>Retainers</a:t>
                       </a:r>
@@ -14176,12 +15581,17 @@
                     <a:bodyPr/>
                     <a:lstStyle/>
                     <a:p>
-                      <a:pPr algn="r"/>
+                      <a:pPr algn="r">
+                        <a:defRPr>
+                          <a:latin typeface="Roboto"/>
+                        </a:defRPr>
+                      </a:pPr>
                       <a:r>
                         <a:rPr sz="1050">
                           <a:solidFill>
                             <a:srgbClr val="25342A"/>
                           </a:solidFill>
+                          <a:latin typeface="Roboto"/>
                         </a:rPr>
                         <a:t>$150,100</a:t>
                       </a:r>
@@ -14198,12 +15608,17 @@
                     <a:bodyPr/>
                     <a:lstStyle/>
                     <a:p>
-                      <a:pPr algn="r"/>
+                      <a:pPr algn="r">
+                        <a:defRPr>
+                          <a:latin typeface="Roboto"/>
+                        </a:defRPr>
+                      </a:pPr>
                       <a:r>
                         <a:rPr sz="1050">
                           <a:solidFill>
                             <a:srgbClr val="25342A"/>
                           </a:solidFill>
+                          <a:latin typeface="Roboto"/>
                         </a:rPr>
                         <a:t>–</a:t>
                       </a:r>
@@ -14220,12 +15635,17 @@
                     <a:bodyPr/>
                     <a:lstStyle/>
                     <a:p>
-                      <a:pPr algn="r"/>
+                      <a:pPr algn="r">
+                        <a:defRPr>
+                          <a:latin typeface="Roboto"/>
+                        </a:defRPr>
+                      </a:pPr>
                       <a:r>
                         <a:rPr sz="1050">
                           <a:solidFill>
                             <a:srgbClr val="25342A"/>
                           </a:solidFill>
+                          <a:latin typeface="Roboto"/>
                         </a:rPr>
                         <a:t>–</a:t>
                       </a:r>
@@ -14242,12 +15662,17 @@
                     <a:bodyPr/>
                     <a:lstStyle/>
                     <a:p>
-                      <a:pPr algn="r"/>
+                      <a:pPr algn="r">
+                        <a:defRPr>
+                          <a:latin typeface="Roboto"/>
+                        </a:defRPr>
+                      </a:pPr>
                       <a:r>
                         <a:rPr sz="1050">
                           <a:solidFill>
                             <a:srgbClr val="25342A"/>
                           </a:solidFill>
+                          <a:latin typeface="Roboto"/>
                         </a:rPr>
                         <a:t>$99,400</a:t>
                       </a:r>
@@ -14264,12 +15689,17 @@
                     <a:bodyPr/>
                     <a:lstStyle/>
                     <a:p>
-                      <a:pPr algn="r"/>
+                      <a:pPr algn="r">
+                        <a:defRPr>
+                          <a:latin typeface="Roboto"/>
+                        </a:defRPr>
+                      </a:pPr>
                       <a:r>
                         <a:rPr sz="1050">
                           <a:solidFill>
                             <a:srgbClr val="25342A"/>
                           </a:solidFill>
+                          <a:latin typeface="Roboto"/>
                         </a:rPr>
                         <a:t>66.2%</a:t>
                       </a:r>
@@ -14288,11 +15718,17 @@
                     <a:bodyPr/>
                     <a:lstStyle/>
                     <a:p>
+                      <a:pPr>
+                        <a:defRPr>
+                          <a:latin typeface="Roboto"/>
+                        </a:defRPr>
+                      </a:pPr>
                       <a:r>
                         <a:rPr sz="1050">
                           <a:solidFill>
                             <a:srgbClr val="25342A"/>
                           </a:solidFill>
+                          <a:latin typeface="Roboto"/>
                         </a:rPr>
                         <a:t>Training</a:t>
                       </a:r>
@@ -14309,12 +15745,17 @@
                     <a:bodyPr/>
                     <a:lstStyle/>
                     <a:p>
-                      <a:pPr algn="r"/>
+                      <a:pPr algn="r">
+                        <a:defRPr>
+                          <a:latin typeface="Roboto"/>
+                        </a:defRPr>
+                      </a:pPr>
                       <a:r>
                         <a:rPr sz="1050">
                           <a:solidFill>
                             <a:srgbClr val="25342A"/>
                           </a:solidFill>
+                          <a:latin typeface="Roboto"/>
                         </a:rPr>
                         <a:t>$50,200</a:t>
                       </a:r>
@@ -14331,12 +15772,17 @@
                     <a:bodyPr/>
                     <a:lstStyle/>
                     <a:p>
-                      <a:pPr algn="r"/>
+                      <a:pPr algn="r">
+                        <a:defRPr>
+                          <a:latin typeface="Roboto"/>
+                        </a:defRPr>
+                      </a:pPr>
                       <a:r>
                         <a:rPr sz="1050">
                           <a:solidFill>
                             <a:srgbClr val="25342A"/>
                           </a:solidFill>
+                          <a:latin typeface="Roboto"/>
                         </a:rPr>
                         <a:t>–</a:t>
                       </a:r>
@@ -14353,12 +15799,17 @@
                     <a:bodyPr/>
                     <a:lstStyle/>
                     <a:p>
-                      <a:pPr algn="r"/>
+                      <a:pPr algn="r">
+                        <a:defRPr>
+                          <a:latin typeface="Roboto"/>
+                        </a:defRPr>
+                      </a:pPr>
                       <a:r>
                         <a:rPr sz="1050">
                           <a:solidFill>
                             <a:srgbClr val="25342A"/>
                           </a:solidFill>
+                          <a:latin typeface="Roboto"/>
                         </a:rPr>
                         <a:t>–</a:t>
                       </a:r>
@@ -14375,12 +15826,17 @@
                     <a:bodyPr/>
                     <a:lstStyle/>
                     <a:p>
-                      <a:pPr algn="r"/>
+                      <a:pPr algn="r">
+                        <a:defRPr>
+                          <a:latin typeface="Roboto"/>
+                        </a:defRPr>
+                      </a:pPr>
                       <a:r>
                         <a:rPr sz="1050">
                           <a:solidFill>
                             <a:srgbClr val="25342A"/>
                           </a:solidFill>
+                          <a:latin typeface="Roboto"/>
                         </a:rPr>
                         <a:t>$38,020</a:t>
                       </a:r>
@@ -14397,12 +15853,17 @@
                     <a:bodyPr/>
                     <a:lstStyle/>
                     <a:p>
-                      <a:pPr algn="r"/>
+                      <a:pPr algn="r">
+                        <a:defRPr>
+                          <a:latin typeface="Roboto"/>
+                        </a:defRPr>
+                      </a:pPr>
                       <a:r>
                         <a:rPr sz="1050">
                           <a:solidFill>
                             <a:srgbClr val="25342A"/>
                           </a:solidFill>
+                          <a:latin typeface="Roboto"/>
                         </a:rPr>
                         <a:t>75.7%</a:t>
                       </a:r>
@@ -14421,11 +15882,17 @@
                     <a:bodyPr/>
                     <a:lstStyle/>
                     <a:p>
+                      <a:pPr>
+                        <a:defRPr>
+                          <a:latin typeface="Roboto"/>
+                        </a:defRPr>
+                      </a:pPr>
                       <a:r>
                         <a:rPr sz="1050" b="1">
                           <a:solidFill>
                             <a:srgbClr val="25342A"/>
                           </a:solidFill>
+                          <a:latin typeface="Roboto"/>
                         </a:rPr>
                         <a:t>Total</a:t>
                       </a:r>
@@ -14442,12 +15909,17 @@
                     <a:bodyPr/>
                     <a:lstStyle/>
                     <a:p>
-                      <a:pPr algn="r"/>
+                      <a:pPr algn="r">
+                        <a:defRPr>
+                          <a:latin typeface="Roboto"/>
+                        </a:defRPr>
+                      </a:pPr>
                       <a:r>
                         <a:rPr sz="1050" b="1">
                           <a:solidFill>
                             <a:srgbClr val="25342A"/>
                           </a:solidFill>
+                          <a:latin typeface="Roboto"/>
                         </a:rPr>
                         <a:t>$524,320</a:t>
                       </a:r>
@@ -14464,12 +15936,17 @@
                     <a:bodyPr/>
                     <a:lstStyle/>
                     <a:p>
-                      <a:pPr algn="r"/>
+                      <a:pPr algn="r">
+                        <a:defRPr>
+                          <a:latin typeface="Roboto"/>
+                        </a:defRPr>
+                      </a:pPr>
                       <a:r>
                         <a:rPr sz="1050" b="1">
                           <a:solidFill>
                             <a:srgbClr val="25342A"/>
                           </a:solidFill>
+                          <a:latin typeface="Roboto"/>
                         </a:rPr>
                         <a:t>–</a:t>
                       </a:r>
@@ -14486,12 +15963,17 @@
                     <a:bodyPr/>
                     <a:lstStyle/>
                     <a:p>
-                      <a:pPr algn="r"/>
+                      <a:pPr algn="r">
+                        <a:defRPr>
+                          <a:latin typeface="Roboto"/>
+                        </a:defRPr>
+                      </a:pPr>
                       <a:r>
                         <a:rPr sz="1050" b="1">
                           <a:solidFill>
                             <a:srgbClr val="25342A"/>
                           </a:solidFill>
+                          <a:latin typeface="Roboto"/>
                         </a:rPr>
                         <a:t>–</a:t>
                       </a:r>
@@ -14508,12 +15990,17 @@
                     <a:bodyPr/>
                     <a:lstStyle/>
                     <a:p>
-                      <a:pPr algn="r"/>
+                      <a:pPr algn="r">
+                        <a:defRPr>
+                          <a:latin typeface="Roboto"/>
+                        </a:defRPr>
+                      </a:pPr>
                       <a:r>
                         <a:rPr sz="1050" b="1">
                           <a:solidFill>
                             <a:srgbClr val="25342A"/>
                           </a:solidFill>
+                          <a:latin typeface="Roboto"/>
                         </a:rPr>
                         <a:t>$336,140</a:t>
                       </a:r>
@@ -14530,12 +16017,17 @@
                     <a:bodyPr/>
                     <a:lstStyle/>
                     <a:p>
-                      <a:pPr algn="r"/>
+                      <a:pPr algn="r">
+                        <a:defRPr>
+                          <a:latin typeface="Roboto"/>
+                        </a:defRPr>
+                      </a:pPr>
                       <a:r>
                         <a:rPr sz="1050" b="1">
                           <a:solidFill>
                             <a:srgbClr val="25342A"/>
                           </a:solidFill>
+                          <a:latin typeface="Roboto"/>
                         </a:rPr>
                         <a:t>64.1%</a:t>
                       </a:r>
@@ -14574,12 +16066,17 @@
           </a:bodyPr>
           <a:lstStyle/>
           <a:p>
+            <a:pPr>
+              <a:defRPr>
+                <a:latin typeface="Roboto"/>
+              </a:defRPr>
+            </a:pPr>
             <a:r>
               <a:rPr sz="900" b="0">
                 <a:solidFill>
                   <a:srgbClr val="5F6F63"/>
                 </a:solidFill>
-                <a:latin typeface="Arial"/>
+                <a:latin typeface="Roboto"/>
               </a:rPr>
               <a:t>growth.pptx</a:t>
             </a:r>
@@ -14608,13 +16105,17 @@
           </a:bodyPr>
           <a:lstStyle/>
           <a:p>
-            <a:pPr algn="ctr"/>
+            <a:pPr algn="ctr">
+              <a:defRPr>
+                <a:latin typeface="Roboto"/>
+              </a:defRPr>
+            </a:pPr>
             <a:r>
               <a:rPr sz="900" b="0">
                 <a:solidFill>
                   <a:srgbClr val="5F6F63"/>
                 </a:solidFill>
-                <a:latin typeface="Arial"/>
+                <a:latin typeface="Roboto"/>
               </a:rPr>
               <a:t>Data retrieved 2pm, Tue 6 Oct 2026 · Sample data</a:t>
             </a:r>
@@ -14643,13 +16144,17 @@
           </a:bodyPr>
           <a:lstStyle/>
           <a:p>
-            <a:pPr algn="r"/>
+            <a:pPr algn="r">
+              <a:defRPr>
+                <a:latin typeface="Roboto"/>
+              </a:defRPr>
+            </a:pPr>
             <a:r>
               <a:rPr sz="900" b="0">
                 <a:solidFill>
                   <a:srgbClr val="5F6F63"/>
                 </a:solidFill>
-                <a:latin typeface="Arial"/>
+                <a:latin typeface="Roboto"/>
               </a:rPr>
               <a:t>Slide 27 of 27</a:t>
             </a:r>
@@ -14713,7 +16218,11 @@
           <a:bodyPr rtlCol="0" anchor="ctr"/>
           <a:lstStyle/>
           <a:p>
-            <a:pPr algn="ctr"/>
+            <a:pPr algn="ctr">
+              <a:defRPr>
+                <a:latin typeface="Roboto"/>
+              </a:defRPr>
+            </a:pPr>
           </a:p>
         </p:txBody>
       </p:sp>
@@ -14739,12 +16248,17 @@
           </a:bodyPr>
           <a:lstStyle/>
           <a:p>
+            <a:pPr>
+              <a:defRPr>
+                <a:latin typeface="Roboto"/>
+              </a:defRPr>
+            </a:pPr>
             <a:r>
               <a:rPr sz="1000" b="0">
                 <a:solidFill>
                   <a:srgbClr val="5F6F63"/>
                 </a:solidFill>
-                <a:latin typeface="Arial"/>
+                <a:latin typeface="Roboto"/>
               </a:rPr>
               <a:t>SME sample businesses · Which products and services are growing?</a:t>
             </a:r>
@@ -14773,12 +16287,17 @@
           </a:bodyPr>
           <a:lstStyle/>
           <a:p>
+            <a:pPr>
+              <a:defRPr>
+                <a:latin typeface="Roboto"/>
+              </a:defRPr>
+            </a:pPr>
             <a:r>
               <a:rPr sz="2400" b="1">
                 <a:solidFill>
                   <a:srgbClr val="25342A"/>
                 </a:solidFill>
-                <a:latin typeface="Arial"/>
+                <a:latin typeface="Roboto"/>
               </a:rPr>
               <a:t>From gross margin to profit · Trades</a:t>
             </a:r>
@@ -14807,12 +16326,17 @@
           </a:bodyPr>
           <a:lstStyle/>
           <a:p>
+            <a:pPr>
+              <a:defRPr>
+                <a:latin typeface="Roboto"/>
+              </a:defRPr>
+            </a:pPr>
             <a:r>
               <a:rPr sz="1200" b="0">
                 <a:solidFill>
                   <a:srgbClr val="5F6F63"/>
                 </a:solidFill>
-                <a:latin typeface="Arial"/>
+                <a:latin typeface="Roboto"/>
               </a:rPr>
               <a:t>January's jobs made $58,190 gross margin (35.3%). Technician time not charged to jobs took $4,620 and overheads $58,730, leaving ($5,160) profit before tax ((3.1%) of revenue). To cover overheads, jobs need a 38.4% gross margin on average.</a:t>
             </a:r>
@@ -14846,7 +16370,13 @@
                   <a:txBody>
                     <a:bodyPr/>
                     <a:lstStyle/>
-                    <a:p/>
+                    <a:p>
+                      <a:pPr>
+                        <a:defRPr>
+                          <a:latin typeface="Roboto"/>
+                        </a:defRPr>
+                      </a:pPr>
+                    </a:p>
                   </a:txBody>
                   <a:tcPr>
                     <a:solidFill>
@@ -14859,12 +16389,17 @@
                     <a:bodyPr/>
                     <a:lstStyle/>
                     <a:p>
-                      <a:pPr algn="r"/>
+                      <a:pPr algn="r">
+                        <a:defRPr>
+                          <a:latin typeface="Roboto"/>
+                        </a:defRPr>
+                      </a:pPr>
                       <a:r>
                         <a:rPr sz="1100" b="1">
                           <a:solidFill>
                             <a:srgbClr val="FFFFFF"/>
                           </a:solidFill>
+                          <a:latin typeface="Roboto"/>
                         </a:rPr>
                         <a:t>January 2026</a:t>
                       </a:r>
@@ -14883,11 +16418,17 @@
                     <a:bodyPr/>
                     <a:lstStyle/>
                     <a:p>
+                      <a:pPr>
+                        <a:defRPr>
+                          <a:latin typeface="Roboto"/>
+                        </a:defRPr>
+                      </a:pPr>
                       <a:r>
                         <a:rPr sz="1050">
                           <a:solidFill>
                             <a:srgbClr val="25342A"/>
                           </a:solidFill>
+                          <a:latin typeface="Roboto"/>
                         </a:rPr>
                         <a:t>Gross margin on jobs</a:t>
                       </a:r>
@@ -14904,12 +16445,17 @@
                     <a:bodyPr/>
                     <a:lstStyle/>
                     <a:p>
-                      <a:pPr algn="r"/>
+                      <a:pPr algn="r">
+                        <a:defRPr>
+                          <a:latin typeface="Roboto"/>
+                        </a:defRPr>
+                      </a:pPr>
                       <a:r>
                         <a:rPr sz="1050">
                           <a:solidFill>
                             <a:srgbClr val="25342A"/>
                           </a:solidFill>
+                          <a:latin typeface="Roboto"/>
                         </a:rPr>
                         <a:t>$58,190</a:t>
                       </a:r>
@@ -14928,11 +16474,17 @@
                     <a:bodyPr/>
                     <a:lstStyle/>
                     <a:p>
+                      <a:pPr>
+                        <a:defRPr>
+                          <a:latin typeface="Roboto"/>
+                        </a:defRPr>
+                      </a:pPr>
                       <a:r>
                         <a:rPr sz="1050">
                           <a:solidFill>
                             <a:srgbClr val="25342A"/>
                           </a:solidFill>
+                          <a:latin typeface="Roboto"/>
                         </a:rPr>
                         <a:t>Technician wages and on-costs</a:t>
                       </a:r>
@@ -14949,12 +16501,17 @@
                     <a:bodyPr/>
                     <a:lstStyle/>
                     <a:p>
-                      <a:pPr algn="r"/>
+                      <a:pPr algn="r">
+                        <a:defRPr>
+                          <a:latin typeface="Roboto"/>
+                        </a:defRPr>
+                      </a:pPr>
                       <a:r>
                         <a:rPr sz="1050">
                           <a:solidFill>
                             <a:srgbClr val="25342A"/>
                           </a:solidFill>
+                          <a:latin typeface="Roboto"/>
                         </a:rPr>
                         <a:t>$54,600</a:t>
                       </a:r>
@@ -14973,11 +16530,17 @@
                     <a:bodyPr/>
                     <a:lstStyle/>
                     <a:p>
+                      <a:pPr>
+                        <a:defRPr>
+                          <a:latin typeface="Roboto"/>
+                        </a:defRPr>
+                      </a:pPr>
                       <a:r>
                         <a:rPr sz="1050">
                           <a:solidFill>
                             <a:srgbClr val="25342A"/>
                           </a:solidFill>
+                          <a:latin typeface="Roboto"/>
                         </a:rPr>
                         <a:t>Technician time charged to jobs (at cost)</a:t>
                       </a:r>
@@ -14994,12 +16557,17 @@
                     <a:bodyPr/>
                     <a:lstStyle/>
                     <a:p>
-                      <a:pPr algn="r"/>
+                      <a:pPr algn="r">
+                        <a:defRPr>
+                          <a:latin typeface="Roboto"/>
+                        </a:defRPr>
+                      </a:pPr>
                       <a:r>
                         <a:rPr sz="1050">
                           <a:solidFill>
                             <a:srgbClr val="25342A"/>
                           </a:solidFill>
+                          <a:latin typeface="Roboto"/>
                         </a:rPr>
                         <a:t>$49,980</a:t>
                       </a:r>
@@ -15018,11 +16586,17 @@
                     <a:bodyPr/>
                     <a:lstStyle/>
                     <a:p>
+                      <a:pPr>
+                        <a:defRPr>
+                          <a:latin typeface="Roboto"/>
+                        </a:defRPr>
+                      </a:pPr>
                       <a:r>
                         <a:rPr sz="1050">
                           <a:solidFill>
                             <a:srgbClr val="25342A"/>
                           </a:solidFill>
+                          <a:latin typeface="Roboto"/>
                         </a:rPr>
                         <a:t>Technician time not charged to jobs</a:t>
                       </a:r>
@@ -15039,12 +16613,17 @@
                     <a:bodyPr/>
                     <a:lstStyle/>
                     <a:p>
-                      <a:pPr algn="r"/>
+                      <a:pPr algn="r">
+                        <a:defRPr>
+                          <a:latin typeface="Roboto"/>
+                        </a:defRPr>
+                      </a:pPr>
                       <a:r>
                         <a:rPr sz="1050">
                           <a:solidFill>
                             <a:srgbClr val="25342A"/>
                           </a:solidFill>
+                          <a:latin typeface="Roboto"/>
                         </a:rPr>
                         <a:t>$4,620</a:t>
                       </a:r>
@@ -15063,11 +16642,17 @@
                     <a:bodyPr/>
                     <a:lstStyle/>
                     <a:p>
+                      <a:pPr>
+                        <a:defRPr>
+                          <a:latin typeface="Roboto"/>
+                        </a:defRPr>
+                      </a:pPr>
                       <a:r>
                         <a:rPr sz="1050">
                           <a:solidFill>
                             <a:srgbClr val="25342A"/>
                           </a:solidFill>
+                          <a:latin typeface="Roboto"/>
                         </a:rPr>
                         <a:t>Gross profit (the P&amp;L)</a:t>
                       </a:r>
@@ -15084,12 +16669,17 @@
                     <a:bodyPr/>
                     <a:lstStyle/>
                     <a:p>
-                      <a:pPr algn="r"/>
+                      <a:pPr algn="r">
+                        <a:defRPr>
+                          <a:latin typeface="Roboto"/>
+                        </a:defRPr>
+                      </a:pPr>
                       <a:r>
                         <a:rPr sz="1050">
                           <a:solidFill>
                             <a:srgbClr val="25342A"/>
                           </a:solidFill>
+                          <a:latin typeface="Roboto"/>
                         </a:rPr>
                         <a:t>$53,570</a:t>
                       </a:r>
@@ -15108,11 +16698,17 @@
                     <a:bodyPr/>
                     <a:lstStyle/>
                     <a:p>
+                      <a:pPr>
+                        <a:defRPr>
+                          <a:latin typeface="Roboto"/>
+                        </a:defRPr>
+                      </a:pPr>
                       <a:r>
                         <a:rPr sz="1050">
                           <a:solidFill>
                             <a:srgbClr val="25342A"/>
                           </a:solidFill>
+                          <a:latin typeface="Roboto"/>
                         </a:rPr>
                         <a:t>Overheads (operating expenses, depreciation, interest)</a:t>
                       </a:r>
@@ -15129,12 +16725,17 @@
                     <a:bodyPr/>
                     <a:lstStyle/>
                     <a:p>
-                      <a:pPr algn="r"/>
+                      <a:pPr algn="r">
+                        <a:defRPr>
+                          <a:latin typeface="Roboto"/>
+                        </a:defRPr>
+                      </a:pPr>
                       <a:r>
                         <a:rPr sz="1050">
                           <a:solidFill>
                             <a:srgbClr val="25342A"/>
                           </a:solidFill>
+                          <a:latin typeface="Roboto"/>
                         </a:rPr>
                         <a:t>$58,730</a:t>
                       </a:r>
@@ -15153,11 +16754,17 @@
                     <a:bodyPr/>
                     <a:lstStyle/>
                     <a:p>
+                      <a:pPr>
+                        <a:defRPr>
+                          <a:latin typeface="Roboto"/>
+                        </a:defRPr>
+                      </a:pPr>
                       <a:r>
                         <a:rPr sz="1050">
                           <a:solidFill>
                             <a:srgbClr val="25342A"/>
                           </a:solidFill>
+                          <a:latin typeface="Roboto"/>
                         </a:rPr>
                         <a:t>Profit before tax (the P&amp;L)</a:t>
                       </a:r>
@@ -15174,12 +16781,17 @@
                     <a:bodyPr/>
                     <a:lstStyle/>
                     <a:p>
-                      <a:pPr algn="r"/>
+                      <a:pPr algn="r">
+                        <a:defRPr>
+                          <a:latin typeface="Roboto"/>
+                        </a:defRPr>
+                      </a:pPr>
                       <a:r>
                         <a:rPr sz="1050">
                           <a:solidFill>
                             <a:srgbClr val="B42318"/>
                           </a:solidFill>
+                          <a:latin typeface="Roboto"/>
                         </a:rPr>
                         <a:t>($5,160)</a:t>
                       </a:r>
@@ -15198,11 +16810,17 @@
                     <a:bodyPr/>
                     <a:lstStyle/>
                     <a:p>
+                      <a:pPr>
+                        <a:defRPr>
+                          <a:latin typeface="Roboto"/>
+                        </a:defRPr>
+                      </a:pPr>
                       <a:r>
                         <a:rPr sz="1050">
                           <a:solidFill>
                             <a:srgbClr val="25342A"/>
                           </a:solidFill>
+                          <a:latin typeface="Roboto"/>
                         </a:rPr>
                         <a:t>Revenue</a:t>
                       </a:r>
@@ -15219,12 +16837,17 @@
                     <a:bodyPr/>
                     <a:lstStyle/>
                     <a:p>
-                      <a:pPr algn="r"/>
+                      <a:pPr algn="r">
+                        <a:defRPr>
+                          <a:latin typeface="Roboto"/>
+                        </a:defRPr>
+                      </a:pPr>
                       <a:r>
                         <a:rPr sz="1050">
                           <a:solidFill>
                             <a:srgbClr val="25342A"/>
                           </a:solidFill>
+                          <a:latin typeface="Roboto"/>
                         </a:rPr>
                         <a:t>$164,780</a:t>
                       </a:r>
@@ -15243,11 +16866,17 @@
                     <a:bodyPr/>
                     <a:lstStyle/>
                     <a:p>
+                      <a:pPr>
+                        <a:defRPr>
+                          <a:latin typeface="Roboto"/>
+                        </a:defRPr>
+                      </a:pPr>
                       <a:r>
                         <a:rPr sz="1050">
                           <a:solidFill>
                             <a:srgbClr val="25342A"/>
                           </a:solidFill>
+                          <a:latin typeface="Roboto"/>
                         </a:rPr>
                         <a:t>Gross margin on jobs, %</a:t>
                       </a:r>
@@ -15264,12 +16893,17 @@
                     <a:bodyPr/>
                     <a:lstStyle/>
                     <a:p>
-                      <a:pPr algn="r"/>
+                      <a:pPr algn="r">
+                        <a:defRPr>
+                          <a:latin typeface="Roboto"/>
+                        </a:defRPr>
+                      </a:pPr>
                       <a:r>
                         <a:rPr sz="1050">
                           <a:solidFill>
                             <a:srgbClr val="25342A"/>
                           </a:solidFill>
+                          <a:latin typeface="Roboto"/>
                         </a:rPr>
                         <a:t>35.3%</a:t>
                       </a:r>
@@ -15288,11 +16922,17 @@
                     <a:bodyPr/>
                     <a:lstStyle/>
                     <a:p>
+                      <a:pPr>
+                        <a:defRPr>
+                          <a:latin typeface="Roboto"/>
+                        </a:defRPr>
+                      </a:pPr>
                       <a:r>
                         <a:rPr sz="1050">
                           <a:solidFill>
                             <a:srgbClr val="25342A"/>
                           </a:solidFill>
+                          <a:latin typeface="Roboto"/>
                         </a:rPr>
                         <a:t>Profit before tax, % of revenue</a:t>
                       </a:r>
@@ -15309,12 +16949,17 @@
                     <a:bodyPr/>
                     <a:lstStyle/>
                     <a:p>
-                      <a:pPr algn="r"/>
+                      <a:pPr algn="r">
+                        <a:defRPr>
+                          <a:latin typeface="Roboto"/>
+                        </a:defRPr>
+                      </a:pPr>
                       <a:r>
                         <a:rPr sz="1050">
                           <a:solidFill>
                             <a:srgbClr val="B42318"/>
                           </a:solidFill>
+                          <a:latin typeface="Roboto"/>
                         </a:rPr>
                         <a:t>(3.1%)</a:t>
                       </a:r>
@@ -15333,11 +16978,17 @@
                     <a:bodyPr/>
                     <a:lstStyle/>
                     <a:p>
+                      <a:pPr>
+                        <a:defRPr>
+                          <a:latin typeface="Roboto"/>
+                        </a:defRPr>
+                      </a:pPr>
                       <a:r>
                         <a:rPr sz="1050">
                           <a:solidFill>
                             <a:srgbClr val="25342A"/>
                           </a:solidFill>
+                          <a:latin typeface="Roboto"/>
                         </a:rPr>
                         <a:t>Gross margin jobs need just to cover overheads and time not charged</a:t>
                       </a:r>
@@ -15354,12 +17005,17 @@
                     <a:bodyPr/>
                     <a:lstStyle/>
                     <a:p>
-                      <a:pPr algn="r"/>
+                      <a:pPr algn="r">
+                        <a:defRPr>
+                          <a:latin typeface="Roboto"/>
+                        </a:defRPr>
+                      </a:pPr>
                       <a:r>
                         <a:rPr sz="1050">
                           <a:solidFill>
                             <a:srgbClr val="25342A"/>
                           </a:solidFill>
+                          <a:latin typeface="Roboto"/>
                         </a:rPr>
                         <a:t>38.4%</a:t>
                       </a:r>
@@ -15398,12 +17054,17 @@
           </a:bodyPr>
           <a:lstStyle/>
           <a:p>
+            <a:pPr>
+              <a:defRPr>
+                <a:latin typeface="Roboto"/>
+              </a:defRPr>
+            </a:pPr>
             <a:r>
               <a:rPr sz="900" b="0">
                 <a:solidFill>
                   <a:srgbClr val="5F6F63"/>
                 </a:solidFill>
-                <a:latin typeface="Arial"/>
+                <a:latin typeface="Roboto"/>
               </a:rPr>
               <a:t>growth.pptx</a:t>
             </a:r>
@@ -15432,13 +17093,17 @@
           </a:bodyPr>
           <a:lstStyle/>
           <a:p>
-            <a:pPr algn="ctr"/>
+            <a:pPr algn="ctr">
+              <a:defRPr>
+                <a:latin typeface="Roboto"/>
+              </a:defRPr>
+            </a:pPr>
             <a:r>
               <a:rPr sz="900" b="0">
                 <a:solidFill>
                   <a:srgbClr val="5F6F63"/>
                 </a:solidFill>
-                <a:latin typeface="Arial"/>
+                <a:latin typeface="Roboto"/>
               </a:rPr>
               <a:t>Data retrieved 2pm, Tue 6 Oct 2026 · Sample data</a:t>
             </a:r>
@@ -15467,13 +17132,17 @@
           </a:bodyPr>
           <a:lstStyle/>
           <a:p>
-            <a:pPr algn="r"/>
+            <a:pPr algn="r">
+              <a:defRPr>
+                <a:latin typeface="Roboto"/>
+              </a:defRPr>
+            </a:pPr>
             <a:r>
               <a:rPr sz="900" b="0">
                 <a:solidFill>
                   <a:srgbClr val="5F6F63"/>
                 </a:solidFill>
-                <a:latin typeface="Arial"/>
+                <a:latin typeface="Roboto"/>
               </a:rPr>
               <a:t>Slide 3 of 27</a:t>
             </a:r>
@@ -15537,7 +17206,11 @@
           <a:bodyPr rtlCol="0" anchor="ctr"/>
           <a:lstStyle/>
           <a:p>
-            <a:pPr algn="ctr"/>
+            <a:pPr algn="ctr">
+              <a:defRPr>
+                <a:latin typeface="Roboto"/>
+              </a:defRPr>
+            </a:pPr>
           </a:p>
         </p:txBody>
       </p:sp>
@@ -15563,12 +17236,17 @@
           </a:bodyPr>
           <a:lstStyle/>
           <a:p>
+            <a:pPr>
+              <a:defRPr>
+                <a:latin typeface="Roboto"/>
+              </a:defRPr>
+            </a:pPr>
             <a:r>
               <a:rPr sz="1000" b="0">
                 <a:solidFill>
                   <a:srgbClr val="5F6F63"/>
                 </a:solidFill>
-                <a:latin typeface="Arial"/>
+                <a:latin typeface="Roboto"/>
               </a:rPr>
               <a:t>SME sample businesses · Which products and services are growing?</a:t>
             </a:r>
@@ -15597,12 +17275,17 @@
           </a:bodyPr>
           <a:lstStyle/>
           <a:p>
+            <a:pPr>
+              <a:defRPr>
+                <a:latin typeface="Roboto"/>
+              </a:defRPr>
+            </a:pPr>
             <a:r>
               <a:rPr sz="2400" b="1">
                 <a:solidFill>
                   <a:srgbClr val="25342A"/>
                 </a:solidFill>
-                <a:latin typeface="Arial"/>
+                <a:latin typeface="Roboto"/>
               </a:rPr>
               <a:t>Headline numbers · Trades · Line: All</a:t>
             </a:r>
@@ -15650,7 +17333,11 @@
           <a:bodyPr rtlCol="0" anchor="ctr"/>
           <a:lstStyle/>
           <a:p>
-            <a:pPr algn="ctr"/>
+            <a:pPr algn="ctr">
+              <a:defRPr>
+                <a:latin typeface="Roboto"/>
+              </a:defRPr>
+            </a:pPr>
           </a:p>
         </p:txBody>
       </p:sp>
@@ -15676,12 +17363,17 @@
           </a:bodyPr>
           <a:lstStyle/>
           <a:p>
+            <a:pPr>
+              <a:defRPr>
+                <a:latin typeface="Roboto"/>
+              </a:defRPr>
+            </a:pPr>
             <a:r>
               <a:rPr sz="1200" b="0">
                 <a:solidFill>
                   <a:srgbClr val="5F6F63"/>
                 </a:solidFill>
-                <a:latin typeface="Arial"/>
+                <a:latin typeface="Roboto"/>
               </a:rPr>
               <a:t>January against January last year</a:t>
             </a:r>
@@ -15710,12 +17402,17 @@
           </a:bodyPr>
           <a:lstStyle/>
           <a:p>
+            <a:pPr>
+              <a:defRPr>
+                <a:latin typeface="Roboto"/>
+              </a:defRPr>
+            </a:pPr>
             <a:r>
               <a:rPr sz="3000" b="1">
                 <a:solidFill>
                   <a:srgbClr val="2F7A5D"/>
                 </a:solidFill>
-                <a:latin typeface="Arial"/>
+                <a:latin typeface="Roboto"/>
               </a:rPr>
               <a:t>16.9%</a:t>
             </a:r>
@@ -15744,12 +17441,17 @@
           </a:bodyPr>
           <a:lstStyle/>
           <a:p>
+            <a:pPr>
+              <a:defRPr>
+                <a:latin typeface="Roboto"/>
+              </a:defRPr>
+            </a:pPr>
             <a:r>
               <a:rPr sz="1100" b="0">
                 <a:solidFill>
                   <a:srgbClr val="5F6F63"/>
                 </a:solidFill>
-                <a:latin typeface="Arial"/>
+                <a:latin typeface="Roboto"/>
               </a:rPr>
               <a:t>$164,780 against $140,909</a:t>
             </a:r>
@@ -15797,7 +17499,11 @@
           <a:bodyPr rtlCol="0" anchor="ctr"/>
           <a:lstStyle/>
           <a:p>
-            <a:pPr algn="ctr"/>
+            <a:pPr algn="ctr">
+              <a:defRPr>
+                <a:latin typeface="Roboto"/>
+              </a:defRPr>
+            </a:pPr>
           </a:p>
         </p:txBody>
       </p:sp>
@@ -15823,12 +17529,17 @@
           </a:bodyPr>
           <a:lstStyle/>
           <a:p>
+            <a:pPr>
+              <a:defRPr>
+                <a:latin typeface="Roboto"/>
+              </a:defRPr>
+            </a:pPr>
             <a:r>
               <a:rPr sz="1200" b="0">
                 <a:solidFill>
                   <a:srgbClr val="5F6F63"/>
                 </a:solidFill>
-                <a:latin typeface="Arial"/>
+                <a:latin typeface="Roboto"/>
               </a:rPr>
               <a:t>Year to date (Jul to Jan 2026)</a:t>
             </a:r>
@@ -15857,12 +17568,17 @@
           </a:bodyPr>
           <a:lstStyle/>
           <a:p>
+            <a:pPr>
+              <a:defRPr>
+                <a:latin typeface="Roboto"/>
+              </a:defRPr>
+            </a:pPr>
             <a:r>
               <a:rPr sz="3000" b="1">
                 <a:solidFill>
                   <a:srgbClr val="2F7A5D"/>
                 </a:solidFill>
-                <a:latin typeface="Arial"/>
+                <a:latin typeface="Roboto"/>
               </a:rPr>
               <a:t>$1,057,722</a:t>
             </a:r>
@@ -15891,12 +17607,17 @@
           </a:bodyPr>
           <a:lstStyle/>
           <a:p>
+            <a:pPr>
+              <a:defRPr>
+                <a:latin typeface="Roboto"/>
+              </a:defRPr>
+            </a:pPr>
             <a:r>
               <a:rPr sz="1100" b="0">
                 <a:solidFill>
                   <a:srgbClr val="5F6F63"/>
                 </a:solidFill>
-                <a:latin typeface="Arial"/>
+                <a:latin typeface="Roboto"/>
               </a:rPr>
               <a:t>same period last year: not in the data</a:t>
             </a:r>
@@ -15944,7 +17665,11 @@
           <a:bodyPr rtlCol="0" anchor="ctr"/>
           <a:lstStyle/>
           <a:p>
-            <a:pPr algn="ctr"/>
+            <a:pPr algn="ctr">
+              <a:defRPr>
+                <a:latin typeface="Roboto"/>
+              </a:defRPr>
+            </a:pPr>
           </a:p>
         </p:txBody>
       </p:sp>
@@ -15970,12 +17695,17 @@
           </a:bodyPr>
           <a:lstStyle/>
           <a:p>
+            <a:pPr>
+              <a:defRPr>
+                <a:latin typeface="Roboto"/>
+              </a:defRPr>
+            </a:pPr>
             <a:r>
               <a:rPr sz="1200" b="0">
                 <a:solidFill>
                   <a:srgbClr val="5F6F63"/>
                 </a:solidFill>
-                <a:latin typeface="Arial"/>
+                <a:latin typeface="Roboto"/>
               </a:rPr>
               <a:t>Gross margin, year to date</a:t>
             </a:r>
@@ -16004,12 +17734,17 @@
           </a:bodyPr>
           <a:lstStyle/>
           <a:p>
+            <a:pPr>
+              <a:defRPr>
+                <a:latin typeface="Roboto"/>
+              </a:defRPr>
+            </a:pPr>
             <a:r>
               <a:rPr sz="3000" b="1">
                 <a:solidFill>
                   <a:srgbClr val="2F7A5D"/>
                 </a:solidFill>
-                <a:latin typeface="Arial"/>
+                <a:latin typeface="Roboto"/>
               </a:rPr>
               <a:t>37.1%</a:t>
             </a:r>
@@ -16038,12 +17773,17 @@
           </a:bodyPr>
           <a:lstStyle/>
           <a:p>
+            <a:pPr>
+              <a:defRPr>
+                <a:latin typeface="Roboto"/>
+              </a:defRPr>
+            </a:pPr>
             <a:r>
               <a:rPr sz="1100" b="0">
                 <a:solidFill>
                   <a:srgbClr val="5F6F63"/>
                 </a:solidFill>
-                <a:latin typeface="Arial"/>
+                <a:latin typeface="Roboto"/>
               </a:rPr>
               <a:t>$392,474 before overheads</a:t>
             </a:r>
@@ -16072,12 +17812,17 @@
           </a:bodyPr>
           <a:lstStyle/>
           <a:p>
+            <a:pPr>
+              <a:defRPr>
+                <a:latin typeface="Roboto"/>
+              </a:defRPr>
+            </a:pPr>
             <a:r>
               <a:rPr sz="900" b="0">
                 <a:solidFill>
                   <a:srgbClr val="5F6F63"/>
                 </a:solidFill>
-                <a:latin typeface="Arial"/>
+                <a:latin typeface="Roboto"/>
               </a:rPr>
               <a:t>growth.pptx</a:t>
             </a:r>
@@ -16106,13 +17851,17 @@
           </a:bodyPr>
           <a:lstStyle/>
           <a:p>
-            <a:pPr algn="ctr"/>
+            <a:pPr algn="ctr">
+              <a:defRPr>
+                <a:latin typeface="Roboto"/>
+              </a:defRPr>
+            </a:pPr>
             <a:r>
               <a:rPr sz="900" b="0">
                 <a:solidFill>
                   <a:srgbClr val="5F6F63"/>
                 </a:solidFill>
-                <a:latin typeface="Arial"/>
+                <a:latin typeface="Roboto"/>
               </a:rPr>
               <a:t>Data retrieved 2pm, Tue 6 Oct 2026 · Sample data</a:t>
             </a:r>
@@ -16141,13 +17890,17 @@
           </a:bodyPr>
           <a:lstStyle/>
           <a:p>
-            <a:pPr algn="r"/>
+            <a:pPr algn="r">
+              <a:defRPr>
+                <a:latin typeface="Roboto"/>
+              </a:defRPr>
+            </a:pPr>
             <a:r>
               <a:rPr sz="900" b="0">
                 <a:solidFill>
                   <a:srgbClr val="5F6F63"/>
                 </a:solidFill>
-                <a:latin typeface="Arial"/>
+                <a:latin typeface="Roboto"/>
               </a:rPr>
               <a:t>Slide 4 of 27</a:t>
             </a:r>
@@ -16211,7 +17964,11 @@
           <a:bodyPr rtlCol="0" anchor="ctr"/>
           <a:lstStyle/>
           <a:p>
-            <a:pPr algn="ctr"/>
+            <a:pPr algn="ctr">
+              <a:defRPr>
+                <a:latin typeface="Roboto"/>
+              </a:defRPr>
+            </a:pPr>
           </a:p>
         </p:txBody>
       </p:sp>
@@ -16237,12 +17994,17 @@
           </a:bodyPr>
           <a:lstStyle/>
           <a:p>
+            <a:pPr>
+              <a:defRPr>
+                <a:latin typeface="Roboto"/>
+              </a:defRPr>
+            </a:pPr>
             <a:r>
               <a:rPr sz="1000" b="0">
                 <a:solidFill>
                   <a:srgbClr val="5F6F63"/>
                 </a:solidFill>
-                <a:latin typeface="Arial"/>
+                <a:latin typeface="Roboto"/>
               </a:rPr>
               <a:t>SME sample businesses · Which products and services are growing?</a:t>
             </a:r>
@@ -16271,12 +18033,17 @@
           </a:bodyPr>
           <a:lstStyle/>
           <a:p>
+            <a:pPr>
+              <a:defRPr>
+                <a:latin typeface="Roboto"/>
+              </a:defRPr>
+            </a:pPr>
             <a:r>
               <a:rPr sz="2400" b="1">
                 <a:solidFill>
                   <a:srgbClr val="25342A"/>
                 </a:solidFill>
-                <a:latin typeface="Arial"/>
+                <a:latin typeface="Roboto"/>
               </a:rPr>
               <a:t>What it shows · Trades · Line: All</a:t>
             </a:r>
@@ -16324,7 +18091,11 @@
           <a:bodyPr rtlCol="0" anchor="ctr"/>
           <a:lstStyle/>
           <a:p>
-            <a:pPr algn="ctr"/>
+            <a:pPr algn="ctr">
+              <a:defRPr>
+                <a:latin typeface="Roboto"/>
+              </a:defRPr>
+            </a:pPr>
           </a:p>
         </p:txBody>
       </p:sp>
@@ -16350,12 +18121,17 @@
           </a:bodyPr>
           <a:lstStyle/>
           <a:p>
+            <a:pPr>
+              <a:defRPr>
+                <a:latin typeface="Roboto"/>
+              </a:defRPr>
+            </a:pPr>
             <a:r>
               <a:rPr sz="1100" b="1">
                 <a:solidFill>
                   <a:srgbClr val="5F6F63"/>
                 </a:solidFill>
-                <a:latin typeface="Arial"/>
+                <a:latin typeface="Roboto"/>
               </a:rPr>
               <a:t>WHAT IT SHOWS</a:t>
             </a:r>
@@ -16384,12 +18160,17 @@
           </a:bodyPr>
           <a:lstStyle/>
           <a:p>
+            <a:pPr>
+              <a:defRPr>
+                <a:latin typeface="Roboto"/>
+              </a:defRPr>
+            </a:pPr>
             <a:r>
               <a:rPr sz="1600" b="0">
                 <a:solidFill>
                   <a:srgbClr val="25342A"/>
                 </a:solidFill>
-                <a:latin typeface="Arial"/>
+                <a:latin typeface="Roboto"/>
               </a:rPr>
               <a:t>Revenue is $1,057,722 this financial year to date (Jul to Jan 2026). Maintenance contracts make the highest gross margin (59.5%); Installations the lowest (27.0%). The business needs 38.4% gross margin just to cover overheads.</a:t>
             </a:r>
@@ -16437,7 +18218,11 @@
           <a:bodyPr rtlCol="0" anchor="ctr"/>
           <a:lstStyle/>
           <a:p>
-            <a:pPr algn="ctr"/>
+            <a:pPr algn="ctr">
+              <a:defRPr>
+                <a:latin typeface="Roboto"/>
+              </a:defRPr>
+            </a:pPr>
           </a:p>
         </p:txBody>
       </p:sp>
@@ -16463,12 +18248,17 @@
           </a:bodyPr>
           <a:lstStyle/>
           <a:p>
+            <a:pPr>
+              <a:defRPr>
+                <a:latin typeface="Roboto"/>
+              </a:defRPr>
+            </a:pPr>
             <a:r>
               <a:rPr sz="1100" b="1">
                 <a:solidFill>
                   <a:srgbClr val="5F6F63"/>
                 </a:solidFill>
-                <a:latin typeface="Arial"/>
+                <a:latin typeface="Roboto"/>
               </a:rPr>
               <a:t>WHAT YOU'D DO ABOUT IT</a:t>
             </a:r>
@@ -16497,12 +18287,17 @@
           </a:bodyPr>
           <a:lstStyle/>
           <a:p>
+            <a:pPr>
+              <a:defRPr>
+                <a:latin typeface="Roboto"/>
+              </a:defRPr>
+            </a:pPr>
             <a:r>
               <a:rPr sz="1600" b="0">
                 <a:solidFill>
                   <a:srgbClr val="25342A"/>
                 </a:solidFill>
-                <a:latin typeface="Arial"/>
+                <a:latin typeface="Roboto"/>
               </a:rPr>
               <a:t>Maintenance contracts: 59.5% gross margin, the most profitable work you do. Installations: 27.0% gross margin, below the 38.4% needed to cover overheads.</a:t>
             </a:r>
@@ -16531,12 +18326,17 @@
           </a:bodyPr>
           <a:lstStyle/>
           <a:p>
+            <a:pPr>
+              <a:defRPr>
+                <a:latin typeface="Roboto"/>
+              </a:defRPr>
+            </a:pPr>
             <a:r>
               <a:rPr sz="900" b="0">
                 <a:solidFill>
                   <a:srgbClr val="5F6F63"/>
                 </a:solidFill>
-                <a:latin typeface="Arial"/>
+                <a:latin typeface="Roboto"/>
               </a:rPr>
               <a:t>growth.pptx</a:t>
             </a:r>
@@ -16565,13 +18365,17 @@
           </a:bodyPr>
           <a:lstStyle/>
           <a:p>
-            <a:pPr algn="ctr"/>
+            <a:pPr algn="ctr">
+              <a:defRPr>
+                <a:latin typeface="Roboto"/>
+              </a:defRPr>
+            </a:pPr>
             <a:r>
               <a:rPr sz="900" b="0">
                 <a:solidFill>
                   <a:srgbClr val="5F6F63"/>
                 </a:solidFill>
-                <a:latin typeface="Arial"/>
+                <a:latin typeface="Roboto"/>
               </a:rPr>
               <a:t>Data retrieved 2pm, Tue 6 Oct 2026 · Sample data</a:t>
             </a:r>
@@ -16600,13 +18404,17 @@
           </a:bodyPr>
           <a:lstStyle/>
           <a:p>
-            <a:pPr algn="r"/>
+            <a:pPr algn="r">
+              <a:defRPr>
+                <a:latin typeface="Roboto"/>
+              </a:defRPr>
+            </a:pPr>
             <a:r>
               <a:rPr sz="900" b="0">
                 <a:solidFill>
                   <a:srgbClr val="5F6F63"/>
                 </a:solidFill>
-                <a:latin typeface="Arial"/>
+                <a:latin typeface="Roboto"/>
               </a:rPr>
               <a:t>Slide 5 of 27</a:t>
             </a:r>
@@ -16670,7 +18478,11 @@
           <a:bodyPr rtlCol="0" anchor="ctr"/>
           <a:lstStyle/>
           <a:p>
-            <a:pPr algn="ctr"/>
+            <a:pPr algn="ctr">
+              <a:defRPr>
+                <a:latin typeface="Roboto"/>
+              </a:defRPr>
+            </a:pPr>
           </a:p>
         </p:txBody>
       </p:sp>
@@ -16696,12 +18508,17 @@
           </a:bodyPr>
           <a:lstStyle/>
           <a:p>
+            <a:pPr>
+              <a:defRPr>
+                <a:latin typeface="Roboto"/>
+              </a:defRPr>
+            </a:pPr>
             <a:r>
               <a:rPr sz="1000" b="0">
                 <a:solidFill>
                   <a:srgbClr val="5F6F63"/>
                 </a:solidFill>
-                <a:latin typeface="Arial"/>
+                <a:latin typeface="Roboto"/>
               </a:rPr>
               <a:t>SME sample businesses · Which products and services are growing?</a:t>
             </a:r>
@@ -16730,12 +18547,17 @@
           </a:bodyPr>
           <a:lstStyle/>
           <a:p>
+            <a:pPr>
+              <a:defRPr>
+                <a:latin typeface="Roboto"/>
+              </a:defRPr>
+            </a:pPr>
             <a:r>
               <a:rPr sz="2400" b="1">
                 <a:solidFill>
                   <a:srgbClr val="25342A"/>
                 </a:solidFill>
-                <a:latin typeface="Arial"/>
+                <a:latin typeface="Roboto"/>
               </a:rPr>
               <a:t>Headline numbers · Trades · Line: Maintenance contracts</a:t>
             </a:r>
@@ -16783,7 +18605,11 @@
           <a:bodyPr rtlCol="0" anchor="ctr"/>
           <a:lstStyle/>
           <a:p>
-            <a:pPr algn="ctr"/>
+            <a:pPr algn="ctr">
+              <a:defRPr>
+                <a:latin typeface="Roboto"/>
+              </a:defRPr>
+            </a:pPr>
           </a:p>
         </p:txBody>
       </p:sp>
@@ -16809,12 +18635,17 @@
           </a:bodyPr>
           <a:lstStyle/>
           <a:p>
+            <a:pPr>
+              <a:defRPr>
+                <a:latin typeface="Roboto"/>
+              </a:defRPr>
+            </a:pPr>
             <a:r>
               <a:rPr sz="1200" b="0">
                 <a:solidFill>
                   <a:srgbClr val="5F6F63"/>
                 </a:solidFill>
-                <a:latin typeface="Arial"/>
+                <a:latin typeface="Roboto"/>
               </a:rPr>
               <a:t>January against January last year</a:t>
             </a:r>
@@ -16843,12 +18674,17 @@
           </a:bodyPr>
           <a:lstStyle/>
           <a:p>
+            <a:pPr>
+              <a:defRPr>
+                <a:latin typeface="Roboto"/>
+              </a:defRPr>
+            </a:pPr>
             <a:r>
               <a:rPr sz="3000" b="1">
                 <a:solidFill>
                   <a:srgbClr val="2F7A5D"/>
                 </a:solidFill>
-                <a:latin typeface="Arial"/>
+                <a:latin typeface="Roboto"/>
               </a:rPr>
               <a:t>45.1%</a:t>
             </a:r>
@@ -16877,12 +18713,17 @@
           </a:bodyPr>
           <a:lstStyle/>
           <a:p>
+            <a:pPr>
+              <a:defRPr>
+                <a:latin typeface="Roboto"/>
+              </a:defRPr>
+            </a:pPr>
             <a:r>
               <a:rPr sz="1100" b="0">
                 <a:solidFill>
                   <a:srgbClr val="5F6F63"/>
                 </a:solidFill>
-                <a:latin typeface="Arial"/>
+                <a:latin typeface="Roboto"/>
               </a:rPr>
               <a:t>$35,800 against $24,670</a:t>
             </a:r>
@@ -16930,7 +18771,11 @@
           <a:bodyPr rtlCol="0" anchor="ctr"/>
           <a:lstStyle/>
           <a:p>
-            <a:pPr algn="ctr"/>
+            <a:pPr algn="ctr">
+              <a:defRPr>
+                <a:latin typeface="Roboto"/>
+              </a:defRPr>
+            </a:pPr>
           </a:p>
         </p:txBody>
       </p:sp>
@@ -16956,12 +18801,17 @@
           </a:bodyPr>
           <a:lstStyle/>
           <a:p>
+            <a:pPr>
+              <a:defRPr>
+                <a:latin typeface="Roboto"/>
+              </a:defRPr>
+            </a:pPr>
             <a:r>
               <a:rPr sz="1200" b="0">
                 <a:solidFill>
                   <a:srgbClr val="5F6F63"/>
                 </a:solidFill>
-                <a:latin typeface="Arial"/>
+                <a:latin typeface="Roboto"/>
               </a:rPr>
               <a:t>Year to date (Jul to Jan 2026)</a:t>
             </a:r>
@@ -16990,12 +18840,17 @@
           </a:bodyPr>
           <a:lstStyle/>
           <a:p>
+            <a:pPr>
+              <a:defRPr>
+                <a:latin typeface="Roboto"/>
+              </a:defRPr>
+            </a:pPr>
             <a:r>
               <a:rPr sz="3000" b="1">
                 <a:solidFill>
                   <a:srgbClr val="2F7A5D"/>
                 </a:solidFill>
-                <a:latin typeface="Arial"/>
+                <a:latin typeface="Roboto"/>
               </a:rPr>
               <a:t>$242,800</a:t>
             </a:r>
@@ -17024,12 +18879,17 @@
           </a:bodyPr>
           <a:lstStyle/>
           <a:p>
+            <a:pPr>
+              <a:defRPr>
+                <a:latin typeface="Roboto"/>
+              </a:defRPr>
+            </a:pPr>
             <a:r>
               <a:rPr sz="1100" b="0">
                 <a:solidFill>
                   <a:srgbClr val="5F6F63"/>
                 </a:solidFill>
-                <a:latin typeface="Arial"/>
+                <a:latin typeface="Roboto"/>
               </a:rPr>
               <a:t>same period last year: not in the data</a:t>
             </a:r>
@@ -17077,7 +18937,11 @@
           <a:bodyPr rtlCol="0" anchor="ctr"/>
           <a:lstStyle/>
           <a:p>
-            <a:pPr algn="ctr"/>
+            <a:pPr algn="ctr">
+              <a:defRPr>
+                <a:latin typeface="Roboto"/>
+              </a:defRPr>
+            </a:pPr>
           </a:p>
         </p:txBody>
       </p:sp>
@@ -17103,12 +18967,17 @@
           </a:bodyPr>
           <a:lstStyle/>
           <a:p>
+            <a:pPr>
+              <a:defRPr>
+                <a:latin typeface="Roboto"/>
+              </a:defRPr>
+            </a:pPr>
             <a:r>
               <a:rPr sz="1200" b="0">
                 <a:solidFill>
                   <a:srgbClr val="5F6F63"/>
                 </a:solidFill>
-                <a:latin typeface="Arial"/>
+                <a:latin typeface="Roboto"/>
               </a:rPr>
               <a:t>Gross margin, year to date</a:t>
             </a:r>
@@ -17137,12 +19006,17 @@
           </a:bodyPr>
           <a:lstStyle/>
           <a:p>
+            <a:pPr>
+              <a:defRPr>
+                <a:latin typeface="Roboto"/>
+              </a:defRPr>
+            </a:pPr>
             <a:r>
               <a:rPr sz="3000" b="1">
                 <a:solidFill>
                   <a:srgbClr val="2F7A5D"/>
                 </a:solidFill>
-                <a:latin typeface="Arial"/>
+                <a:latin typeface="Roboto"/>
               </a:rPr>
               <a:t>59.5%</a:t>
             </a:r>
@@ -17171,12 +19045,17 @@
           </a:bodyPr>
           <a:lstStyle/>
           <a:p>
+            <a:pPr>
+              <a:defRPr>
+                <a:latin typeface="Roboto"/>
+              </a:defRPr>
+            </a:pPr>
             <a:r>
               <a:rPr sz="1100" b="0">
                 <a:solidFill>
                   <a:srgbClr val="5F6F63"/>
                 </a:solidFill>
-                <a:latin typeface="Arial"/>
+                <a:latin typeface="Roboto"/>
               </a:rPr>
               <a:t>$144,398 before overheads</a:t>
             </a:r>
@@ -17205,12 +19084,17 @@
           </a:bodyPr>
           <a:lstStyle/>
           <a:p>
+            <a:pPr>
+              <a:defRPr>
+                <a:latin typeface="Roboto"/>
+              </a:defRPr>
+            </a:pPr>
             <a:r>
               <a:rPr sz="900" b="0">
                 <a:solidFill>
                   <a:srgbClr val="5F6F63"/>
                 </a:solidFill>
-                <a:latin typeface="Arial"/>
+                <a:latin typeface="Roboto"/>
               </a:rPr>
               <a:t>growth.pptx</a:t>
             </a:r>
@@ -17239,13 +19123,17 @@
           </a:bodyPr>
           <a:lstStyle/>
           <a:p>
-            <a:pPr algn="ctr"/>
+            <a:pPr algn="ctr">
+              <a:defRPr>
+                <a:latin typeface="Roboto"/>
+              </a:defRPr>
+            </a:pPr>
             <a:r>
               <a:rPr sz="900" b="0">
                 <a:solidFill>
                   <a:srgbClr val="5F6F63"/>
                 </a:solidFill>
-                <a:latin typeface="Arial"/>
+                <a:latin typeface="Roboto"/>
               </a:rPr>
               <a:t>Data retrieved 2pm, Tue 6 Oct 2026 · Sample data</a:t>
             </a:r>
@@ -17274,13 +19162,17 @@
           </a:bodyPr>
           <a:lstStyle/>
           <a:p>
-            <a:pPr algn="r"/>
+            <a:pPr algn="r">
+              <a:defRPr>
+                <a:latin typeface="Roboto"/>
+              </a:defRPr>
+            </a:pPr>
             <a:r>
               <a:rPr sz="900" b="0">
                 <a:solidFill>
                   <a:srgbClr val="5F6F63"/>
                 </a:solidFill>
-                <a:latin typeface="Arial"/>
+                <a:latin typeface="Roboto"/>
               </a:rPr>
               <a:t>Slide 6 of 27</a:t>
             </a:r>
@@ -17344,7 +19236,11 @@
           <a:bodyPr rtlCol="0" anchor="ctr"/>
           <a:lstStyle/>
           <a:p>
-            <a:pPr algn="ctr"/>
+            <a:pPr algn="ctr">
+              <a:defRPr>
+                <a:latin typeface="Roboto"/>
+              </a:defRPr>
+            </a:pPr>
           </a:p>
         </p:txBody>
       </p:sp>
@@ -17370,12 +19266,17 @@
           </a:bodyPr>
           <a:lstStyle/>
           <a:p>
+            <a:pPr>
+              <a:defRPr>
+                <a:latin typeface="Roboto"/>
+              </a:defRPr>
+            </a:pPr>
             <a:r>
               <a:rPr sz="1000" b="0">
                 <a:solidFill>
                   <a:srgbClr val="5F6F63"/>
                 </a:solidFill>
-                <a:latin typeface="Arial"/>
+                <a:latin typeface="Roboto"/>
               </a:rPr>
               <a:t>SME sample businesses · Which products and services are growing?</a:t>
             </a:r>
@@ -17404,12 +19305,17 @@
           </a:bodyPr>
           <a:lstStyle/>
           <a:p>
+            <a:pPr>
+              <a:defRPr>
+                <a:latin typeface="Roboto"/>
+              </a:defRPr>
+            </a:pPr>
             <a:r>
               <a:rPr sz="2400" b="1">
                 <a:solidFill>
                   <a:srgbClr val="25342A"/>
                 </a:solidFill>
-                <a:latin typeface="Arial"/>
+                <a:latin typeface="Roboto"/>
               </a:rPr>
               <a:t>What it shows · Trades · Line: Maintenance contracts</a:t>
             </a:r>
@@ -17457,7 +19363,11 @@
           <a:bodyPr rtlCol="0" anchor="ctr"/>
           <a:lstStyle/>
           <a:p>
-            <a:pPr algn="ctr"/>
+            <a:pPr algn="ctr">
+              <a:defRPr>
+                <a:latin typeface="Roboto"/>
+              </a:defRPr>
+            </a:pPr>
           </a:p>
         </p:txBody>
       </p:sp>
@@ -17483,12 +19393,17 @@
           </a:bodyPr>
           <a:lstStyle/>
           <a:p>
+            <a:pPr>
+              <a:defRPr>
+                <a:latin typeface="Roboto"/>
+              </a:defRPr>
+            </a:pPr>
             <a:r>
               <a:rPr sz="1100" b="1">
                 <a:solidFill>
                   <a:srgbClr val="5F6F63"/>
                 </a:solidFill>
-                <a:latin typeface="Arial"/>
+                <a:latin typeface="Roboto"/>
               </a:rPr>
               <a:t>WHAT IT SHOWS</a:t>
             </a:r>
@@ -17517,12 +19432,17 @@
           </a:bodyPr>
           <a:lstStyle/>
           <a:p>
+            <a:pPr>
+              <a:defRPr>
+                <a:latin typeface="Roboto"/>
+              </a:defRPr>
+            </a:pPr>
             <a:r>
               <a:rPr sz="1600" b="0">
                 <a:solidFill>
                   <a:srgbClr val="25342A"/>
                 </a:solidFill>
-                <a:latin typeface="Arial"/>
+                <a:latin typeface="Roboto"/>
               </a:rPr>
               <a:t>Maintenance contracts brought in $242,800 this financial year to date, at a 59.5% gross margin (above the 37.1% overall).</a:t>
             </a:r>
@@ -17570,7 +19490,11 @@
           <a:bodyPr rtlCol="0" anchor="ctr"/>
           <a:lstStyle/>
           <a:p>
-            <a:pPr algn="ctr"/>
+            <a:pPr algn="ctr">
+              <a:defRPr>
+                <a:latin typeface="Roboto"/>
+              </a:defRPr>
+            </a:pPr>
           </a:p>
         </p:txBody>
       </p:sp>
@@ -17596,12 +19520,17 @@
           </a:bodyPr>
           <a:lstStyle/>
           <a:p>
+            <a:pPr>
+              <a:defRPr>
+                <a:latin typeface="Roboto"/>
+              </a:defRPr>
+            </a:pPr>
             <a:r>
               <a:rPr sz="1100" b="1">
                 <a:solidFill>
                   <a:srgbClr val="5F6F63"/>
                 </a:solidFill>
-                <a:latin typeface="Arial"/>
+                <a:latin typeface="Roboto"/>
               </a:rPr>
               <a:t>WHAT YOU'D DO ABOUT IT</a:t>
             </a:r>
@@ -17630,12 +19559,17 @@
           </a:bodyPr>
           <a:lstStyle/>
           <a:p>
+            <a:pPr>
+              <a:defRPr>
+                <a:latin typeface="Roboto"/>
+              </a:defRPr>
+            </a:pPr>
             <a:r>
               <a:rPr sz="1600" b="0">
                 <a:solidFill>
                   <a:srgbClr val="25342A"/>
                 </a:solidFill>
-                <a:latin typeface="Arial"/>
+                <a:latin typeface="Roboto"/>
               </a:rPr>
               <a:t>Maintenance contracts: 59.5% gross margin, 21.0 points clear of the 38.4% overheads need.</a:t>
             </a:r>
@@ -17664,12 +19598,17 @@
           </a:bodyPr>
           <a:lstStyle/>
           <a:p>
+            <a:pPr>
+              <a:defRPr>
+                <a:latin typeface="Roboto"/>
+              </a:defRPr>
+            </a:pPr>
             <a:r>
               <a:rPr sz="900" b="0">
                 <a:solidFill>
                   <a:srgbClr val="5F6F63"/>
                 </a:solidFill>
-                <a:latin typeface="Arial"/>
+                <a:latin typeface="Roboto"/>
               </a:rPr>
               <a:t>growth.pptx</a:t>
             </a:r>
@@ -17698,13 +19637,17 @@
           </a:bodyPr>
           <a:lstStyle/>
           <a:p>
-            <a:pPr algn="ctr"/>
+            <a:pPr algn="ctr">
+              <a:defRPr>
+                <a:latin typeface="Roboto"/>
+              </a:defRPr>
+            </a:pPr>
             <a:r>
               <a:rPr sz="900" b="0">
                 <a:solidFill>
                   <a:srgbClr val="5F6F63"/>
                 </a:solidFill>
-                <a:latin typeface="Arial"/>
+                <a:latin typeface="Roboto"/>
               </a:rPr>
               <a:t>Data retrieved 2pm, Tue 6 Oct 2026 · Sample data</a:t>
             </a:r>
@@ -17733,13 +19676,17 @@
           </a:bodyPr>
           <a:lstStyle/>
           <a:p>
-            <a:pPr algn="r"/>
+            <a:pPr algn="r">
+              <a:defRPr>
+                <a:latin typeface="Roboto"/>
+              </a:defRPr>
+            </a:pPr>
             <a:r>
               <a:rPr sz="900" b="0">
                 <a:solidFill>
                   <a:srgbClr val="5F6F63"/>
                 </a:solidFill>
-                <a:latin typeface="Arial"/>
+                <a:latin typeface="Roboto"/>
               </a:rPr>
               <a:t>Slide 7 of 27</a:t>
             </a:r>
@@ -17803,7 +19750,11 @@
           <a:bodyPr rtlCol="0" anchor="ctr"/>
           <a:lstStyle/>
           <a:p>
-            <a:pPr algn="ctr"/>
+            <a:pPr algn="ctr">
+              <a:defRPr>
+                <a:latin typeface="Roboto"/>
+              </a:defRPr>
+            </a:pPr>
           </a:p>
         </p:txBody>
       </p:sp>
@@ -17829,12 +19780,17 @@
           </a:bodyPr>
           <a:lstStyle/>
           <a:p>
+            <a:pPr>
+              <a:defRPr>
+                <a:latin typeface="Roboto"/>
+              </a:defRPr>
+            </a:pPr>
             <a:r>
               <a:rPr sz="1000" b="0">
                 <a:solidFill>
                   <a:srgbClr val="5F6F63"/>
                 </a:solidFill>
-                <a:latin typeface="Arial"/>
+                <a:latin typeface="Roboto"/>
               </a:rPr>
               <a:t>SME sample businesses · Which products and services are growing?</a:t>
             </a:r>
@@ -17863,12 +19819,17 @@
           </a:bodyPr>
           <a:lstStyle/>
           <a:p>
+            <a:pPr>
+              <a:defRPr>
+                <a:latin typeface="Roboto"/>
+              </a:defRPr>
+            </a:pPr>
             <a:r>
               <a:rPr sz="2400" b="1">
                 <a:solidFill>
                   <a:srgbClr val="25342A"/>
                 </a:solidFill>
-                <a:latin typeface="Arial"/>
+                <a:latin typeface="Roboto"/>
               </a:rPr>
               <a:t>Headline numbers · Trades · Line: Installations</a:t>
             </a:r>
@@ -17916,7 +19877,11 @@
           <a:bodyPr rtlCol="0" anchor="ctr"/>
           <a:lstStyle/>
           <a:p>
-            <a:pPr algn="ctr"/>
+            <a:pPr algn="ctr">
+              <a:defRPr>
+                <a:latin typeface="Roboto"/>
+              </a:defRPr>
+            </a:pPr>
           </a:p>
         </p:txBody>
       </p:sp>
@@ -17942,12 +19907,17 @@
           </a:bodyPr>
           <a:lstStyle/>
           <a:p>
+            <a:pPr>
+              <a:defRPr>
+                <a:latin typeface="Roboto"/>
+              </a:defRPr>
+            </a:pPr>
             <a:r>
               <a:rPr sz="1200" b="0">
                 <a:solidFill>
                   <a:srgbClr val="5F6F63"/>
                 </a:solidFill>
-                <a:latin typeface="Arial"/>
+                <a:latin typeface="Roboto"/>
               </a:rPr>
               <a:t>January against January last year</a:t>
             </a:r>
@@ -17976,12 +19946,17 @@
           </a:bodyPr>
           <a:lstStyle/>
           <a:p>
+            <a:pPr>
+              <a:defRPr>
+                <a:latin typeface="Roboto"/>
+              </a:defRPr>
+            </a:pPr>
             <a:r>
               <a:rPr sz="3000" b="1">
                 <a:solidFill>
                   <a:srgbClr val="2F7A5D"/>
                 </a:solidFill>
-                <a:latin typeface="Arial"/>
+                <a:latin typeface="Roboto"/>
               </a:rPr>
               <a:t>9.1%</a:t>
             </a:r>
@@ -18010,12 +19985,17 @@
           </a:bodyPr>
           <a:lstStyle/>
           <a:p>
+            <a:pPr>
+              <a:defRPr>
+                <a:latin typeface="Roboto"/>
+              </a:defRPr>
+            </a:pPr>
             <a:r>
               <a:rPr sz="1100" b="0">
                 <a:solidFill>
                   <a:srgbClr val="5F6F63"/>
                 </a:solidFill>
-                <a:latin typeface="Arial"/>
+                <a:latin typeface="Roboto"/>
               </a:rPr>
               <a:t>$97,500 against $89,400</a:t>
             </a:r>
@@ -18063,7 +20043,11 @@
           <a:bodyPr rtlCol="0" anchor="ctr"/>
           <a:lstStyle/>
           <a:p>
-            <a:pPr algn="ctr"/>
+            <a:pPr algn="ctr">
+              <a:defRPr>
+                <a:latin typeface="Roboto"/>
+              </a:defRPr>
+            </a:pPr>
           </a:p>
         </p:txBody>
       </p:sp>
@@ -18089,12 +20073,17 @@
           </a:bodyPr>
           <a:lstStyle/>
           <a:p>
+            <a:pPr>
+              <a:defRPr>
+                <a:latin typeface="Roboto"/>
+              </a:defRPr>
+            </a:pPr>
             <a:r>
               <a:rPr sz="1200" b="0">
                 <a:solidFill>
                   <a:srgbClr val="5F6F63"/>
                 </a:solidFill>
-                <a:latin typeface="Arial"/>
+                <a:latin typeface="Roboto"/>
               </a:rPr>
               <a:t>Year to date (Jul to Jan 2026)</a:t>
             </a:r>
@@ -18123,12 +20112,17 @@
           </a:bodyPr>
           <a:lstStyle/>
           <a:p>
+            <a:pPr>
+              <a:defRPr>
+                <a:latin typeface="Roboto"/>
+              </a:defRPr>
+            </a:pPr>
             <a:r>
               <a:rPr sz="3000" b="1">
                 <a:solidFill>
                   <a:srgbClr val="2F7A5D"/>
                 </a:solidFill>
-                <a:latin typeface="Arial"/>
+                <a:latin typeface="Roboto"/>
               </a:rPr>
               <a:t>$648,400</a:t>
             </a:r>
@@ -18157,12 +20151,17 @@
           </a:bodyPr>
           <a:lstStyle/>
           <a:p>
+            <a:pPr>
+              <a:defRPr>
+                <a:latin typeface="Roboto"/>
+              </a:defRPr>
+            </a:pPr>
             <a:r>
               <a:rPr sz="1100" b="0">
                 <a:solidFill>
                   <a:srgbClr val="5F6F63"/>
                 </a:solidFill>
-                <a:latin typeface="Arial"/>
+                <a:latin typeface="Roboto"/>
               </a:rPr>
               <a:t>same period last year: not in the data</a:t>
             </a:r>
@@ -18210,7 +20209,11 @@
           <a:bodyPr rtlCol="0" anchor="ctr"/>
           <a:lstStyle/>
           <a:p>
-            <a:pPr algn="ctr"/>
+            <a:pPr algn="ctr">
+              <a:defRPr>
+                <a:latin typeface="Roboto"/>
+              </a:defRPr>
+            </a:pPr>
           </a:p>
         </p:txBody>
       </p:sp>
@@ -18236,12 +20239,17 @@
           </a:bodyPr>
           <a:lstStyle/>
           <a:p>
+            <a:pPr>
+              <a:defRPr>
+                <a:latin typeface="Roboto"/>
+              </a:defRPr>
+            </a:pPr>
             <a:r>
               <a:rPr sz="1200" b="0">
                 <a:solidFill>
                   <a:srgbClr val="5F6F63"/>
                 </a:solidFill>
-                <a:latin typeface="Arial"/>
+                <a:latin typeface="Roboto"/>
               </a:rPr>
               <a:t>Gross margin, year to date</a:t>
             </a:r>
@@ -18270,12 +20278,17 @@
           </a:bodyPr>
           <a:lstStyle/>
           <a:p>
+            <a:pPr>
+              <a:defRPr>
+                <a:latin typeface="Roboto"/>
+              </a:defRPr>
+            </a:pPr>
             <a:r>
               <a:rPr sz="3000" b="1">
                 <a:solidFill>
                   <a:srgbClr val="2F7A5D"/>
                 </a:solidFill>
-                <a:latin typeface="Arial"/>
+                <a:latin typeface="Roboto"/>
               </a:rPr>
               <a:t>27.0%</a:t>
             </a:r>
@@ -18304,12 +20317,17 @@
           </a:bodyPr>
           <a:lstStyle/>
           <a:p>
+            <a:pPr>
+              <a:defRPr>
+                <a:latin typeface="Roboto"/>
+              </a:defRPr>
+            </a:pPr>
             <a:r>
               <a:rPr sz="1100" b="0">
                 <a:solidFill>
                   <a:srgbClr val="5F6F63"/>
                 </a:solidFill>
-                <a:latin typeface="Arial"/>
+                <a:latin typeface="Roboto"/>
               </a:rPr>
               <a:t>$175,364 before overheads</a:t>
             </a:r>
@@ -18338,12 +20356,17 @@
           </a:bodyPr>
           <a:lstStyle/>
           <a:p>
+            <a:pPr>
+              <a:defRPr>
+                <a:latin typeface="Roboto"/>
+              </a:defRPr>
+            </a:pPr>
             <a:r>
               <a:rPr sz="900" b="0">
                 <a:solidFill>
                   <a:srgbClr val="5F6F63"/>
                 </a:solidFill>
-                <a:latin typeface="Arial"/>
+                <a:latin typeface="Roboto"/>
               </a:rPr>
               <a:t>growth.pptx</a:t>
             </a:r>
@@ -18372,13 +20395,17 @@
           </a:bodyPr>
           <a:lstStyle/>
           <a:p>
-            <a:pPr algn="ctr"/>
+            <a:pPr algn="ctr">
+              <a:defRPr>
+                <a:latin typeface="Roboto"/>
+              </a:defRPr>
+            </a:pPr>
             <a:r>
               <a:rPr sz="900" b="0">
                 <a:solidFill>
                   <a:srgbClr val="5F6F63"/>
                 </a:solidFill>
-                <a:latin typeface="Arial"/>
+                <a:latin typeface="Roboto"/>
               </a:rPr>
               <a:t>Data retrieved 2pm, Tue 6 Oct 2026 · Sample data</a:t>
             </a:r>
@@ -18407,13 +20434,17 @@
           </a:bodyPr>
           <a:lstStyle/>
           <a:p>
-            <a:pPr algn="r"/>
+            <a:pPr algn="r">
+              <a:defRPr>
+                <a:latin typeface="Roboto"/>
+              </a:defRPr>
+            </a:pPr>
             <a:r>
               <a:rPr sz="900" b="0">
                 <a:solidFill>
                   <a:srgbClr val="5F6F63"/>
                 </a:solidFill>
-                <a:latin typeface="Arial"/>
+                <a:latin typeface="Roboto"/>
               </a:rPr>
               <a:t>Slide 8 of 27</a:t>
             </a:r>
@@ -18477,7 +20508,11 @@
           <a:bodyPr rtlCol="0" anchor="ctr"/>
           <a:lstStyle/>
           <a:p>
-            <a:pPr algn="ctr"/>
+            <a:pPr algn="ctr">
+              <a:defRPr>
+                <a:latin typeface="Roboto"/>
+              </a:defRPr>
+            </a:pPr>
           </a:p>
         </p:txBody>
       </p:sp>
@@ -18503,12 +20538,17 @@
           </a:bodyPr>
           <a:lstStyle/>
           <a:p>
+            <a:pPr>
+              <a:defRPr>
+                <a:latin typeface="Roboto"/>
+              </a:defRPr>
+            </a:pPr>
             <a:r>
               <a:rPr sz="1000" b="0">
                 <a:solidFill>
                   <a:srgbClr val="5F6F63"/>
                 </a:solidFill>
-                <a:latin typeface="Arial"/>
+                <a:latin typeface="Roboto"/>
               </a:rPr>
               <a:t>SME sample businesses · Which products and services are growing?</a:t>
             </a:r>
@@ -18537,12 +20577,17 @@
           </a:bodyPr>
           <a:lstStyle/>
           <a:p>
+            <a:pPr>
+              <a:defRPr>
+                <a:latin typeface="Roboto"/>
+              </a:defRPr>
+            </a:pPr>
             <a:r>
               <a:rPr sz="2400" b="1">
                 <a:solidFill>
                   <a:srgbClr val="25342A"/>
                 </a:solidFill>
-                <a:latin typeface="Arial"/>
+                <a:latin typeface="Roboto"/>
               </a:rPr>
               <a:t>What it shows · Trades · Line: Installations</a:t>
             </a:r>
@@ -18590,7 +20635,11 @@
           <a:bodyPr rtlCol="0" anchor="ctr"/>
           <a:lstStyle/>
           <a:p>
-            <a:pPr algn="ctr"/>
+            <a:pPr algn="ctr">
+              <a:defRPr>
+                <a:latin typeface="Roboto"/>
+              </a:defRPr>
+            </a:pPr>
           </a:p>
         </p:txBody>
       </p:sp>
@@ -18616,12 +20665,17 @@
           </a:bodyPr>
           <a:lstStyle/>
           <a:p>
+            <a:pPr>
+              <a:defRPr>
+                <a:latin typeface="Roboto"/>
+              </a:defRPr>
+            </a:pPr>
             <a:r>
               <a:rPr sz="1100" b="1">
                 <a:solidFill>
                   <a:srgbClr val="5F6F63"/>
                 </a:solidFill>
-                <a:latin typeface="Arial"/>
+                <a:latin typeface="Roboto"/>
               </a:rPr>
               <a:t>WHAT IT SHOWS</a:t>
             </a:r>
@@ -18650,12 +20704,17 @@
           </a:bodyPr>
           <a:lstStyle/>
           <a:p>
+            <a:pPr>
+              <a:defRPr>
+                <a:latin typeface="Roboto"/>
+              </a:defRPr>
+            </a:pPr>
             <a:r>
               <a:rPr sz="1600" b="0">
                 <a:solidFill>
                   <a:srgbClr val="25342A"/>
                 </a:solidFill>
-                <a:latin typeface="Arial"/>
+                <a:latin typeface="Roboto"/>
               </a:rPr>
               <a:t>Installations brought in $648,400 this financial year to date, at a 27.0% gross margin (below the 37.1% overall).</a:t>
             </a:r>
@@ -18703,7 +20762,11 @@
           <a:bodyPr rtlCol="0" anchor="ctr"/>
           <a:lstStyle/>
           <a:p>
-            <a:pPr algn="ctr"/>
+            <a:pPr algn="ctr">
+              <a:defRPr>
+                <a:latin typeface="Roboto"/>
+              </a:defRPr>
+            </a:pPr>
           </a:p>
         </p:txBody>
       </p:sp>
@@ -18729,12 +20792,17 @@
           </a:bodyPr>
           <a:lstStyle/>
           <a:p>
+            <a:pPr>
+              <a:defRPr>
+                <a:latin typeface="Roboto"/>
+              </a:defRPr>
+            </a:pPr>
             <a:r>
               <a:rPr sz="1100" b="1">
                 <a:solidFill>
                   <a:srgbClr val="5F6F63"/>
                 </a:solidFill>
-                <a:latin typeface="Arial"/>
+                <a:latin typeface="Roboto"/>
               </a:rPr>
               <a:t>WHAT YOU'D DO ABOUT IT</a:t>
             </a:r>
@@ -18763,12 +20831,17 @@
           </a:bodyPr>
           <a:lstStyle/>
           <a:p>
+            <a:pPr>
+              <a:defRPr>
+                <a:latin typeface="Roboto"/>
+              </a:defRPr>
+            </a:pPr>
             <a:r>
               <a:rPr sz="1600" b="0">
                 <a:solidFill>
                   <a:srgbClr val="25342A"/>
                 </a:solidFill>
-                <a:latin typeface="Arial"/>
+                <a:latin typeface="Roboto"/>
               </a:rPr>
               <a:t>Installations: 27.0% gross margin, below the 38.4% needed to cover overheads.</a:t>
             </a:r>
@@ -18797,12 +20870,17 @@
           </a:bodyPr>
           <a:lstStyle/>
           <a:p>
+            <a:pPr>
+              <a:defRPr>
+                <a:latin typeface="Roboto"/>
+              </a:defRPr>
+            </a:pPr>
             <a:r>
               <a:rPr sz="900" b="0">
                 <a:solidFill>
                   <a:srgbClr val="5F6F63"/>
                 </a:solidFill>
-                <a:latin typeface="Arial"/>
+                <a:latin typeface="Roboto"/>
               </a:rPr>
               <a:t>growth.pptx</a:t>
             </a:r>
@@ -18831,13 +20909,17 @@
           </a:bodyPr>
           <a:lstStyle/>
           <a:p>
-            <a:pPr algn="ctr"/>
+            <a:pPr algn="ctr">
+              <a:defRPr>
+                <a:latin typeface="Roboto"/>
+              </a:defRPr>
+            </a:pPr>
             <a:r>
               <a:rPr sz="900" b="0">
                 <a:solidFill>
                   <a:srgbClr val="5F6F63"/>
                 </a:solidFill>
-                <a:latin typeface="Arial"/>
+                <a:latin typeface="Roboto"/>
               </a:rPr>
               <a:t>Data retrieved 2pm, Tue 6 Oct 2026 · Sample data</a:t>
             </a:r>
@@ -18866,13 +20948,17 @@
           </a:bodyPr>
           <a:lstStyle/>
           <a:p>
-            <a:pPr algn="r"/>
+            <a:pPr algn="r">
+              <a:defRPr>
+                <a:latin typeface="Roboto"/>
+              </a:defRPr>
+            </a:pPr>
             <a:r>
               <a:rPr sz="900" b="0">
                 <a:solidFill>
                   <a:srgbClr val="5F6F63"/>
                 </a:solidFill>
-                <a:latin typeface="Arial"/>
+                <a:latin typeface="Roboto"/>
               </a:rPr>
               <a:t>Slide 9 of 27</a:t>
             </a:r>

--- a/media/exports/reports/2026-01/growth.pptx
+++ b/media/exports/reports/2026-01/growth.pptx
@@ -5719,7 +5719,7 @@
                 </a:solidFill>
                 <a:latin typeface="Roboto"/>
               </a:rPr>
-              <a:t>Call-outs and repairs: 43.7% gross margin, 5.2 points clear of the 38.4% overheads need.</a:t>
+              <a:t>Call-outs and repairs: 43.7% gross margin, 8.7 points over the 35.0% target ($14,429 ahead on $166,522 this financial year to date).</a:t>
             </a:r>
           </a:p>
         </p:txBody>
@@ -6018,7 +6018,7 @@
                 </a:solidFill>
                 <a:latin typeface="Roboto"/>
               </a:rPr>
-              <a:t>Gross margin = revenue less direct cost (materials, subcontractors and time at cost for trades; contractors and consultant time for services), before overheads. Growth is year on year: each month against the same month a year earlier.</a:t>
+              <a:t>Growth is year on year: each month against the same month a year earlier.</a:t>
             </a:r>
           </a:p>
         </p:txBody>
@@ -6335,7 +6335,7 @@
                 </a:solidFill>
                 <a:latin typeface="Roboto"/>
               </a:rPr>
-              <a:t>Gross margin = revenue less direct cost (materials, subcontractors and time at cost for trades; contractors and consultant time for services), before overheads. Growth is year on year: each month against the same month a year earlier.</a:t>
+              <a:t>Growth is year on year: each month against the same month a year earlier.</a:t>
             </a:r>
           </a:p>
         </p:txBody>
@@ -10101,7 +10101,7 @@
                 </a:solidFill>
                 <a:latin typeface="Roboto"/>
               </a:rPr>
-              <a:t>Training: 75.7% gross margin, the most profitable work you do. Projects: 61.3% gross margin, below the 64.6% needed to cover overheads.</a:t>
+              <a:t>Projects: 61.3% gross margin, 21.3 points over the 40.0% target ($69,112 ahead on $324,020 this financial year to date). Training: 75.7% gross margin, 35.7 points over the 40.0% target ($17,940 ahead on $50,200 this financial year to date).</a:t>
             </a:r>
           </a:p>
         </p:txBody>
@@ -11760,7 +11760,7 @@
                 </a:solidFill>
                 <a:latin typeface="Roboto"/>
               </a:rPr>
-              <a:t>Projects: 61.3% gross margin, below the 64.6% needed to cover overheads.</a:t>
+              <a:t>Projects: 61.3% gross margin, 21.3 points over the 40.0% target ($69,112 ahead on $324,020 this financial year to date).</a:t>
             </a:r>
           </a:p>
         </p:txBody>
@@ -13032,7 +13032,7 @@
                 </a:solidFill>
                 <a:latin typeface="Roboto"/>
               </a:rPr>
-              <a:t>Retainers: 66.2% gross margin, 1.6 points clear of the 64.6% overheads need.</a:t>
+              <a:t>Retainers: 66.2% gross margin, 26.2 points over the 40.0% target ($39,360 ahead on $150,100 this financial year to date).</a:t>
             </a:r>
           </a:p>
         </p:txBody>
@@ -14304,7 +14304,7 @@
                 </a:solidFill>
                 <a:latin typeface="Roboto"/>
               </a:rPr>
-              <a:t>Training: 75.7% gross margin, 11.1 points clear of the 64.6% overheads need.</a:t>
+              <a:t>Training: 75.7% gross margin, 35.7 points over the 40.0% target ($17,940 ahead on $50,200 this financial year to date).</a:t>
             </a:r>
           </a:p>
         </p:txBody>
@@ -14603,7 +14603,7 @@
                 </a:solidFill>
                 <a:latin typeface="Roboto"/>
               </a:rPr>
-              <a:t>Gross margin = revenue less direct cost (materials, subcontractors and time at cost for trades; contractors and consultant time for services), before overheads. Growth is year on year: each month against the same month a year earlier.</a:t>
+              <a:t>Growth is year on year: each month against the same month a year earlier.</a:t>
             </a:r>
           </a:p>
         </p:txBody>
@@ -14920,7 +14920,7 @@
                 </a:solidFill>
                 <a:latin typeface="Roboto"/>
               </a:rPr>
-              <a:t>Gross margin = revenue less direct cost (materials, subcontractors and time at cost for trades; contractors and consultant time for services), before overheads. Growth is year on year: each month against the same month a year earlier.</a:t>
+              <a:t>Growth is year on year: each month against the same month a year earlier.</a:t>
             </a:r>
           </a:p>
         </p:txBody>
@@ -18299,7 +18299,7 @@
                 </a:solidFill>
                 <a:latin typeface="Roboto"/>
               </a:rPr>
-              <a:t>Maintenance contracts: 59.5% gross margin, the most profitable work you do. Installations: 27.0% gross margin, below the 38.4% needed to cover overheads.</a:t>
+              <a:t>Installations: 27.0% gross margin, 8.0 points under the 35.0% target: about $51,576 on $648,400 of revenue this financial year to date. It's below the 38.4% needed to cover overheads, too. Maintenance contracts: 59.5% gross margin, 24.5 points over the 35.0% target ($59,418 ahead on $242,800 this financial year to date).</a:t>
             </a:r>
           </a:p>
         </p:txBody>
@@ -19571,7 +19571,7 @@
                 </a:solidFill>
                 <a:latin typeface="Roboto"/>
               </a:rPr>
-              <a:t>Maintenance contracts: 59.5% gross margin, 21.0 points clear of the 38.4% overheads need.</a:t>
+              <a:t>Maintenance contracts: 59.5% gross margin, 24.5 points over the 35.0% target ($59,418 ahead on $242,800 this financial year to date).</a:t>
             </a:r>
           </a:p>
         </p:txBody>
@@ -20843,7 +20843,7 @@
                 </a:solidFill>
                 <a:latin typeface="Roboto"/>
               </a:rPr>
-              <a:t>Installations: 27.0% gross margin, below the 38.4% needed to cover overheads.</a:t>
+              <a:t>Installations: 27.0% gross margin, 8.0 points under the 35.0% target: about $51,576 on $648,400 of revenue this financial year to date. It's below the 38.4% needed to cover overheads, too.</a:t>
             </a:r>
           </a:p>
         </p:txBody>
